--- a/pptx/ileri3.pptx
+++ b/pptx/ileri3.pptx
@@ -4,22 +4,22 @@
   <p:sldMasterIdLst>
     <p:sldMasterId id="2147483648" r:id="rId1"/>
   </p:sldMasterIdLst>
+  <p:notesMasterIdLst>
+    <p:notesMasterId r:id="rId12"/>
+  </p:notesMasterIdLst>
   <p:sldIdLst>
     <p:sldId id="256" r:id="rId2"/>
     <p:sldId id="257" r:id="rId3"/>
-    <p:sldId id="265" r:id="rId16"/>
+    <p:sldId id="265" r:id="rId4"/>
     <p:sldId id="259" r:id="rId5"/>
-    <p:sldId id="258" r:id="rId4"/>
-    <p:sldId id="260" r:id="rId6"/>
+    <p:sldId id="258" r:id="rId6"/>
+    <p:sldId id="260" r:id="rId7"/>
     <p:sldId id="262" r:id="rId8"/>
-    <p:sldId id="261" r:id="rId7"/>
-    <p:sldId id="263" r:id="rId9"/>
-    <p:sldId id="264" r:id="rId10"/>
+    <p:sldId id="261" r:id="rId9"/>
+    <p:sldId id="263" r:id="rId10"/>
+    <p:sldId id="264" r:id="rId11"/>
   </p:sldIdLst>
-  <p:notesMasterIdLst>
-    <p:notesMasterId r:id="rId11"/>
-  </p:notesMasterIdLst>
-  <p:sldSz cx="9144000" cy="5143500"/>
+  <p:sldSz cx="9144000" cy="5143500" type="screen16x9"/>
   <p:notesSz cx="5143500" cy="9144000"/>
   <p:defaultTextStyle>
     <a:lvl1pPr marL="0" algn="l" defTabSz="914400" rtl="0" eaLnBrk="1" latinLnBrk="0" hangingPunct="1">
@@ -113,6 +113,11 @@
       </a:defRPr>
     </a:lvl9pPr>
   </p:defaultTextStyle>
+  <p:extLst>
+    <p:ext uri="{EFAFB233-063F-42B5-8137-9DF3F51BA10A}">
+      <p15:sldGuideLst xmlns:p15="http://schemas.microsoft.com/office/powerpoint/2012/main"/>
+    </p:ext>
+  </p:extLst>
 </p:presentation>
 </file>
 
@@ -138,234 +143,10 @@
           <a:chExt cx="0" cy="0"/>
         </a:xfrm>
       </p:grpSpPr>
-      <p:sp>
-        <p:nvSpPr>
-          <p:cNvPr id="2" name="Header Placeholder 1"/>
-          <p:cNvSpPr>
-            <a:spLocks noGrp="1"/>
-          </p:cNvSpPr>
-          <p:nvPr>
-            <p:ph type="hdr" sz="quarter"/>
-          </p:nvPr>
-        </p:nvSpPr>
-        <p:spPr>
-          <a:xfrm>
-            <a:off x="0" y="0"/>
-            <a:ext cx="2971800" cy="458788"/>
-          </a:xfrm>
-          <a:prstGeom prst="rect">
-            <a:avLst/>
-          </a:prstGeom>
-        </p:spPr>
-        <p:txBody>
-          <a:bodyPr vert="horz" lIns="91440" tIns="45720" rIns="91440" bIns="45720" rtlCol="0"/>
-          <a:lstStyle>
-            <a:lvl1pPr algn="l">
-              <a:defRPr sz="1200"/>
-            </a:lvl1pPr>
-          </a:lstStyle>
-          <a:p>
-            <a:endParaRPr lang="en-US"/>
-          </a:p>
-        </p:txBody>
-      </p:sp>
-      <p:sp>
-        <p:nvSpPr>
-          <p:cNvPr id="3" name="Date Placeholder 2"/>
-          <p:cNvSpPr>
-            <a:spLocks noGrp="1"/>
-          </p:cNvSpPr>
-          <p:nvPr>
-            <p:ph type="dt" idx="1"/>
-          </p:nvPr>
-        </p:nvSpPr>
-        <p:spPr>
-          <a:xfrm>
-            <a:off x="3884613" y="0"/>
-            <a:ext cx="2971800" cy="458788"/>
-          </a:xfrm>
-          <a:prstGeom prst="rect">
-            <a:avLst/>
-          </a:prstGeom>
-        </p:spPr>
-        <p:txBody>
-          <a:bodyPr vert="horz" lIns="91440" tIns="45720" rIns="91440" bIns="45720" rtlCol="0"/>
-          <a:lstStyle>
-            <a:lvl1pPr algn="r">
-              <a:defRPr sz="1200"/>
-            </a:lvl1pPr>
-          </a:lstStyle>
-          <a:p>
-            <a:fld id="{5282F153-3F37-0F45-9E97-73ACFA13230C}" type="datetimeFigureOut">
-              <a:rPr lang="en-US"/>
-              <a:t>7/23/19</a:t>
-            </a:fld>
-            <a:endParaRPr lang="en-US"/>
-          </a:p>
-        </p:txBody>
-      </p:sp>
-      <p:sp>
-        <p:nvSpPr>
-          <p:cNvPr id="4" name="Slide Image Placeholder 3"/>
-          <p:cNvSpPr>
-            <a:spLocks noGrp="1" noRot="1" noChangeAspect="1"/>
-          </p:cNvSpPr>
-          <p:nvPr>
-            <p:ph type="sldImg" idx="2"/>
-          </p:nvPr>
-        </p:nvSpPr>
-        <p:spPr>
-          <a:xfrm>
-            <a:off x="685800" y="1143000"/>
-            <a:ext cx="5486400" cy="3086100"/>
-          </a:xfrm>
-          <a:prstGeom prst="rect">
-            <a:avLst/>
-          </a:prstGeom>
-          <a:noFill/>
-          <a:ln w="12700">
-            <a:solidFill>
-              <a:prstClr val="black"/>
-            </a:solidFill>
-          </a:ln>
-        </p:spPr>
-        <p:txBody>
-          <a:bodyPr vert="horz" lIns="91440" tIns="45720" rIns="91440" bIns="45720" rtlCol="0" anchor="ctr"/>
-          <a:lstStyle/>
-          <a:p>
-            <a:endParaRPr lang="en-US"/>
-          </a:p>
-        </p:txBody>
-      </p:sp>
-      <p:sp>
-        <p:nvSpPr>
-          <p:cNvPr id="5" name="Notes Placeholder 4"/>
-          <p:cNvSpPr>
-            <a:spLocks noGrp="1"/>
-          </p:cNvSpPr>
-          <p:nvPr>
-            <p:ph type="body" sz="quarter" idx="3"/>
-          </p:nvPr>
-        </p:nvSpPr>
-        <p:spPr>
-          <a:xfrm>
-            <a:off x="685800" y="4400550"/>
-            <a:ext cx="5486400" cy="3600450"/>
-          </a:xfrm>
-          <a:prstGeom prst="rect">
-            <a:avLst/>
-          </a:prstGeom>
-        </p:spPr>
-        <p:txBody>
-          <a:bodyPr vert="horz" lIns="91440" tIns="45720" rIns="91440" bIns="45720" rtlCol="0"/>
-          <a:lstStyle/>
-          <a:p>
-            <a:pPr lvl="0"/>
-            <a:r>
-              <a:rPr lang="en-US"/>
-              <a:t>Click to edit Master text styles</a:t>
-            </a:r>
-          </a:p>
-          <a:p>
-            <a:pPr lvl="1"/>
-            <a:r>
-              <a:rPr lang="en-US"/>
-              <a:t>Second level</a:t>
-            </a:r>
-          </a:p>
-          <a:p>
-            <a:pPr lvl="2"/>
-            <a:r>
-              <a:rPr lang="en-US"/>
-              <a:t>Third level</a:t>
-            </a:r>
-          </a:p>
-          <a:p>
-            <a:pPr lvl="3"/>
-            <a:r>
-              <a:rPr lang="en-US"/>
-              <a:t>Fourth level</a:t>
-            </a:r>
-          </a:p>
-          <a:p>
-            <a:pPr lvl="4"/>
-            <a:r>
-              <a:rPr lang="en-US"/>
-              <a:t>Fifth level</a:t>
-            </a:r>
-          </a:p>
-        </p:txBody>
-      </p:sp>
-      <p:sp>
-        <p:nvSpPr>
-          <p:cNvPr id="6" name="Footer Placeholder 5"/>
-          <p:cNvSpPr>
-            <a:spLocks noGrp="1"/>
-          </p:cNvSpPr>
-          <p:nvPr>
-            <p:ph type="ftr" sz="quarter" idx="4"/>
-          </p:nvPr>
-        </p:nvSpPr>
-        <p:spPr>
-          <a:xfrm>
-            <a:off x="0" y="8685213"/>
-            <a:ext cx="2971800" cy="458787"/>
-          </a:xfrm>
-          <a:prstGeom prst="rect">
-            <a:avLst/>
-          </a:prstGeom>
-        </p:spPr>
-        <p:txBody>
-          <a:bodyPr vert="horz" lIns="91440" tIns="45720" rIns="91440" bIns="45720" rtlCol="0" anchor="b"/>
-          <a:lstStyle>
-            <a:lvl1pPr algn="l">
-              <a:defRPr sz="1200"/>
-            </a:lvl1pPr>
-          </a:lstStyle>
-          <a:p>
-            <a:endParaRPr lang="en-US"/>
-          </a:p>
-        </p:txBody>
-      </p:sp>
-      <p:sp>
-        <p:nvSpPr>
-          <p:cNvPr id="7" name="Slide Number Placeholder 6"/>
-          <p:cNvSpPr>
-            <a:spLocks noGrp="1"/>
-          </p:cNvSpPr>
-          <p:nvPr>
-            <p:ph type="sldNum" sz="quarter" idx="5"/>
-          </p:nvPr>
-        </p:nvSpPr>
-        <p:spPr>
-          <a:xfrm>
-            <a:off x="3884613" y="8685213"/>
-            <a:ext cx="2971800" cy="458787"/>
-          </a:xfrm>
-          <a:prstGeom prst="rect">
-            <a:avLst/>
-          </a:prstGeom>
-        </p:spPr>
-        <p:txBody>
-          <a:bodyPr vert="horz" lIns="91440" tIns="45720" rIns="91440" bIns="45720" rtlCol="0" anchor="b"/>
-          <a:lstStyle>
-            <a:lvl1pPr algn="r">
-              <a:defRPr sz="1200"/>
-            </a:lvl1pPr>
-          </a:lstStyle>
-          <a:p>
-            <a:fld id="{CE5E9CC1-C706-0F49-92D6-E571CC5EEA8F}" type="slidenum">
-              <a:rPr lang="en-US"/>
-              <a:t>‹#›</a:t>
-            </a:fld>
-            <a:endParaRPr lang="en-US"/>
-          </a:p>
-        </p:txBody>
-      </p:sp>
     </p:spTree>
     <p:extLst>
       <p:ext uri="{BB962C8B-B14F-4D97-AF65-F5344CB8AC3E}">
-        <p14:creationId xmlns:p14="http://schemas.microsoft.com/office/powerpoint/2010/main" val="1024086991"/>
+        <p14:creationId xmlns:p14="http://schemas.microsoft.com/office/powerpoint/2010/main" val="4264818199"/>
       </p:ext>
     </p:extLst>
   </p:cSld>
@@ -598,7 +379,7 @@
           <a:p>
             <a:r>
               <a:rPr lang="tr-TR" dirty="0"/>
-              <a:t>Onlu yılları okut: 1960'lı yıllar = altmışlı yıllar, 1980'li yıllar = seksenli yıllar. Ek kuralını hatırlat: ek okunuşa göre gelir: altmış → 1960'lı, seksen → 1980'li, doksan → 1990'lı, yetmiş → 1970'li. Yüzyılı açıkla: 2001'den bu yana 21. yüzyıldayız (yirmi birinci yüzyıl). Örnek cümleleri birlikte oku. Sonra her öğrenci ailesinin üç neslini anlatsın: 'Dedem ...'de doğdu, ...'li/'lı yıllarda gençti.'</a:t>
+              <a:t>'Görev tamamlandı dedektifler!' de. Kartları sırayla okut: onlu yıllar, eskiden/şimdi, toplumsal dönüşüm, saygı analizi, kuşak aktarımı. 'Bir sonraki görevde görüşmek üzere!' diyerek kapat.</a:t>
             </a:r>
           </a:p>
         </p:txBody>
@@ -772,7 +553,7 @@
           <a:p>
             <a:r>
               <a:rPr lang="tr-TR" dirty="0"/>
-              <a:t>Tartışma slaytı. Birinci soruyu oku, öğrencilere düşünme süresi ver. İkinci soruda 'Abi/Abla' demenin yakınlık ve saygıyı birlikte taşıdığını hatırlat. Yaşadıkları ülkede büyüklere nasıl seslenildiğini sor. Son soruda hem iyi hem zor yanları dinle, farklı görüşlere saygıyla yaklaşılmasını iste.</a:t>
+              <a:t>Onlu yılları okut: 1960'lı yıllar = altmışlı yıllar, 1980'li yıllar = seksenli yıllar. Ek kuralını hatırlat: ek okunuşa göre gelir: altmış → 1960'lı, seksen → 1980'li, doksan → 1990'lı, yetmiş → 1970'li. Yüzyılı açıkla: 2001'den bu yana 21. yüzyıldayız (yirmi birinci yüzyıl). Örnek cümleleri birlikte oku. Sonra her öğrenci ailesinin üç neslini anlatsın: 'Dedem ...'de doğdu, ...'li/'lı yıllarda gençti.'</a:t>
             </a:r>
           </a:p>
         </p:txBody>
@@ -946,7 +727,7 @@
           <a:p>
             <a:r>
               <a:rPr lang="tr-TR" dirty="0"/>
-              <a:t>İskeleti birlikte oku. 'Bizim nesil' tekil olduğu için fiilin 'büyüdü' olduğuna dikkat çek. 'Biz' dersek 'büyüdük' deriz. Onlu yıl ekini hatırlat ('li/'lı). Örnek paragrafı birlikte oku, 'oysa' ve 'ancak' bağlayıcılarını göster. Ardından öğrenciler iskeleti kendi aileleriyle doldursun.</a:t>
+              <a:t>Tartışma slaytı. Birinci soruyu oku, öğrencilere düşünme süresi ver. İkinci soruda 'Abi/Abla' demenin yakınlık ve saygıyı birlikte taşıdığını hatırlat. Yaşadıkları ülkede büyüklere nasıl seslenildiğini sor. Son soruda hem iyi hem zor yanları dinle, farklı görüşlere saygıyla yaklaşılmasını iste.</a:t>
             </a:r>
           </a:p>
         </p:txBody>
@@ -1033,7 +814,7 @@
           <a:p>
             <a:r>
               <a:rPr lang="tr-TR" dirty="0"/>
-              <a:t>Yazı görevini açıkla: bir sayfalık bir karşılaştırma yazısı. Üç maddeyi sırayla oku. Onlu yıllarla tarih vermelerini, 'Eskiden …, oysa şimdi …' ve 'buna karşın' yapılarını kullanmalarını, sonunda yaşadıkları ülke ile Türkiye'yi karşılaştırmalarını iste. Gerekirse dil iskeleti slaytına geri dön.</a:t>
+              <a:t>İskeleti birlikte oku. 'Bizim nesil' tekil olduğu için fiilin 'büyüdü' olduğuna dikkat çek. 'Biz' dersek 'büyüdük' deriz. Onlu yıl ekini hatırlat ('li/'lı). Örnek paragrafı birlikte oku, 'oysa' ve 'ancak' bağlayıcılarını göster. Ardından öğrenciler iskeleti kendi aileleriyle doldursun.</a:t>
             </a:r>
           </a:p>
         </p:txBody>
@@ -1207,7 +988,7 @@
           <a:p>
             <a:r>
               <a:rPr lang="tr-TR" dirty="0"/>
-              <a:t>Görevi adım adım anlat. Birinci adımdaki soruların 'siz' ile sorulduğuna dikkat çek. Görüşme notlarının rapora temel olacağını söyle. Raporlarda kendi görüşlerini gerekçeleriyle savunmalarını iste. Bir sonraki derste raporları sınıfta tartışacaksınız.</a:t>
+              <a:t>Yazı görevini açıkla: bir sayfalık bir karşılaştırma yazısı. Üç maddeyi sırayla oku. Onlu yıllarla tarih vermelerini, 'Eskiden …, oysa şimdi …' ve 'buna karşın' yapılarını kullanmalarını, sonunda yaşadıkları ülke ile Türkiye'yi karşılaştırmalarını iste. Gerekirse dil iskeleti slaytına geri dön.</a:t>
             </a:r>
           </a:p>
         </p:txBody>
@@ -1294,7 +1075,7 @@
           <a:p>
             <a:r>
               <a:rPr lang="tr-TR" dirty="0"/>
-              <a:t>'Görev tamamlandı dedektifler!' de. Kartları sırayla okut: onlu yıllar, eskiden/şimdi, toplumsal dönüşüm, saygı analizi, kuşak aktarımı. 'Bir sonraki görevde görüşmek üzere!' diyerek kapat.</a:t>
+              <a:t>Görevi adım adım anlat. Birinci adımdaki soruların 'siz' ile sorulduğuna dikkat çek. Görüşme notlarının rapora temel olacağını söyle. Raporlarda kendi görüşlerini gerekçeleriyle savunmalarını iste. Bir sonraki derste raporları sınıfta tartışacaksınız.</a:t>
             </a:r>
           </a:p>
         </p:txBody>
@@ -1368,6 +1149,11 @@
 <file path=ppt/slideMasters/slideMaster1.xml><?xml version="1.0" encoding="utf-8"?>
 <p:sldMaster xmlns:a="http://schemas.openxmlformats.org/drawingml/2006/main" xmlns:r="http://schemas.openxmlformats.org/officeDocument/2006/relationships" xmlns:p="http://schemas.openxmlformats.org/presentationml/2006/main">
   <p:cSld>
+    <p:bg>
+      <p:bgRef idx="1001">
+        <a:schemeClr val="bg1"/>
+      </p:bgRef>
+    </p:bg>
     <p:spTree>
       <p:nvGrpSpPr>
         <p:cNvPr id="1" name=""/>
@@ -1700,7 +1486,7 @@
           <a:bodyPr wrap="square" rtlCol="0" anchor="ctr"/>
           <a:lstStyle/>
           <a:p>
-            <a:pPr algn="ctr" indent="0" marL="0">
+            <a:pPr marL="0" indent="0" algn="ctr">
               <a:buNone/>
             </a:pPr>
             <a:r>
@@ -1736,7 +1522,7 @@
           <a:bodyPr wrap="square" rtlCol="0" anchor="ctr"/>
           <a:lstStyle/>
           <a:p>
-            <a:pPr algn="ctr" indent="0" marL="0">
+            <a:pPr marL="0" indent="0" algn="ctr">
               <a:buNone/>
             </a:pPr>
             <a:r>
@@ -1772,7 +1558,7 @@
           <a:bodyPr wrap="square" rtlCol="0" anchor="ctr"/>
           <a:lstStyle/>
           <a:p>
-            <a:pPr algn="ctr" indent="0" marL="0">
+            <a:pPr marL="0" indent="0" algn="ctr">
               <a:buNone/>
             </a:pPr>
             <a:r>
@@ -1808,7 +1594,7 @@
           <a:bodyPr wrap="square" rtlCol="0" anchor="ctr"/>
           <a:lstStyle/>
           <a:p>
-            <a:pPr algn="ctr" indent="0" marL="0">
+            <a:pPr marL="0" indent="0" algn="ctr">
               <a:buNone/>
             </a:pPr>
             <a:r>
@@ -1844,7 +1630,7 @@
           <a:bodyPr wrap="square" rtlCol="0" anchor="ctr"/>
           <a:lstStyle/>
           <a:p>
-            <a:pPr algn="ctr" indent="0" marL="0">
+            <a:pPr marL="0" indent="0" algn="ctr">
               <a:buNone/>
             </a:pPr>
             <a:r>
@@ -1880,7 +1666,7 @@
           <a:bodyPr wrap="square" rtlCol="0" anchor="ctr"/>
           <a:lstStyle/>
           <a:p>
-            <a:pPr algn="ctr" indent="0" marL="0">
+            <a:pPr marL="0" indent="0" algn="ctr">
               <a:buNone/>
             </a:pPr>
             <a:r>
@@ -1914,7 +1700,7 @@
           </a:solidFill>
           <a:ln/>
           <a:effectLst>
-            <a:outerShdw sx="100000" sy="100000" kx="0" ky="0" algn="bl" rotWithShape="0" blurRad="76200" dist="25400" dir="5400000">
+            <a:outerShdw blurRad="76200" dist="25400" dir="5400000" algn="bl" rotWithShape="0">
               <a:srgbClr val="1A2E5A">
                 <a:alpha val="18000"/>
               </a:srgbClr>
@@ -1943,7 +1729,7 @@
           <a:bodyPr wrap="square" rtlCol="0" anchor="ctr"/>
           <a:lstStyle/>
           <a:p>
-            <a:pPr algn="ctr" indent="0" marL="0">
+            <a:pPr marL="0" indent="0" algn="ctr">
               <a:buNone/>
             </a:pPr>
             <a:r>
@@ -1952,7 +1738,7 @@
                   <a:srgbClr val="000000"/>
                 </a:solidFill>
               </a:rPr>
-              <a:t xml:space="preserve">    </a:t>
+              <a:t>    </a:t>
             </a:r>
             <a:endParaRPr lang="en-US" sz="4400" dirty="0"/>
           </a:p>
@@ -1967,7 +1753,7 @@
           <p:nvPr/>
         </p:nvPicPr>
         <p:blipFill>
-          <a:blip r:embed="rId100"/>
+          <a:blip r:embed="rId3"/>
           <a:stretch>
             <a:fillRect/>
           </a:stretch>
@@ -2003,7 +1789,7 @@
           <a:bodyPr wrap="square" rtlCol="0" anchor="ctr"/>
           <a:lstStyle/>
           <a:p>
-            <a:pPr algn="ctr" indent="0" marL="0">
+            <a:pPr marL="0" indent="0" algn="ctr">
               <a:buNone/>
             </a:pPr>
             <a:r>
@@ -2042,7 +1828,7 @@
           <a:bodyPr wrap="square" rtlCol="0" anchor="ctr"/>
           <a:lstStyle/>
           <a:p>
-            <a:pPr algn="ctr" indent="0" marL="0">
+            <a:pPr marL="0" indent="0" algn="ctr">
               <a:buNone/>
             </a:pPr>
             <a:r>
@@ -2054,7 +1840,29 @@
                 <a:ea typeface="Calibri" pitchFamily="34" charset="-122"/>
                 <a:cs typeface="Calibri" pitchFamily="34" charset="-120"/>
               </a:rPr>
-              <a:t xml:space="preserve">İLERİ SEVİYE • 13-16 YAŞ • ESKİDEN VE ŞİMDİ</a:t>
+              <a:t>İLERİ SEVİYE </a:t>
+            </a:r>
+            <a:r>
+              <a:rPr lang="en-US" sz="1600" dirty="0" smtClean="0">
+                <a:solidFill>
+                  <a:srgbClr val="FFFFFF"/>
+                </a:solidFill>
+                <a:latin typeface="Calibri" pitchFamily="34" charset="0"/>
+                <a:ea typeface="Calibri" pitchFamily="34" charset="-122"/>
+                <a:cs typeface="Calibri" pitchFamily="34" charset="-120"/>
+              </a:rPr>
+              <a:t>• </a:t>
+            </a:r>
+            <a:r>
+              <a:rPr lang="en-US" sz="1600" dirty="0">
+                <a:solidFill>
+                  <a:srgbClr val="FFFFFF"/>
+                </a:solidFill>
+                <a:latin typeface="Calibri" pitchFamily="34" charset="0"/>
+                <a:ea typeface="Calibri" pitchFamily="34" charset="-122"/>
+                <a:cs typeface="Calibri" pitchFamily="34" charset="-120"/>
+              </a:rPr>
+              <a:t>ESKİDEN VE ŞİMDİ</a:t>
             </a:r>
             <a:endParaRPr lang="en-US" sz="1600" dirty="0"/>
           </a:p>
@@ -2103,7 +1911,7 @@
           <a:bodyPr wrap="square" rtlCol="0" anchor="ctr"/>
           <a:lstStyle/>
           <a:p>
-            <a:pPr algn="ctr" indent="0" marL="0">
+            <a:pPr marL="0" indent="0" algn="ctr">
               <a:buNone/>
             </a:pPr>
             <a:r>
@@ -2115,7 +1923,7 @@
                 <a:ea typeface="Calibri" pitchFamily="34" charset="-122"/>
                 <a:cs typeface="Calibri" pitchFamily="34" charset="-120"/>
               </a:rPr>
-              <a:t xml:space="preserve">     Nesiller Arası Farklar • Toplumsal Dönüşüm • Yaşa Saygı</a:t>
+              <a:t>     Nesiller Arası Farklar • Toplumsal Dönüşüm • Yaşa Saygı</a:t>
             </a:r>
             <a:endParaRPr lang="en-US" sz="1150" dirty="0"/>
           </a:p>
@@ -2130,7 +1938,7 @@
           <p:nvPr/>
         </p:nvPicPr>
         <p:blipFill>
-          <a:blip r:embed="rId101"/>
+          <a:blip r:embed="rId4"/>
           <a:stretch>
             <a:fillRect/>
           </a:stretch>
@@ -2166,7 +1974,7 @@
           <a:bodyPr wrap="square" rtlCol="0" anchor="ctr"/>
           <a:lstStyle/>
           <a:p>
-            <a:pPr algn="ctr" indent="0" marL="0">
+            <a:pPr marL="0" indent="0" algn="ctr">
               <a:buNone/>
             </a:pPr>
             <a:r>
@@ -2194,7 +2002,7 @@
 
 <file path=ppt/slides/slide10.xml><?xml version="1.0" encoding="utf-8"?>
 <p:sld xmlns:a="http://schemas.openxmlformats.org/drawingml/2006/main" xmlns:r="http://schemas.openxmlformats.org/officeDocument/2006/relationships" xmlns:p="http://schemas.openxmlformats.org/presentationml/2006/main">
-  <p:cSld name="Slide 7">
+  <p:cSld name="Slide 9">
     <p:spTree>
       <p:nvGrpSpPr>
         <p:cNvPr id="1" name=""/>
@@ -2224,30 +2032,46 @@
             <a:avLst/>
           </a:prstGeom>
           <a:solidFill>
-            <a:srgbClr val="FFF7ED"/>
-          </a:solidFill>
-          <a:ln/>
-        </p:spPr>
-      </p:sp>
-      <p:sp>
-        <p:nvSpPr>
-          <p:cNvPr id="3" name="Shape 1"/>
-          <p:cNvSpPr/>
-          <p:nvPr/>
-        </p:nvSpPr>
-        <p:spPr>
-          <a:xfrm>
-            <a:off x="0" y="0"/>
-            <a:ext cx="9144000" cy="658368"/>
-          </a:xfrm>
-          <a:prstGeom prst="rect">
-            <a:avLst/>
-          </a:prstGeom>
-          <a:solidFill>
-            <a:srgbClr val="F97316"/>
-          </a:solidFill>
-          <a:ln/>
-        </p:spPr>
+            <a:srgbClr val="1A2E5A"/>
+          </a:solidFill>
+          <a:ln/>
+        </p:spPr>
+      </p:sp>
+      <p:sp>
+        <p:nvSpPr>
+          <p:cNvPr id="3" name="Text 1"/>
+          <p:cNvSpPr/>
+          <p:nvPr/>
+        </p:nvSpPr>
+        <p:spPr>
+          <a:xfrm>
+            <a:off x="274320" y="182880"/>
+            <a:ext cx="365760" cy="365760"/>
+          </a:xfrm>
+          <a:prstGeom prst="rect">
+            <a:avLst/>
+          </a:prstGeom>
+          <a:noFill/>
+          <a:ln/>
+        </p:spPr>
+        <p:txBody>
+          <a:bodyPr wrap="square" rtlCol="0" anchor="ctr"/>
+          <a:lstStyle/>
+          <a:p>
+            <a:pPr marL="0" indent="0" algn="ctr">
+              <a:buNone/>
+            </a:pPr>
+            <a:r>
+              <a:rPr lang="en-US" sz="1600" dirty="0">
+                <a:solidFill>
+                  <a:srgbClr val="FBBF24"/>
+                </a:solidFill>
+              </a:rPr>
+              <a:t>★</a:t>
+            </a:r>
+            <a:endParaRPr lang="en-US" sz="1600" dirty="0"/>
+          </a:p>
+        </p:txBody>
       </p:sp>
       <p:sp>
         <p:nvSpPr>
@@ -2257,129 +2081,484 @@
         </p:nvSpPr>
         <p:spPr>
           <a:xfrm>
-            <a:off x="365760" y="0"/>
-            <a:ext cx="8412480" cy="658368"/>
-          </a:xfrm>
-          <a:prstGeom prst="rect">
-            <a:avLst/>
-          </a:prstGeom>
-          <a:noFill/>
-          <a:ln/>
-        </p:spPr>
-        <p:txBody>
-          <a:bodyPr wrap="square" rtlCol="0" anchor="ctr"/>
-          <a:lstStyle/>
-          <a:p>
-            <a:pPr algn="l" indent="0" marL="0">
-              <a:buNone/>
-            </a:pPr>
-            <a:r>
-              <a:rPr lang="en-US" sz="1700" b="1" dirty="0">
-                <a:solidFill>
-                  <a:srgbClr val="1A2E5A"/>
+            <a:off x="8321040" y="182880"/>
+            <a:ext cx="365760" cy="365760"/>
+          </a:xfrm>
+          <a:prstGeom prst="rect">
+            <a:avLst/>
+          </a:prstGeom>
+          <a:noFill/>
+          <a:ln/>
+        </p:spPr>
+        <p:txBody>
+          <a:bodyPr wrap="square" rtlCol="0" anchor="ctr"/>
+          <a:lstStyle/>
+          <a:p>
+            <a:pPr marL="0" indent="0" algn="ctr">
+              <a:buNone/>
+            </a:pPr>
+            <a:r>
+              <a:rPr lang="en-US" sz="1600" dirty="0">
+                <a:solidFill>
+                  <a:srgbClr val="FBBF24"/>
+                </a:solidFill>
+              </a:rPr>
+              <a:t>★</a:t>
+            </a:r>
+            <a:endParaRPr lang="en-US" sz="1600" dirty="0"/>
+          </a:p>
+        </p:txBody>
+      </p:sp>
+      <p:sp>
+        <p:nvSpPr>
+          <p:cNvPr id="5" name="Text 3"/>
+          <p:cNvSpPr/>
+          <p:nvPr/>
+        </p:nvSpPr>
+        <p:spPr>
+          <a:xfrm>
+            <a:off x="274320" y="4480560"/>
+            <a:ext cx="365760" cy="365760"/>
+          </a:xfrm>
+          <a:prstGeom prst="rect">
+            <a:avLst/>
+          </a:prstGeom>
+          <a:noFill/>
+          <a:ln/>
+        </p:spPr>
+        <p:txBody>
+          <a:bodyPr wrap="square" rtlCol="0" anchor="ctr"/>
+          <a:lstStyle/>
+          <a:p>
+            <a:pPr marL="0" indent="0" algn="ctr">
+              <a:buNone/>
+            </a:pPr>
+            <a:r>
+              <a:rPr lang="en-US" sz="1600" dirty="0">
+                <a:solidFill>
+                  <a:srgbClr val="FBBF24"/>
+                </a:solidFill>
+              </a:rPr>
+              <a:t>★</a:t>
+            </a:r>
+            <a:endParaRPr lang="en-US" sz="1600" dirty="0"/>
+          </a:p>
+        </p:txBody>
+      </p:sp>
+      <p:sp>
+        <p:nvSpPr>
+          <p:cNvPr id="6" name="Text 4"/>
+          <p:cNvSpPr/>
+          <p:nvPr/>
+        </p:nvSpPr>
+        <p:spPr>
+          <a:xfrm>
+            <a:off x="8321040" y="4480560"/>
+            <a:ext cx="365760" cy="365760"/>
+          </a:xfrm>
+          <a:prstGeom prst="rect">
+            <a:avLst/>
+          </a:prstGeom>
+          <a:noFill/>
+          <a:ln/>
+        </p:spPr>
+        <p:txBody>
+          <a:bodyPr wrap="square" rtlCol="0" anchor="ctr"/>
+          <a:lstStyle/>
+          <a:p>
+            <a:pPr marL="0" indent="0" algn="ctr">
+              <a:buNone/>
+            </a:pPr>
+            <a:r>
+              <a:rPr lang="en-US" sz="1600" dirty="0">
+                <a:solidFill>
+                  <a:srgbClr val="FBBF24"/>
+                </a:solidFill>
+              </a:rPr>
+              <a:t>★</a:t>
+            </a:r>
+            <a:endParaRPr lang="en-US" sz="1600" dirty="0"/>
+          </a:p>
+        </p:txBody>
+      </p:sp>
+      <p:sp>
+        <p:nvSpPr>
+          <p:cNvPr id="7" name="Text 5"/>
+          <p:cNvSpPr/>
+          <p:nvPr/>
+        </p:nvSpPr>
+        <p:spPr>
+          <a:xfrm>
+            <a:off x="457200" y="502920"/>
+            <a:ext cx="8229600" cy="640080"/>
+          </a:xfrm>
+          <a:prstGeom prst="rect">
+            <a:avLst/>
+          </a:prstGeom>
+          <a:noFill/>
+          <a:ln/>
+        </p:spPr>
+        <p:txBody>
+          <a:bodyPr wrap="square" rtlCol="0" anchor="ctr"/>
+          <a:lstStyle/>
+          <a:p>
+            <a:pPr marL="0" indent="0" algn="ctr">
+              <a:buNone/>
+            </a:pPr>
+            <a:r>
+              <a:rPr lang="en-US" sz="3200" b="1" dirty="0">
+                <a:solidFill>
+                  <a:srgbClr val="FBBF24"/>
                 </a:solidFill>
                 <a:latin typeface="Cambria" pitchFamily="34" charset="0"/>
                 <a:ea typeface="Cambria" pitchFamily="34" charset="-122"/>
                 <a:cs typeface="Cambria" pitchFamily="34" charset="-120"/>
               </a:rPr>
-              <a:t xml:space="preserve">      ZAMAN TÜNELİ: ONLU YILLAR VE YÜZYILLAR</a:t>
-            </a:r>
-            <a:endParaRPr lang="en-US" sz="1700" dirty="0"/>
-          </a:p>
-        </p:txBody>
-      </p:sp>
-      <p:pic>
-        <p:nvPicPr>
-          <p:cNvPr id="18" name="Emoji 18" descr="emoji"/>
-          <p:cNvPicPr>
-            <a:picLocks noChangeAspect="1"/>
-          </p:cNvPicPr>
-          <p:nvPr/>
-        </p:nvPicPr>
-        <p:blipFill>
-          <a:blip r:embed="rId100"/>
-          <a:stretch>
-            <a:fillRect/>
-          </a:stretch>
-        </p:blipFill>
-        <p:spPr>
-          <a:xfrm>
-            <a:off x="444246" y="221234"/>
-            <a:ext cx="215900" cy="215900"/>
-          </a:xfrm>
-          <a:prstGeom prst="rect">
-            <a:avLst/>
-          </a:prstGeom>
-        </p:spPr>
-      </p:pic>
-      <p:sp>
-        <p:nvSpPr>
-          <p:cNvPr id="5" name="Shape 3"/>
-          <p:cNvSpPr/>
-          <p:nvPr/>
-        </p:nvSpPr>
-        <p:spPr>
-          <a:xfrm>
-            <a:off x="548640" y="868680"/>
-            <a:ext cx="8046720" cy="960120"/>
+              <a:t>GÖREV TAMAMLANDI!</a:t>
+            </a:r>
+            <a:endParaRPr lang="en-US" sz="3200" dirty="0"/>
+          </a:p>
+        </p:txBody>
+      </p:sp>
+      <p:sp>
+        <p:nvSpPr>
+          <p:cNvPr id="8" name="Shape 6"/>
+          <p:cNvSpPr/>
+          <p:nvPr/>
+        </p:nvSpPr>
+        <p:spPr>
+          <a:xfrm>
+            <a:off x="388620" y="2011680"/>
+            <a:ext cx="1600200" cy="1371600"/>
           </a:xfrm>
           <a:prstGeom prst="roundRect">
             <a:avLst>
-              <a:gd name="adj" fmla="val 11429"/>
+              <a:gd name="adj" fmla="val 8000"/>
             </a:avLst>
           </a:prstGeom>
           <a:solidFill>
-            <a:srgbClr val="FFFFFF"/>
-          </a:solidFill>
-          <a:ln w="12700">
-            <a:solidFill>
-              <a:srgbClr val="FFFFFF"/>
-            </a:solidFill>
-            <a:prstDash val="solid"/>
-          </a:ln>
-          <a:effectLst>
-            <a:outerShdw sx="100000" sy="100000" kx="0" ky="0" algn="bl" rotWithShape="0" blurRad="76200" dist="25400" dir="5400000">
-              <a:srgbClr val="1A2E5A">
-                <a:alpha val="18000"/>
-              </a:srgbClr>
-            </a:outerShdw>
-          </a:effectLst>
-        </p:spPr>
-      </p:sp>
-      <p:sp>
-        <p:nvSpPr>
-          <p:cNvPr id="6" name="Text 4"/>
-          <p:cNvSpPr/>
-          <p:nvPr/>
-        </p:nvSpPr>
-        <p:spPr>
-          <a:xfrm>
-            <a:off x="822960" y="868680"/>
-            <a:ext cx="7498080" cy="960120"/>
-          </a:xfrm>
-          <a:prstGeom prst="rect">
-            <a:avLst/>
-          </a:prstGeom>
-          <a:noFill/>
-          <a:ln/>
-        </p:spPr>
-        <p:txBody>
-          <a:bodyPr wrap="square" rtlCol="0" anchor="ctr"/>
-          <a:lstStyle/>
-          <a:p>
-            <a:pPr algn="l" indent="0" marL="0">
-              <a:buNone/>
-            </a:pPr>
-            <a:r>
-              <a:rPr lang="en-US" sz="1500" dirty="0">
-                <a:solidFill>
-                  <a:srgbClr val="1E1E1E"/>
+            <a:srgbClr val="F97316"/>
+          </a:solidFill>
+          <a:ln/>
+        </p:spPr>
+      </p:sp>
+      <p:sp>
+        <p:nvSpPr>
+          <p:cNvPr id="9" name="Text 7"/>
+          <p:cNvSpPr/>
+          <p:nvPr/>
+        </p:nvSpPr>
+        <p:spPr>
+          <a:xfrm>
+            <a:off x="388620" y="2011680"/>
+            <a:ext cx="1600200" cy="1371600"/>
+          </a:xfrm>
+          <a:prstGeom prst="rect">
+            <a:avLst/>
+          </a:prstGeom>
+          <a:noFill/>
+          <a:ln/>
+        </p:spPr>
+        <p:txBody>
+          <a:bodyPr wrap="square" rtlCol="0" anchor="ctr"/>
+          <a:lstStyle/>
+          <a:p>
+            <a:pPr marL="0" indent="0" algn="ctr">
+              <a:buNone/>
+            </a:pPr>
+            <a:r>
+              <a:rPr lang="en-US" sz="1100" b="1" dirty="0">
+                <a:solidFill>
+                  <a:srgbClr val="FFFFFF"/>
                 </a:solidFill>
                 <a:latin typeface="Calibri" pitchFamily="34" charset="0"/>
                 <a:ea typeface="Calibri" pitchFamily="34" charset="-122"/>
                 <a:cs typeface="Calibri" pitchFamily="34" charset="-120"/>
               </a:rPr>
-              <a:t xml:space="preserve">      1960'lı yıllar = altmışlı yıllar  •  1980'li yıllar = seksenli yıllar  •  21. yüzyıl</a:t>
+              <a:t>Onlu Yıllar</a:t>
+            </a:r>
+            <a:endParaRPr lang="en-US" sz="1100" dirty="0"/>
+          </a:p>
+        </p:txBody>
+      </p:sp>
+      <p:sp>
+        <p:nvSpPr>
+          <p:cNvPr id="10" name="Shape 8"/>
+          <p:cNvSpPr/>
+          <p:nvPr/>
+        </p:nvSpPr>
+        <p:spPr>
+          <a:xfrm>
+            <a:off x="2080260" y="2011680"/>
+            <a:ext cx="1600200" cy="1371600"/>
+          </a:xfrm>
+          <a:prstGeom prst="roundRect">
+            <a:avLst>
+              <a:gd name="adj" fmla="val 8000"/>
+            </a:avLst>
+          </a:prstGeom>
+          <a:solidFill>
+            <a:srgbClr val="2563EB"/>
+          </a:solidFill>
+          <a:ln/>
+        </p:spPr>
+      </p:sp>
+      <p:sp>
+        <p:nvSpPr>
+          <p:cNvPr id="11" name="Text 9"/>
+          <p:cNvSpPr/>
+          <p:nvPr/>
+        </p:nvSpPr>
+        <p:spPr>
+          <a:xfrm>
+            <a:off x="2080260" y="2011680"/>
+            <a:ext cx="1600200" cy="1371600"/>
+          </a:xfrm>
+          <a:prstGeom prst="rect">
+            <a:avLst/>
+          </a:prstGeom>
+          <a:noFill/>
+          <a:ln/>
+        </p:spPr>
+        <p:txBody>
+          <a:bodyPr wrap="square" rtlCol="0" anchor="ctr"/>
+          <a:lstStyle/>
+          <a:p>
+            <a:pPr marL="0" indent="0" algn="ctr">
+              <a:buNone/>
+            </a:pPr>
+            <a:r>
+              <a:rPr lang="en-US" sz="1100" b="1" dirty="0">
+                <a:solidFill>
+                  <a:srgbClr val="FFFFFF"/>
+                </a:solidFill>
+                <a:latin typeface="Calibri" pitchFamily="34" charset="0"/>
+                <a:ea typeface="Calibri" pitchFamily="34" charset="-122"/>
+                <a:cs typeface="Calibri" pitchFamily="34" charset="-120"/>
+              </a:rPr>
+              <a:t>Eskiden/Şimdi</a:t>
+            </a:r>
+            <a:endParaRPr lang="en-US" sz="1100" dirty="0"/>
+          </a:p>
+        </p:txBody>
+      </p:sp>
+      <p:sp>
+        <p:nvSpPr>
+          <p:cNvPr id="12" name="Shape 10"/>
+          <p:cNvSpPr/>
+          <p:nvPr/>
+        </p:nvSpPr>
+        <p:spPr>
+          <a:xfrm>
+            <a:off x="3771900" y="2011680"/>
+            <a:ext cx="1600200" cy="1371600"/>
+          </a:xfrm>
+          <a:prstGeom prst="roundRect">
+            <a:avLst>
+              <a:gd name="adj" fmla="val 8000"/>
+            </a:avLst>
+          </a:prstGeom>
+          <a:solidFill>
+            <a:srgbClr val="4338CA"/>
+          </a:solidFill>
+          <a:ln/>
+        </p:spPr>
+      </p:sp>
+      <p:sp>
+        <p:nvSpPr>
+          <p:cNvPr id="13" name="Text 11"/>
+          <p:cNvSpPr/>
+          <p:nvPr/>
+        </p:nvSpPr>
+        <p:spPr>
+          <a:xfrm>
+            <a:off x="3771900" y="2011680"/>
+            <a:ext cx="1600200" cy="1371600"/>
+          </a:xfrm>
+          <a:prstGeom prst="rect">
+            <a:avLst/>
+          </a:prstGeom>
+          <a:noFill/>
+          <a:ln/>
+        </p:spPr>
+        <p:txBody>
+          <a:bodyPr wrap="square" rtlCol="0" anchor="ctr"/>
+          <a:lstStyle/>
+          <a:p>
+            <a:pPr marL="0" indent="0" algn="ctr">
+              <a:buNone/>
+            </a:pPr>
+            <a:r>
+              <a:rPr lang="en-US" sz="1100" b="1" dirty="0">
+                <a:solidFill>
+                  <a:srgbClr val="FFFFFF"/>
+                </a:solidFill>
+                <a:latin typeface="Calibri" pitchFamily="34" charset="0"/>
+                <a:ea typeface="Calibri" pitchFamily="34" charset="-122"/>
+                <a:cs typeface="Calibri" pitchFamily="34" charset="-120"/>
+              </a:rPr>
+              <a:t>Toplumsal Dönüşüm</a:t>
+            </a:r>
+            <a:endParaRPr lang="en-US" sz="1100" dirty="0"/>
+          </a:p>
+        </p:txBody>
+      </p:sp>
+      <p:sp>
+        <p:nvSpPr>
+          <p:cNvPr id="14" name="Shape 12"/>
+          <p:cNvSpPr/>
+          <p:nvPr/>
+        </p:nvSpPr>
+        <p:spPr>
+          <a:xfrm>
+            <a:off x="5463540" y="2011680"/>
+            <a:ext cx="1600200" cy="1371600"/>
+          </a:xfrm>
+          <a:prstGeom prst="roundRect">
+            <a:avLst>
+              <a:gd name="adj" fmla="val 8000"/>
+            </a:avLst>
+          </a:prstGeom>
+          <a:solidFill>
+            <a:srgbClr val="16A34A"/>
+          </a:solidFill>
+          <a:ln/>
+        </p:spPr>
+      </p:sp>
+      <p:sp>
+        <p:nvSpPr>
+          <p:cNvPr id="15" name="Text 13"/>
+          <p:cNvSpPr/>
+          <p:nvPr/>
+        </p:nvSpPr>
+        <p:spPr>
+          <a:xfrm>
+            <a:off x="5463540" y="2011680"/>
+            <a:ext cx="1600200" cy="1371600"/>
+          </a:xfrm>
+          <a:prstGeom prst="rect">
+            <a:avLst/>
+          </a:prstGeom>
+          <a:noFill/>
+          <a:ln/>
+        </p:spPr>
+        <p:txBody>
+          <a:bodyPr wrap="square" rtlCol="0" anchor="ctr"/>
+          <a:lstStyle/>
+          <a:p>
+            <a:pPr marL="0" indent="0" algn="ctr">
+              <a:buNone/>
+            </a:pPr>
+            <a:r>
+              <a:rPr lang="en-US" sz="1100" b="1" dirty="0">
+                <a:solidFill>
+                  <a:srgbClr val="FFFFFF"/>
+                </a:solidFill>
+                <a:latin typeface="Calibri" pitchFamily="34" charset="0"/>
+                <a:ea typeface="Calibri" pitchFamily="34" charset="-122"/>
+                <a:cs typeface="Calibri" pitchFamily="34" charset="-120"/>
+              </a:rPr>
+              <a:t>Saygı Analizi</a:t>
+            </a:r>
+            <a:endParaRPr lang="en-US" sz="1100" dirty="0"/>
+          </a:p>
+        </p:txBody>
+      </p:sp>
+      <p:sp>
+        <p:nvSpPr>
+          <p:cNvPr id="16" name="Shape 14"/>
+          <p:cNvSpPr/>
+          <p:nvPr/>
+        </p:nvSpPr>
+        <p:spPr>
+          <a:xfrm>
+            <a:off x="7155180" y="2011680"/>
+            <a:ext cx="1600200" cy="1371600"/>
+          </a:xfrm>
+          <a:prstGeom prst="roundRect">
+            <a:avLst>
+              <a:gd name="adj" fmla="val 8000"/>
+            </a:avLst>
+          </a:prstGeom>
+          <a:solidFill>
+            <a:srgbClr val="7C3AED"/>
+          </a:solidFill>
+          <a:ln/>
+        </p:spPr>
+      </p:sp>
+      <p:sp>
+        <p:nvSpPr>
+          <p:cNvPr id="17" name="Text 15"/>
+          <p:cNvSpPr/>
+          <p:nvPr/>
+        </p:nvSpPr>
+        <p:spPr>
+          <a:xfrm>
+            <a:off x="7155180" y="2011680"/>
+            <a:ext cx="1600200" cy="1371600"/>
+          </a:xfrm>
+          <a:prstGeom prst="rect">
+            <a:avLst/>
+          </a:prstGeom>
+          <a:noFill/>
+          <a:ln/>
+        </p:spPr>
+        <p:txBody>
+          <a:bodyPr wrap="square" rtlCol="0" anchor="ctr"/>
+          <a:lstStyle/>
+          <a:p>
+            <a:pPr marL="0" indent="0" algn="ctr">
+              <a:buNone/>
+            </a:pPr>
+            <a:r>
+              <a:rPr lang="en-US" sz="1100" b="1" dirty="0">
+                <a:solidFill>
+                  <a:srgbClr val="FFFFFF"/>
+                </a:solidFill>
+                <a:latin typeface="Calibri" pitchFamily="34" charset="0"/>
+                <a:ea typeface="Calibri" pitchFamily="34" charset="-122"/>
+                <a:cs typeface="Calibri" pitchFamily="34" charset="-120"/>
+              </a:rPr>
+              <a:t>Kuşak Aktarımı</a:t>
+            </a:r>
+            <a:endParaRPr lang="en-US" sz="1100" dirty="0"/>
+          </a:p>
+        </p:txBody>
+      </p:sp>
+      <p:sp>
+        <p:nvSpPr>
+          <p:cNvPr id="18" name="Text 16"/>
+          <p:cNvSpPr/>
+          <p:nvPr/>
+        </p:nvSpPr>
+        <p:spPr>
+          <a:xfrm>
+            <a:off x="457200" y="3931920"/>
+            <a:ext cx="8229600" cy="548640"/>
+          </a:xfrm>
+          <a:prstGeom prst="rect">
+            <a:avLst/>
+          </a:prstGeom>
+          <a:noFill/>
+          <a:ln/>
+        </p:spPr>
+        <p:txBody>
+          <a:bodyPr wrap="square" rtlCol="0" anchor="ctr"/>
+          <a:lstStyle/>
+          <a:p>
+            <a:pPr marL="0" indent="0" algn="ctr">
+              <a:buNone/>
+            </a:pPr>
+            <a:r>
+              <a:rPr lang="en-US" sz="1500" i="1" dirty="0">
+                <a:solidFill>
+                  <a:srgbClr val="FFFFFF"/>
+                </a:solidFill>
+                <a:latin typeface="Calibri" pitchFamily="34" charset="0"/>
+                <a:ea typeface="Calibri" pitchFamily="34" charset="-122"/>
+                <a:cs typeface="Calibri" pitchFamily="34" charset="-120"/>
+              </a:rPr>
+              <a:t>Bir sonraki görevde görüşmek üzere!     </a:t>
             </a:r>
             <a:endParaRPr lang="en-US" sz="1500" dirty="0"/>
           </a:p>
@@ -2394,14 +2573,14 @@
           <p:nvPr/>
         </p:nvPicPr>
         <p:blipFill>
-          <a:blip r:embed="rId101"/>
+          <a:blip r:embed="rId3"/>
           <a:stretch>
             <a:fillRect/>
           </a:stretch>
         </p:blipFill>
         <p:spPr>
           <a:xfrm>
-            <a:off x="905285" y="1253490"/>
+            <a:off x="5905324" y="4110990"/>
             <a:ext cx="190500" cy="190500"/>
           </a:xfrm>
           <a:prstGeom prst="rect">
@@ -2409,473 +2588,6 @@
           </a:prstGeom>
         </p:spPr>
       </p:pic>
-      <p:sp>
-        <p:nvSpPr>
-          <p:cNvPr id="7" name="Shape 5"/>
-          <p:cNvSpPr/>
-          <p:nvPr/>
-        </p:nvSpPr>
-        <p:spPr>
-          <a:xfrm>
-            <a:off x="685800" y="2011680"/>
-            <a:ext cx="2468880" cy="1143000"/>
-          </a:xfrm>
-          <a:prstGeom prst="roundRect">
-            <a:avLst>
-              <a:gd name="adj" fmla="val 9600"/>
-            </a:avLst>
-          </a:prstGeom>
-          <a:solidFill>
-            <a:srgbClr val="FFFFFF"/>
-          </a:solidFill>
-          <a:ln w="12700">
-            <a:solidFill>
-              <a:srgbClr val="FFFFFF"/>
-            </a:solidFill>
-            <a:prstDash val="solid"/>
-          </a:ln>
-        </p:spPr>
-      </p:sp>
-      <p:sp>
-        <p:nvSpPr>
-          <p:cNvPr id="8" name="Text 6"/>
-          <p:cNvSpPr/>
-          <p:nvPr/>
-        </p:nvSpPr>
-        <p:spPr>
-          <a:xfrm>
-            <a:off x="685800" y="2084832"/>
-            <a:ext cx="2468880" cy="594360"/>
-          </a:xfrm>
-          <a:prstGeom prst="rect">
-            <a:avLst/>
-          </a:prstGeom>
-          <a:noFill/>
-          <a:ln/>
-        </p:spPr>
-        <p:txBody>
-          <a:bodyPr wrap="square" rtlCol="0" anchor="ctr"/>
-          <a:lstStyle/>
-          <a:p>
-            <a:pPr algn="ctr" indent="0" marL="0">
-              <a:buNone/>
-            </a:pPr>
-            <a:r>
-              <a:rPr lang="en-US" sz="3000" dirty="0">
-                <a:solidFill>
-                  <a:srgbClr val="000000"/>
-                </a:solidFill>
-              </a:rPr>
-              <a:t xml:space="preserve">    </a:t>
-            </a:r>
-            <a:endParaRPr lang="en-US" sz="3000" dirty="0"/>
-          </a:p>
-        </p:txBody>
-      </p:sp>
-      <p:pic>
-        <p:nvPicPr>
-          <p:cNvPr id="20" name="Emoji 20" descr="emoji"/>
-          <p:cNvPicPr>
-            <a:picLocks noChangeAspect="1"/>
-          </p:cNvPicPr>
-          <p:nvPr/>
-        </p:nvPicPr>
-        <p:blipFill>
-          <a:blip r:embed="rId102"/>
-          <a:stretch>
-            <a:fillRect/>
-          </a:stretch>
-        </p:blipFill>
-        <p:spPr>
-          <a:xfrm>
-            <a:off x="1729740" y="2191512"/>
-            <a:ext cx="381000" cy="381000"/>
-          </a:xfrm>
-          <a:prstGeom prst="rect">
-            <a:avLst/>
-          </a:prstGeom>
-        </p:spPr>
-      </p:pic>
-      <p:sp>
-        <p:nvSpPr>
-          <p:cNvPr id="9" name="Text 7"/>
-          <p:cNvSpPr/>
-          <p:nvPr/>
-        </p:nvSpPr>
-        <p:spPr>
-          <a:xfrm>
-            <a:off x="685800" y="2651760"/>
-            <a:ext cx="2468880" cy="411480"/>
-          </a:xfrm>
-          <a:prstGeom prst="rect">
-            <a:avLst/>
-          </a:prstGeom>
-          <a:noFill/>
-          <a:ln/>
-        </p:spPr>
-        <p:txBody>
-          <a:bodyPr wrap="square" rtlCol="0" anchor="ctr"/>
-          <a:lstStyle/>
-          <a:p>
-            <a:pPr algn="ctr" indent="0" marL="0">
-              <a:buNone/>
-            </a:pPr>
-            <a:r>
-              <a:rPr lang="en-US" sz="1150" b="1" dirty="0">
-                <a:solidFill>
-                  <a:srgbClr val="1E293B"/>
-                </a:solidFill>
-                <a:latin typeface="Calibri" pitchFamily="34" charset="0"/>
-                <a:ea typeface="Calibri" pitchFamily="34" charset="-122"/>
-                <a:cs typeface="Calibri" pitchFamily="34" charset="-120"/>
-              </a:rPr>
-              <a:t xml:space="preserve">Dedem — 1958</a:t>
-            </a:r>
-            <a:endParaRPr lang="en-US" sz="1150" dirty="0"/>
-          </a:p>
-        </p:txBody>
-      </p:sp>
-      <p:sp>
-        <p:nvSpPr>
-          <p:cNvPr id="10" name="Shape 8"/>
-          <p:cNvSpPr/>
-          <p:nvPr/>
-        </p:nvSpPr>
-        <p:spPr>
-          <a:xfrm>
-            <a:off x="3337560" y="2011680"/>
-            <a:ext cx="2468880" cy="1143000"/>
-          </a:xfrm>
-          <a:prstGeom prst="roundRect">
-            <a:avLst>
-              <a:gd name="adj" fmla="val 9600"/>
-            </a:avLst>
-          </a:prstGeom>
-          <a:solidFill>
-            <a:srgbClr val="FFFFFF"/>
-          </a:solidFill>
-          <a:ln w="12700">
-            <a:solidFill>
-              <a:srgbClr val="FFFFFF"/>
-            </a:solidFill>
-            <a:prstDash val="solid"/>
-          </a:ln>
-        </p:spPr>
-      </p:sp>
-      <p:sp>
-        <p:nvSpPr>
-          <p:cNvPr id="11" name="Text 9"/>
-          <p:cNvSpPr/>
-          <p:nvPr/>
-        </p:nvSpPr>
-        <p:spPr>
-          <a:xfrm>
-            <a:off x="3337560" y="2084832"/>
-            <a:ext cx="2468880" cy="594360"/>
-          </a:xfrm>
-          <a:prstGeom prst="rect">
-            <a:avLst/>
-          </a:prstGeom>
-          <a:noFill/>
-          <a:ln/>
-        </p:spPr>
-        <p:txBody>
-          <a:bodyPr wrap="square" rtlCol="0" anchor="ctr"/>
-          <a:lstStyle/>
-          <a:p>
-            <a:pPr algn="ctr" indent="0" marL="0">
-              <a:buNone/>
-            </a:pPr>
-            <a:r>
-              <a:rPr lang="en-US" sz="3000" dirty="0">
-                <a:solidFill>
-                  <a:srgbClr val="000000"/>
-                </a:solidFill>
-              </a:rPr>
-              <a:t xml:space="preserve">    </a:t>
-            </a:r>
-            <a:endParaRPr lang="en-US" sz="3000" dirty="0"/>
-          </a:p>
-        </p:txBody>
-      </p:sp>
-      <p:pic>
-        <p:nvPicPr>
-          <p:cNvPr id="21" name="Emoji 21" descr="emoji"/>
-          <p:cNvPicPr>
-            <a:picLocks noChangeAspect="1"/>
-          </p:cNvPicPr>
-          <p:nvPr/>
-        </p:nvPicPr>
-        <p:blipFill>
-          <a:blip r:embed="rId103"/>
-          <a:stretch>
-            <a:fillRect/>
-          </a:stretch>
-        </p:blipFill>
-        <p:spPr>
-          <a:xfrm>
-            <a:off x="4381500" y="2191512"/>
-            <a:ext cx="381000" cy="381000"/>
-          </a:xfrm>
-          <a:prstGeom prst="rect">
-            <a:avLst/>
-          </a:prstGeom>
-        </p:spPr>
-      </p:pic>
-      <p:sp>
-        <p:nvSpPr>
-          <p:cNvPr id="12" name="Text 10"/>
-          <p:cNvSpPr/>
-          <p:nvPr/>
-        </p:nvSpPr>
-        <p:spPr>
-          <a:xfrm>
-            <a:off x="3337560" y="2651760"/>
-            <a:ext cx="2468880" cy="411480"/>
-          </a:xfrm>
-          <a:prstGeom prst="rect">
-            <a:avLst/>
-          </a:prstGeom>
-          <a:noFill/>
-          <a:ln/>
-        </p:spPr>
-        <p:txBody>
-          <a:bodyPr wrap="square" rtlCol="0" anchor="ctr"/>
-          <a:lstStyle/>
-          <a:p>
-            <a:pPr algn="ctr" indent="0" marL="0">
-              <a:buNone/>
-            </a:pPr>
-            <a:r>
-              <a:rPr lang="en-US" sz="1150" b="1" dirty="0">
-                <a:solidFill>
-                  <a:srgbClr val="1E293B"/>
-                </a:solidFill>
-                <a:latin typeface="Calibri" pitchFamily="34" charset="0"/>
-                <a:ea typeface="Calibri" pitchFamily="34" charset="-122"/>
-                <a:cs typeface="Calibri" pitchFamily="34" charset="-120"/>
-              </a:rPr>
-              <a:t xml:space="preserve">Annem — 1985</a:t>
-            </a:r>
-            <a:endParaRPr lang="en-US" sz="1150" dirty="0"/>
-          </a:p>
-        </p:txBody>
-      </p:sp>
-      <p:sp>
-        <p:nvSpPr>
-          <p:cNvPr id="13" name="Shape 11"/>
-          <p:cNvSpPr/>
-          <p:nvPr/>
-        </p:nvSpPr>
-        <p:spPr>
-          <a:xfrm>
-            <a:off x="5989320" y="2011680"/>
-            <a:ext cx="2468880" cy="1143000"/>
-          </a:xfrm>
-          <a:prstGeom prst="roundRect">
-            <a:avLst>
-              <a:gd name="adj" fmla="val 9600"/>
-            </a:avLst>
-          </a:prstGeom>
-          <a:solidFill>
-            <a:srgbClr val="FFFFFF"/>
-          </a:solidFill>
-          <a:ln w="12700">
-            <a:solidFill>
-              <a:srgbClr val="FFFFFF"/>
-            </a:solidFill>
-            <a:prstDash val="solid"/>
-          </a:ln>
-        </p:spPr>
-      </p:sp>
-      <p:sp>
-        <p:nvSpPr>
-          <p:cNvPr id="14" name="Text 12"/>
-          <p:cNvSpPr/>
-          <p:nvPr/>
-        </p:nvSpPr>
-        <p:spPr>
-          <a:xfrm>
-            <a:off x="5989320" y="2084832"/>
-            <a:ext cx="2468880" cy="594360"/>
-          </a:xfrm>
-          <a:prstGeom prst="rect">
-            <a:avLst/>
-          </a:prstGeom>
-          <a:noFill/>
-          <a:ln/>
-        </p:spPr>
-        <p:txBody>
-          <a:bodyPr wrap="square" rtlCol="0" anchor="ctr"/>
-          <a:lstStyle/>
-          <a:p>
-            <a:pPr algn="ctr" indent="0" marL="0">
-              <a:buNone/>
-            </a:pPr>
-            <a:r>
-              <a:rPr lang="en-US" sz="3000" dirty="0">
-                <a:solidFill>
-                  <a:srgbClr val="000000"/>
-                </a:solidFill>
-              </a:rPr>
-              <a:t xml:space="preserve">    </a:t>
-            </a:r>
-            <a:endParaRPr lang="en-US" sz="3000" dirty="0"/>
-          </a:p>
-        </p:txBody>
-      </p:sp>
-      <p:pic>
-        <p:nvPicPr>
-          <p:cNvPr id="22" name="Emoji 22" descr="emoji"/>
-          <p:cNvPicPr>
-            <a:picLocks noChangeAspect="1"/>
-          </p:cNvPicPr>
-          <p:nvPr/>
-        </p:nvPicPr>
-        <p:blipFill>
-          <a:blip r:embed="rId104"/>
-          <a:stretch>
-            <a:fillRect/>
-          </a:stretch>
-        </p:blipFill>
-        <p:spPr>
-          <a:xfrm>
-            <a:off x="7033260" y="2191512"/>
-            <a:ext cx="381000" cy="381000"/>
-          </a:xfrm>
-          <a:prstGeom prst="rect">
-            <a:avLst/>
-          </a:prstGeom>
-        </p:spPr>
-      </p:pic>
-      <p:sp>
-        <p:nvSpPr>
-          <p:cNvPr id="15" name="Text 13"/>
-          <p:cNvSpPr/>
-          <p:nvPr/>
-        </p:nvSpPr>
-        <p:spPr>
-          <a:xfrm>
-            <a:off x="5989320" y="2651760"/>
-            <a:ext cx="2468880" cy="411480"/>
-          </a:xfrm>
-          <a:prstGeom prst="rect">
-            <a:avLst/>
-          </a:prstGeom>
-          <a:noFill/>
-          <a:ln/>
-        </p:spPr>
-        <p:txBody>
-          <a:bodyPr wrap="square" rtlCol="0" anchor="ctr"/>
-          <a:lstStyle/>
-          <a:p>
-            <a:pPr algn="ctr" indent="0" marL="0">
-              <a:buNone/>
-            </a:pPr>
-            <a:r>
-              <a:rPr lang="en-US" sz="1150" b="1" dirty="0">
-                <a:solidFill>
-                  <a:srgbClr val="1E293B"/>
-                </a:solidFill>
-                <a:latin typeface="Calibri" pitchFamily="34" charset="0"/>
-                <a:ea typeface="Calibri" pitchFamily="34" charset="-122"/>
-                <a:cs typeface="Calibri" pitchFamily="34" charset="-120"/>
-              </a:rPr>
-              <a:t xml:space="preserve">Ben — 2011</a:t>
-            </a:r>
-            <a:endParaRPr lang="en-US" sz="1150" dirty="0"/>
-          </a:p>
-        </p:txBody>
-      </p:sp>
-      <p:sp>
-        <p:nvSpPr>
-          <p:cNvPr id="16" name="Shape 14"/>
-          <p:cNvSpPr/>
-          <p:nvPr/>
-        </p:nvSpPr>
-        <p:spPr>
-          <a:xfrm>
-            <a:off x="548640" y="3337560"/>
-            <a:ext cx="8046720" cy="1234440"/>
-          </a:xfrm>
-          <a:prstGeom prst="roundRect">
-            <a:avLst>
-              <a:gd name="adj" fmla="val 8889"/>
-            </a:avLst>
-          </a:prstGeom>
-          <a:solidFill>
-            <a:srgbClr val="FFEDD5"/>
-          </a:solidFill>
-          <a:ln w="12700">
-            <a:solidFill>
-              <a:srgbClr val="FFFFFF"/>
-            </a:solidFill>
-            <a:prstDash val="solid"/>
-          </a:ln>
-        </p:spPr>
-      </p:sp>
-      <p:sp>
-        <p:nvSpPr>
-          <p:cNvPr id="17" name="Text 15"/>
-          <p:cNvSpPr/>
-          <p:nvPr/>
-        </p:nvSpPr>
-        <p:spPr>
-          <a:xfrm>
-            <a:off x="822960" y="3337560"/>
-            <a:ext cx="7498080" cy="1234440"/>
-          </a:xfrm>
-          <a:prstGeom prst="rect">
-            <a:avLst/>
-          </a:prstGeom>
-          <a:noFill/>
-          <a:ln/>
-        </p:spPr>
-        <p:txBody>
-          <a:bodyPr wrap="square" rtlCol="0" anchor="ctr"/>
-          <a:lstStyle/>
-          <a:p>
-            <a:pPr algn="l" indent="0" marL="0">
-              <a:lnSpc>
-                <a:spcPct val="125000"/>
-              </a:lnSpc>
-              <a:buNone/>
-            </a:pPr>
-            <a:r>
-              <a:rPr lang="en-US" sz="1350" dirty="0">
-                <a:solidFill>
-                  <a:srgbClr val="1E293B"/>
-                </a:solidFill>
-                <a:latin typeface="Calibri" pitchFamily="34" charset="0"/>
-                <a:ea typeface="Calibri" pitchFamily="34" charset="-122"/>
-                <a:cs typeface="Calibri" pitchFamily="34" charset="-120"/>
-              </a:rPr>
-              <a:t xml:space="preserve">Dedem 1958'de doğdu, altmışlı yıllarda çocuktu. Annem seksenli yıllarda, ben 21. yüzyılda doğdum.</a:t>
-            </a:r>
-            <a:endParaRPr lang="en-US" sz="1350" dirty="0"/>
-          </a:p>
-          <a:p>
-            <a:pPr algn="l" indent="0" marL="0">
-              <a:lnSpc>
-                <a:spcPct val="125000"/>
-              </a:lnSpc>
-              <a:buNone/>
-            </a:pPr>
-            <a:r>
-              <a:rPr lang="en-US" sz="1350" dirty="0">
-                <a:solidFill>
-                  <a:srgbClr val="1E293B"/>
-                </a:solidFill>
-                <a:latin typeface="Calibri" pitchFamily="34" charset="0"/>
-                <a:ea typeface="Calibri" pitchFamily="34" charset="-122"/>
-                <a:cs typeface="Calibri" pitchFamily="34" charset="-120"/>
-              </a:rPr>
-              <a:t xml:space="preserve">Sıra sende: Ailenin üç neslini onlu yıllarla anlat!</a:t>
-            </a:r>
-            <a:endParaRPr lang="en-US" sz="1350" dirty="0"/>
-          </a:p>
-        </p:txBody>
-      </p:sp>
     </p:spTree>
   </p:cSld>
   <p:clrMapOvr>
@@ -2962,7 +2674,7 @@
           <a:bodyPr wrap="square" rtlCol="0" anchor="ctr"/>
           <a:lstStyle/>
           <a:p>
-            <a:pPr algn="l" indent="0" marL="0">
+            <a:pPr marL="0" indent="0" algn="l">
               <a:buNone/>
             </a:pPr>
             <a:r>
@@ -2974,7 +2686,7 @@
                 <a:ea typeface="Cambria" pitchFamily="34" charset="-122"/>
                 <a:cs typeface="Cambria" pitchFamily="34" charset="-120"/>
               </a:rPr>
-              <a:t xml:space="preserve">      GÖREV RAPORUMUZ</a:t>
+              <a:t>      GÖREV RAPORUMUZ</a:t>
             </a:r>
             <a:endParaRPr lang="en-US" sz="1700" dirty="0"/>
           </a:p>
@@ -2989,7 +2701,7 @@
           <p:nvPr/>
         </p:nvPicPr>
         <p:blipFill>
-          <a:blip r:embed="rId100"/>
+          <a:blip r:embed="rId3"/>
           <a:stretch>
             <a:fillRect/>
           </a:stretch>
@@ -3037,8 +2749,49 @@
                 <a:ea typeface="Calibri" pitchFamily="34" charset="-122"/>
                 <a:cs typeface="Calibri" pitchFamily="34" charset="-120"/>
               </a:rPr>
-              <a:t xml:space="preserve">2026 TTKD Öğretim Programı — 5. Seviye: 1C2, 4B1, 6A2; 6. Seviye: 2C1; 7. Seviye: 1A1, 2B2, 2C1, 5B3</a:t>
-            </a:r>
+              <a:t>2026 TTKD Öğretim Programı — 5. Seviye: </a:t>
+            </a:r>
+            <a:r>
+              <a:rPr lang="tr-TR" sz="1000" dirty="0" smtClean="0">
+                <a:solidFill>
+                  <a:srgbClr val="94A3B8"/>
+                </a:solidFill>
+                <a:latin typeface="Calibri" pitchFamily="34" charset="0"/>
+                <a:ea typeface="Calibri" pitchFamily="34" charset="-122"/>
+                <a:cs typeface="Calibri" pitchFamily="34" charset="-120"/>
+              </a:rPr>
+              <a:t>1C2; 6</a:t>
+            </a:r>
+            <a:r>
+              <a:rPr lang="tr-TR" sz="1000" dirty="0">
+                <a:solidFill>
+                  <a:srgbClr val="94A3B8"/>
+                </a:solidFill>
+                <a:latin typeface="Calibri" pitchFamily="34" charset="0"/>
+                <a:ea typeface="Calibri" pitchFamily="34" charset="-122"/>
+                <a:cs typeface="Calibri" pitchFamily="34" charset="-120"/>
+              </a:rPr>
+              <a:t>. Seviye: 2C1; 7. Seviye: </a:t>
+            </a:r>
+            <a:r>
+              <a:rPr lang="tr-TR" sz="1000" dirty="0" smtClean="0">
+                <a:solidFill>
+                  <a:srgbClr val="94A3B8"/>
+                </a:solidFill>
+                <a:latin typeface="Calibri" pitchFamily="34" charset="0"/>
+                <a:ea typeface="Calibri" pitchFamily="34" charset="-122"/>
+                <a:cs typeface="Calibri" pitchFamily="34" charset="-120"/>
+              </a:rPr>
+              <a:t>2C1</a:t>
+            </a:r>
+            <a:endParaRPr lang="tr-TR" sz="1000" dirty="0">
+              <a:solidFill>
+                <a:srgbClr val="94A3B8"/>
+              </a:solidFill>
+              <a:latin typeface="Calibri" pitchFamily="34" charset="0"/>
+              <a:ea typeface="Calibri" pitchFamily="34" charset="-122"/>
+              <a:cs typeface="Calibri" pitchFamily="34" charset="-120"/>
+            </a:endParaRPr>
           </a:p>
         </p:txBody>
       </p:sp>
@@ -3068,7 +2821,7 @@
             <a:prstDash val="solid"/>
           </a:ln>
           <a:effectLst>
-            <a:outerShdw sx="100000" sy="100000" kx="0" ky="0" algn="bl" rotWithShape="0" blurRad="76200" dist="25400" dir="5400000">
+            <a:outerShdw blurRad="76200" dist="25400" dir="5400000" algn="bl" rotWithShape="0">
               <a:srgbClr val="1A2E5A">
                 <a:alpha val="18000"/>
               </a:srgbClr>
@@ -3117,7 +2870,7 @@
           <a:bodyPr wrap="square" rtlCol="0" anchor="ctr"/>
           <a:lstStyle/>
           <a:p>
-            <a:pPr algn="ctr" indent="0" marL="0">
+            <a:pPr marL="0" indent="0" algn="ctr">
               <a:buNone/>
             </a:pPr>
             <a:r>
@@ -3126,7 +2879,7 @@
                   <a:srgbClr val="000000"/>
                 </a:solidFill>
               </a:rPr>
-              <a:t xml:space="preserve">    </a:t>
+              <a:t>    </a:t>
             </a:r>
             <a:endParaRPr lang="en-US" sz="2200" dirty="0"/>
           </a:p>
@@ -3141,7 +2894,7 @@
           <p:nvPr/>
         </p:nvPicPr>
         <p:blipFill>
-          <a:blip r:embed="rId101"/>
+          <a:blip r:embed="rId4"/>
           <a:stretch>
             <a:fillRect/>
           </a:stretch>
@@ -3177,7 +2930,7 @@
           <a:bodyPr wrap="square" rtlCol="0" anchor="ctr"/>
           <a:lstStyle/>
           <a:p>
-            <a:pPr algn="l" indent="0" marL="0">
+            <a:pPr marL="0" indent="0" algn="l">
               <a:buNone/>
             </a:pPr>
             <a:r>
@@ -3189,7 +2942,7 @@
                 <a:ea typeface="Calibri" pitchFamily="34" charset="-122"/>
                 <a:cs typeface="Calibri" pitchFamily="34" charset="-120"/>
               </a:rPr>
-              <a:t xml:space="preserve">1. Ailemizin nesillerini onlu yıllar ve yüzyıllarla anlatacağız: “Seksenli yıllarda…”</a:t>
+              <a:t>1. Ailemizin nesillerini onlu yıllar ve yüzyıllarla anlatacağız: “Seksenli yıllarda…”</a:t>
             </a:r>
             <a:endParaRPr lang="en-US" sz="1450" dirty="0"/>
           </a:p>
@@ -3221,7 +2974,7 @@
             <a:prstDash val="solid"/>
           </a:ln>
           <a:effectLst>
-            <a:outerShdw sx="100000" sy="100000" kx="0" ky="0" algn="bl" rotWithShape="0" blurRad="76200" dist="25400" dir="5400000">
+            <a:outerShdw blurRad="76200" dist="25400" dir="5400000" algn="bl" rotWithShape="0">
               <a:srgbClr val="1A2E5A">
                 <a:alpha val="18000"/>
               </a:srgbClr>
@@ -3270,7 +3023,7 @@
           <a:bodyPr wrap="square" rtlCol="0" anchor="ctr"/>
           <a:lstStyle/>
           <a:p>
-            <a:pPr algn="ctr" indent="0" marL="0">
+            <a:pPr marL="0" indent="0" algn="ctr">
               <a:buNone/>
             </a:pPr>
             <a:r>
@@ -3279,7 +3032,7 @@
                   <a:srgbClr val="000000"/>
                 </a:solidFill>
               </a:rPr>
-              <a:t xml:space="preserve">    </a:t>
+              <a:t>    </a:t>
             </a:r>
             <a:endParaRPr lang="en-US" sz="2200" dirty="0"/>
           </a:p>
@@ -3294,7 +3047,7 @@
           <p:nvPr/>
         </p:nvPicPr>
         <p:blipFill>
-          <a:blip r:embed="rId102"/>
+          <a:blip r:embed="rId5"/>
           <a:stretch>
             <a:fillRect/>
           </a:stretch>
@@ -3330,7 +3083,7 @@
           <a:bodyPr wrap="square" rtlCol="0" anchor="ctr"/>
           <a:lstStyle/>
           <a:p>
-            <a:pPr algn="l" indent="0" marL="0">
+            <a:pPr marL="0" indent="0" algn="l">
               <a:buNone/>
             </a:pPr>
             <a:r>
@@ -3342,7 +3095,7 @@
                 <a:ea typeface="Calibri" pitchFamily="34" charset="-122"/>
                 <a:cs typeface="Calibri" pitchFamily="34" charset="-120"/>
               </a:rPr>
-              <a:t xml:space="preserve">2. “Eskiden …, oysa şimdi …” yapılarıyla yaşam tarzlarındaki değişimi karşılaştıracağız.</a:t>
+              <a:t>2. “Eskiden …, oysa şimdi …” yapılarıyla yaşam tarzlarındaki değişimi karşılaştıracağız.</a:t>
             </a:r>
             <a:endParaRPr lang="en-US" sz="1450" dirty="0"/>
           </a:p>
@@ -3374,7 +3127,7 @@
             <a:prstDash val="solid"/>
           </a:ln>
           <a:effectLst>
-            <a:outerShdw sx="100000" sy="100000" kx="0" ky="0" algn="bl" rotWithShape="0" blurRad="76200" dist="25400" dir="5400000">
+            <a:outerShdw blurRad="76200" dist="25400" dir="5400000" algn="bl" rotWithShape="0">
               <a:srgbClr val="1A2E5A">
                 <a:alpha val="18000"/>
               </a:srgbClr>
@@ -3423,7 +3176,7 @@
           <a:bodyPr wrap="square" rtlCol="0" anchor="ctr"/>
           <a:lstStyle/>
           <a:p>
-            <a:pPr algn="ctr" indent="0" marL="0">
+            <a:pPr marL="0" indent="0" algn="ctr">
               <a:buNone/>
             </a:pPr>
             <a:r>
@@ -3432,7 +3185,7 @@
                   <a:srgbClr val="000000"/>
                 </a:solidFill>
               </a:rPr>
-              <a:t xml:space="preserve">    </a:t>
+              <a:t>    </a:t>
             </a:r>
             <a:endParaRPr lang="en-US" sz="2200" dirty="0"/>
           </a:p>
@@ -3447,7 +3200,7 @@
           <p:nvPr/>
         </p:nvPicPr>
         <p:blipFill>
-          <a:blip r:embed="rId103"/>
+          <a:blip r:embed="rId6"/>
           <a:stretch>
             <a:fillRect/>
           </a:stretch>
@@ -3483,7 +3236,7 @@
           <a:bodyPr wrap="square" rtlCol="0" anchor="ctr"/>
           <a:lstStyle/>
           <a:p>
-            <a:pPr algn="l" indent="0" marL="0">
+            <a:pPr marL="0" indent="0" algn="l">
               <a:buNone/>
             </a:pPr>
             <a:r>
@@ -3495,7 +3248,7 @@
                 <a:ea typeface="Calibri" pitchFamily="34" charset="-122"/>
                 <a:cs typeface="Calibri" pitchFamily="34" charset="-120"/>
               </a:rPr>
-              <a:t xml:space="preserve">3. Yaşa saygının ve hitap kültürünün nesilden nesile nasıl aktarıldığını tartışacağız.</a:t>
+              <a:t>3. Yaşa saygının ve hitap kültürünün nesilden nesile nasıl aktarıldığını tartışacağız.</a:t>
             </a:r>
             <a:endParaRPr lang="en-US" sz="1450" dirty="0"/>
           </a:p>
@@ -3511,7 +3264,7 @@
 
 <file path=ppt/slides/slide3.xml><?xml version="1.0" encoding="utf-8"?>
 <p:sld xmlns:a="http://schemas.openxmlformats.org/drawingml/2006/main" xmlns:r="http://schemas.openxmlformats.org/officeDocument/2006/relationships" xmlns:p="http://schemas.openxmlformats.org/presentationml/2006/main">
-  <p:cSld name="Slide 3">
+  <p:cSld name="Slide 7">
     <p:spTree>
       <p:nvGrpSpPr>
         <p:cNvPr id="1" name=""/>
@@ -3587,19 +3340,19 @@
           <a:bodyPr wrap="square" rtlCol="0" anchor="ctr"/>
           <a:lstStyle/>
           <a:p>
-            <a:pPr algn="l" indent="0" marL="0">
+            <a:pPr marL="0" indent="0" algn="l">
               <a:buNone/>
             </a:pPr>
             <a:r>
               <a:rPr lang="en-US" sz="1700" b="1" dirty="0">
                 <a:solidFill>
-                  <a:srgbClr val="FFFFFF"/>
+                  <a:srgbClr val="1A2E5A"/>
                 </a:solidFill>
                 <a:latin typeface="Cambria" pitchFamily="34" charset="0"/>
                 <a:ea typeface="Cambria" pitchFamily="34" charset="-122"/>
                 <a:cs typeface="Cambria" pitchFamily="34" charset="-120"/>
               </a:rPr>
-              <a:t xml:space="preserve">      KUŞAKLAR ARASI SAYGI NASIL DÖNÜŞÜYOR?</a:t>
+              <a:t>      ZAMAN TÜNELİ: ONLU YILLAR VE YÜZYILLAR</a:t>
             </a:r>
             <a:endParaRPr lang="en-US" sz="1700" dirty="0"/>
           </a:p>
@@ -3607,14 +3360,14 @@
       </p:sp>
       <p:pic>
         <p:nvPicPr>
-          <p:cNvPr id="10" name="Emoji 10" descr="emoji"/>
+          <p:cNvPr id="18" name="Emoji 18" descr="emoji"/>
           <p:cNvPicPr>
             <a:picLocks noChangeAspect="1"/>
           </p:cNvPicPr>
           <p:nvPr/>
         </p:nvPicPr>
         <p:blipFill>
-          <a:blip r:embed="rId100"/>
+          <a:blip r:embed="rId3"/>
           <a:stretch>
             <a:fillRect/>
           </a:stretch>
@@ -3637,12 +3390,12 @@
         </p:nvSpPr>
         <p:spPr>
           <a:xfrm>
-            <a:off x="548640" y="914400"/>
-            <a:ext cx="8046720" cy="1371600"/>
+            <a:off x="548640" y="868680"/>
+            <a:ext cx="8046720" cy="960120"/>
           </a:xfrm>
           <a:prstGeom prst="roundRect">
             <a:avLst>
-              <a:gd name="adj" fmla="val 8000"/>
+              <a:gd name="adj" fmla="val 11429"/>
             </a:avLst>
           </a:prstGeom>
           <a:solidFill>
@@ -3655,7 +3408,7 @@
             <a:prstDash val="solid"/>
           </a:ln>
           <a:effectLst>
-            <a:outerShdw sx="100000" sy="100000" kx="0" ky="0" algn="bl" rotWithShape="0" blurRad="76200" dist="25400" dir="5400000">
+            <a:outerShdw blurRad="76200" dist="25400" dir="5400000" algn="bl" rotWithShape="0">
               <a:srgbClr val="1A2E5A">
                 <a:alpha val="18000"/>
               </a:srgbClr>
@@ -3671,37 +3424,61 @@
         </p:nvSpPr>
         <p:spPr>
           <a:xfrm>
-            <a:off x="822960" y="914400"/>
-            <a:ext cx="7498080" cy="1371600"/>
-          </a:xfrm>
-          <a:prstGeom prst="rect">
-            <a:avLst/>
-          </a:prstGeom>
-          <a:noFill/>
-          <a:ln/>
-        </p:spPr>
-        <p:txBody>
-          <a:bodyPr wrap="square" rtlCol="0" anchor="ctr"/>
-          <a:lstStyle/>
-          <a:p>
-            <a:pPr algn="ctr" indent="0" marL="0">
-              <a:buNone/>
-            </a:pPr>
-            <a:r>
-              <a:rPr lang="en-US" sz="1700" b="1" dirty="0">
-                <a:solidFill>
-                  <a:srgbClr val="F97316"/>
-                </a:solidFill>
-                <a:latin typeface="Cambria" pitchFamily="34" charset="0"/>
-                <a:ea typeface="Cambria" pitchFamily="34" charset="-122"/>
-                <a:cs typeface="Cambria" pitchFamily="34" charset="-120"/>
-              </a:rPr>
-              <a:t>Günümüzde, özellikle sosyal medya çağında gençler büyüklere hâlâ aynı geleneksel saygıyı gösteriyor mu?</a:t>
-            </a:r>
-            <a:endParaRPr lang="en-US" sz="1700" dirty="0"/>
-          </a:p>
-        </p:txBody>
-      </p:sp>
+            <a:off x="822960" y="868680"/>
+            <a:ext cx="7498080" cy="960120"/>
+          </a:xfrm>
+          <a:prstGeom prst="rect">
+            <a:avLst/>
+          </a:prstGeom>
+          <a:noFill/>
+          <a:ln/>
+        </p:spPr>
+        <p:txBody>
+          <a:bodyPr wrap="square" rtlCol="0" anchor="ctr"/>
+          <a:lstStyle/>
+          <a:p>
+            <a:pPr marL="0" indent="0" algn="l">
+              <a:buNone/>
+            </a:pPr>
+            <a:r>
+              <a:rPr lang="en-US" sz="1500" dirty="0">
+                <a:solidFill>
+                  <a:srgbClr val="1E1E1E"/>
+                </a:solidFill>
+                <a:latin typeface="Calibri" pitchFamily="34" charset="0"/>
+                <a:ea typeface="Calibri" pitchFamily="34" charset="-122"/>
+                <a:cs typeface="Calibri" pitchFamily="34" charset="-120"/>
+              </a:rPr>
+              <a:t>      1960'lı yıllar = altmışlı yıllar  •  1980'li yıllar = seksenli yıllar  •  21. yüzyıl</a:t>
+            </a:r>
+            <a:endParaRPr lang="en-US" sz="1500" dirty="0"/>
+          </a:p>
+        </p:txBody>
+      </p:sp>
+      <p:pic>
+        <p:nvPicPr>
+          <p:cNvPr id="19" name="Emoji 19" descr="emoji"/>
+          <p:cNvPicPr>
+            <a:picLocks noChangeAspect="1"/>
+          </p:cNvPicPr>
+          <p:nvPr/>
+        </p:nvPicPr>
+        <p:blipFill>
+          <a:blip r:embed="rId4"/>
+          <a:stretch>
+            <a:fillRect/>
+          </a:stretch>
+        </p:blipFill>
+        <p:spPr>
+          <a:xfrm>
+            <a:off x="905285" y="1253490"/>
+            <a:ext cx="190500" cy="190500"/>
+          </a:xfrm>
+          <a:prstGeom prst="rect">
+            <a:avLst/>
+          </a:prstGeom>
+        </p:spPr>
+      </p:pic>
       <p:sp>
         <p:nvSpPr>
           <p:cNvPr id="7" name="Shape 5"/>
@@ -3710,12 +3487,12 @@
         </p:nvSpPr>
         <p:spPr>
           <a:xfrm>
-            <a:off x="548640" y="2423160"/>
-            <a:ext cx="8046720" cy="1280160"/>
+            <a:off x="685800" y="2011680"/>
+            <a:ext cx="2468880" cy="1143000"/>
           </a:xfrm>
           <a:prstGeom prst="roundRect">
             <a:avLst>
-              <a:gd name="adj" fmla="val 8571"/>
+              <a:gd name="adj" fmla="val 9600"/>
             </a:avLst>
           </a:prstGeom>
           <a:solidFill>
@@ -3723,7 +3500,7 @@
           </a:solidFill>
           <a:ln w="12700">
             <a:solidFill>
-              <a:srgbClr val="FFEDD5"/>
+              <a:srgbClr val="FFFFFF"/>
             </a:solidFill>
             <a:prstDash val="solid"/>
           </a:ln>
@@ -3737,24 +3514,84 @@
         </p:nvSpPr>
         <p:spPr>
           <a:xfrm>
-            <a:off x="822960" y="2423160"/>
-            <a:ext cx="7498080" cy="1280160"/>
-          </a:xfrm>
-          <a:prstGeom prst="rect">
-            <a:avLst/>
-          </a:prstGeom>
-          <a:noFill/>
-          <a:ln/>
-        </p:spPr>
-        <p:txBody>
-          <a:bodyPr wrap="square" rtlCol="0" anchor="ctr"/>
-          <a:lstStyle/>
-          <a:p>
-            <a:pPr algn="ctr" indent="0" marL="0">
-              <a:buNone/>
-            </a:pPr>
-            <a:r>
-              <a:rPr lang="en-US" sz="1500" dirty="0">
+            <a:off x="685800" y="2084832"/>
+            <a:ext cx="2468880" cy="594360"/>
+          </a:xfrm>
+          <a:prstGeom prst="rect">
+            <a:avLst/>
+          </a:prstGeom>
+          <a:noFill/>
+          <a:ln/>
+        </p:spPr>
+        <p:txBody>
+          <a:bodyPr wrap="square" rtlCol="0" anchor="ctr"/>
+          <a:lstStyle/>
+          <a:p>
+            <a:pPr marL="0" indent="0" algn="ctr">
+              <a:buNone/>
+            </a:pPr>
+            <a:r>
+              <a:rPr lang="en-US" sz="3000" dirty="0">
+                <a:solidFill>
+                  <a:srgbClr val="000000"/>
+                </a:solidFill>
+              </a:rPr>
+              <a:t>    </a:t>
+            </a:r>
+            <a:endParaRPr lang="en-US" sz="3000" dirty="0"/>
+          </a:p>
+        </p:txBody>
+      </p:sp>
+      <p:pic>
+        <p:nvPicPr>
+          <p:cNvPr id="20" name="Emoji 20" descr="emoji"/>
+          <p:cNvPicPr>
+            <a:picLocks noChangeAspect="1"/>
+          </p:cNvPicPr>
+          <p:nvPr/>
+        </p:nvPicPr>
+        <p:blipFill>
+          <a:blip r:embed="rId5"/>
+          <a:stretch>
+            <a:fillRect/>
+          </a:stretch>
+        </p:blipFill>
+        <p:spPr>
+          <a:xfrm>
+            <a:off x="1729740" y="2191512"/>
+            <a:ext cx="381000" cy="381000"/>
+          </a:xfrm>
+          <a:prstGeom prst="rect">
+            <a:avLst/>
+          </a:prstGeom>
+        </p:spPr>
+      </p:pic>
+      <p:sp>
+        <p:nvSpPr>
+          <p:cNvPr id="9" name="Text 7"/>
+          <p:cNvSpPr/>
+          <p:nvPr/>
+        </p:nvSpPr>
+        <p:spPr>
+          <a:xfrm>
+            <a:off x="685800" y="2651760"/>
+            <a:ext cx="2468880" cy="411480"/>
+          </a:xfrm>
+          <a:prstGeom prst="rect">
+            <a:avLst/>
+          </a:prstGeom>
+          <a:noFill/>
+          <a:ln/>
+        </p:spPr>
+        <p:txBody>
+          <a:bodyPr wrap="square" rtlCol="0" anchor="ctr"/>
+          <a:lstStyle/>
+          <a:p>
+            <a:pPr marL="0" indent="0" algn="ctr">
+              <a:buNone/>
+            </a:pPr>
+            <a:r>
+              <a:rPr lang="en-US" sz="1150" b="1" dirty="0">
                 <a:solidFill>
                   <a:srgbClr val="1E293B"/>
                 </a:solidFill>
@@ -3762,48 +3599,350 @@
                 <a:ea typeface="Calibri" pitchFamily="34" charset="-122"/>
                 <a:cs typeface="Calibri" pitchFamily="34" charset="-120"/>
               </a:rPr>
-              <a:t>“Abi/Abla” demek ile büyüklere doğrudan ismiyle seslenmek arasında ne tür bir zihniyet farkı var?</a:t>
-            </a:r>
-            <a:endParaRPr lang="en-US" sz="1500" dirty="0"/>
-          </a:p>
-        </p:txBody>
-      </p:sp>
-      <p:sp>
-        <p:nvSpPr>
-          <p:cNvPr id="9" name="Text 7"/>
-          <p:cNvSpPr/>
-          <p:nvPr/>
-        </p:nvSpPr>
-        <p:spPr>
-          <a:xfrm>
-            <a:off x="457200" y="3886200"/>
-            <a:ext cx="8229600" cy="457200"/>
-          </a:xfrm>
-          <a:prstGeom prst="rect">
-            <a:avLst/>
-          </a:prstGeom>
-          <a:noFill/>
-          <a:ln/>
-        </p:spPr>
-        <p:txBody>
-          <a:bodyPr wrap="square" rtlCol="0" anchor="ctr"/>
-          <a:lstStyle/>
-          <a:p>
-            <a:pPr algn="ctr" indent="0" marL="0">
-              <a:buNone/>
-            </a:pPr>
-            <a:r>
-              <a:rPr lang="en-US" sz="1300" i="1" dirty="0">
-                <a:solidFill>
-                  <a:srgbClr val="1A2E5A"/>
+              <a:t>Dedem — 1958</a:t>
+            </a:r>
+            <a:endParaRPr lang="en-US" sz="1150" dirty="0"/>
+          </a:p>
+        </p:txBody>
+      </p:sp>
+      <p:sp>
+        <p:nvSpPr>
+          <p:cNvPr id="10" name="Shape 8"/>
+          <p:cNvSpPr/>
+          <p:nvPr/>
+        </p:nvSpPr>
+        <p:spPr>
+          <a:xfrm>
+            <a:off x="3337560" y="2011680"/>
+            <a:ext cx="2468880" cy="1143000"/>
+          </a:xfrm>
+          <a:prstGeom prst="roundRect">
+            <a:avLst>
+              <a:gd name="adj" fmla="val 9600"/>
+            </a:avLst>
+          </a:prstGeom>
+          <a:solidFill>
+            <a:srgbClr val="FFFFFF"/>
+          </a:solidFill>
+          <a:ln w="12700">
+            <a:solidFill>
+              <a:srgbClr val="FFFFFF"/>
+            </a:solidFill>
+            <a:prstDash val="solid"/>
+          </a:ln>
+        </p:spPr>
+      </p:sp>
+      <p:sp>
+        <p:nvSpPr>
+          <p:cNvPr id="11" name="Text 9"/>
+          <p:cNvSpPr/>
+          <p:nvPr/>
+        </p:nvSpPr>
+        <p:spPr>
+          <a:xfrm>
+            <a:off x="3337560" y="2084832"/>
+            <a:ext cx="2468880" cy="594360"/>
+          </a:xfrm>
+          <a:prstGeom prst="rect">
+            <a:avLst/>
+          </a:prstGeom>
+          <a:noFill/>
+          <a:ln/>
+        </p:spPr>
+        <p:txBody>
+          <a:bodyPr wrap="square" rtlCol="0" anchor="ctr"/>
+          <a:lstStyle/>
+          <a:p>
+            <a:pPr marL="0" indent="0" algn="ctr">
+              <a:buNone/>
+            </a:pPr>
+            <a:r>
+              <a:rPr lang="en-US" sz="3000" dirty="0">
+                <a:solidFill>
+                  <a:srgbClr val="000000"/>
+                </a:solidFill>
+              </a:rPr>
+              <a:t>    </a:t>
+            </a:r>
+            <a:endParaRPr lang="en-US" sz="3000" dirty="0"/>
+          </a:p>
+        </p:txBody>
+      </p:sp>
+      <p:pic>
+        <p:nvPicPr>
+          <p:cNvPr id="21" name="Emoji 21" descr="emoji"/>
+          <p:cNvPicPr>
+            <a:picLocks noChangeAspect="1"/>
+          </p:cNvPicPr>
+          <p:nvPr/>
+        </p:nvPicPr>
+        <p:blipFill>
+          <a:blip r:embed="rId6"/>
+          <a:stretch>
+            <a:fillRect/>
+          </a:stretch>
+        </p:blipFill>
+        <p:spPr>
+          <a:xfrm>
+            <a:off x="4381500" y="2191512"/>
+            <a:ext cx="381000" cy="381000"/>
+          </a:xfrm>
+          <a:prstGeom prst="rect">
+            <a:avLst/>
+          </a:prstGeom>
+        </p:spPr>
+      </p:pic>
+      <p:sp>
+        <p:nvSpPr>
+          <p:cNvPr id="12" name="Text 10"/>
+          <p:cNvSpPr/>
+          <p:nvPr/>
+        </p:nvSpPr>
+        <p:spPr>
+          <a:xfrm>
+            <a:off x="3337560" y="2651760"/>
+            <a:ext cx="2468880" cy="411480"/>
+          </a:xfrm>
+          <a:prstGeom prst="rect">
+            <a:avLst/>
+          </a:prstGeom>
+          <a:noFill/>
+          <a:ln/>
+        </p:spPr>
+        <p:txBody>
+          <a:bodyPr wrap="square" rtlCol="0" anchor="ctr"/>
+          <a:lstStyle/>
+          <a:p>
+            <a:pPr marL="0" indent="0" algn="ctr">
+              <a:buNone/>
+            </a:pPr>
+            <a:r>
+              <a:rPr lang="en-US" sz="1150" b="1" dirty="0">
+                <a:solidFill>
+                  <a:srgbClr val="1E293B"/>
                 </a:solidFill>
                 <a:latin typeface="Calibri" pitchFamily="34" charset="0"/>
                 <a:ea typeface="Calibri" pitchFamily="34" charset="-122"/>
                 <a:cs typeface="Calibri" pitchFamily="34" charset="-120"/>
               </a:rPr>
-              <a:t xml:space="preserve">Dilimiz ve ilişki biçimlerimiz daha mı bireysel hâle geldi? Bunun iyi ve zor yanları neler?</a:t>
-            </a:r>
-            <a:endParaRPr lang="en-US" sz="1300" dirty="0"/>
+              <a:t>Annem — 1985</a:t>
+            </a:r>
+            <a:endParaRPr lang="en-US" sz="1150" dirty="0"/>
+          </a:p>
+        </p:txBody>
+      </p:sp>
+      <p:sp>
+        <p:nvSpPr>
+          <p:cNvPr id="13" name="Shape 11"/>
+          <p:cNvSpPr/>
+          <p:nvPr/>
+        </p:nvSpPr>
+        <p:spPr>
+          <a:xfrm>
+            <a:off x="5989320" y="2011680"/>
+            <a:ext cx="2468880" cy="1143000"/>
+          </a:xfrm>
+          <a:prstGeom prst="roundRect">
+            <a:avLst>
+              <a:gd name="adj" fmla="val 9600"/>
+            </a:avLst>
+          </a:prstGeom>
+          <a:solidFill>
+            <a:srgbClr val="FFFFFF"/>
+          </a:solidFill>
+          <a:ln w="12700">
+            <a:solidFill>
+              <a:srgbClr val="FFFFFF"/>
+            </a:solidFill>
+            <a:prstDash val="solid"/>
+          </a:ln>
+        </p:spPr>
+      </p:sp>
+      <p:sp>
+        <p:nvSpPr>
+          <p:cNvPr id="14" name="Text 12"/>
+          <p:cNvSpPr/>
+          <p:nvPr/>
+        </p:nvSpPr>
+        <p:spPr>
+          <a:xfrm>
+            <a:off x="5989320" y="2084832"/>
+            <a:ext cx="2468880" cy="594360"/>
+          </a:xfrm>
+          <a:prstGeom prst="rect">
+            <a:avLst/>
+          </a:prstGeom>
+          <a:noFill/>
+          <a:ln/>
+        </p:spPr>
+        <p:txBody>
+          <a:bodyPr wrap="square" rtlCol="0" anchor="ctr"/>
+          <a:lstStyle/>
+          <a:p>
+            <a:pPr marL="0" indent="0" algn="ctr">
+              <a:buNone/>
+            </a:pPr>
+            <a:r>
+              <a:rPr lang="en-US" sz="3000" dirty="0">
+                <a:solidFill>
+                  <a:srgbClr val="000000"/>
+                </a:solidFill>
+              </a:rPr>
+              <a:t>    </a:t>
+            </a:r>
+            <a:endParaRPr lang="en-US" sz="3000" dirty="0"/>
+          </a:p>
+        </p:txBody>
+      </p:sp>
+      <p:pic>
+        <p:nvPicPr>
+          <p:cNvPr id="22" name="Emoji 22" descr="emoji"/>
+          <p:cNvPicPr>
+            <a:picLocks noChangeAspect="1"/>
+          </p:cNvPicPr>
+          <p:nvPr/>
+        </p:nvPicPr>
+        <p:blipFill>
+          <a:blip r:embed="rId7"/>
+          <a:stretch>
+            <a:fillRect/>
+          </a:stretch>
+        </p:blipFill>
+        <p:spPr>
+          <a:xfrm>
+            <a:off x="7033260" y="2191512"/>
+            <a:ext cx="381000" cy="381000"/>
+          </a:xfrm>
+          <a:prstGeom prst="rect">
+            <a:avLst/>
+          </a:prstGeom>
+        </p:spPr>
+      </p:pic>
+      <p:sp>
+        <p:nvSpPr>
+          <p:cNvPr id="15" name="Text 13"/>
+          <p:cNvSpPr/>
+          <p:nvPr/>
+        </p:nvSpPr>
+        <p:spPr>
+          <a:xfrm>
+            <a:off x="5989320" y="2651760"/>
+            <a:ext cx="2468880" cy="411480"/>
+          </a:xfrm>
+          <a:prstGeom prst="rect">
+            <a:avLst/>
+          </a:prstGeom>
+          <a:noFill/>
+          <a:ln/>
+        </p:spPr>
+        <p:txBody>
+          <a:bodyPr wrap="square" rtlCol="0" anchor="ctr"/>
+          <a:lstStyle/>
+          <a:p>
+            <a:pPr marL="0" indent="0" algn="ctr">
+              <a:buNone/>
+            </a:pPr>
+            <a:r>
+              <a:rPr lang="en-US" sz="1150" b="1" dirty="0">
+                <a:solidFill>
+                  <a:srgbClr val="1E293B"/>
+                </a:solidFill>
+                <a:latin typeface="Calibri" pitchFamily="34" charset="0"/>
+                <a:ea typeface="Calibri" pitchFamily="34" charset="-122"/>
+                <a:cs typeface="Calibri" pitchFamily="34" charset="-120"/>
+              </a:rPr>
+              <a:t>Ben — 2011</a:t>
+            </a:r>
+            <a:endParaRPr lang="en-US" sz="1150" dirty="0"/>
+          </a:p>
+        </p:txBody>
+      </p:sp>
+      <p:sp>
+        <p:nvSpPr>
+          <p:cNvPr id="16" name="Shape 14"/>
+          <p:cNvSpPr/>
+          <p:nvPr/>
+        </p:nvSpPr>
+        <p:spPr>
+          <a:xfrm>
+            <a:off x="548640" y="3337560"/>
+            <a:ext cx="8046720" cy="1234440"/>
+          </a:xfrm>
+          <a:prstGeom prst="roundRect">
+            <a:avLst>
+              <a:gd name="adj" fmla="val 8889"/>
+            </a:avLst>
+          </a:prstGeom>
+          <a:solidFill>
+            <a:srgbClr val="FFEDD5"/>
+          </a:solidFill>
+          <a:ln w="12700">
+            <a:solidFill>
+              <a:srgbClr val="FFFFFF"/>
+            </a:solidFill>
+            <a:prstDash val="solid"/>
+          </a:ln>
+        </p:spPr>
+      </p:sp>
+      <p:sp>
+        <p:nvSpPr>
+          <p:cNvPr id="17" name="Text 15"/>
+          <p:cNvSpPr/>
+          <p:nvPr/>
+        </p:nvSpPr>
+        <p:spPr>
+          <a:xfrm>
+            <a:off x="822960" y="3337560"/>
+            <a:ext cx="7498080" cy="1234440"/>
+          </a:xfrm>
+          <a:prstGeom prst="rect">
+            <a:avLst/>
+          </a:prstGeom>
+          <a:noFill/>
+          <a:ln/>
+        </p:spPr>
+        <p:txBody>
+          <a:bodyPr wrap="square" rtlCol="0" anchor="ctr"/>
+          <a:lstStyle/>
+          <a:p>
+            <a:pPr marL="0" indent="0" algn="l">
+              <a:lnSpc>
+                <a:spcPct val="125000"/>
+              </a:lnSpc>
+              <a:buNone/>
+            </a:pPr>
+            <a:r>
+              <a:rPr lang="en-US" sz="1350" dirty="0">
+                <a:solidFill>
+                  <a:srgbClr val="1E293B"/>
+                </a:solidFill>
+                <a:latin typeface="Calibri" pitchFamily="34" charset="0"/>
+                <a:ea typeface="Calibri" pitchFamily="34" charset="-122"/>
+                <a:cs typeface="Calibri" pitchFamily="34" charset="-120"/>
+              </a:rPr>
+              <a:t>Dedem 1958'de doğdu, altmışlı yıllarda çocuktu. Annem seksenli yıllarda, ben 21. yüzyılda doğdum.</a:t>
+            </a:r>
+            <a:endParaRPr lang="en-US" sz="1350" dirty="0"/>
+          </a:p>
+          <a:p>
+            <a:pPr marL="0" indent="0" algn="l">
+              <a:lnSpc>
+                <a:spcPct val="125000"/>
+              </a:lnSpc>
+              <a:buNone/>
+            </a:pPr>
+            <a:r>
+              <a:rPr lang="en-US" sz="1350" dirty="0">
+                <a:solidFill>
+                  <a:srgbClr val="1E293B"/>
+                </a:solidFill>
+                <a:latin typeface="Calibri" pitchFamily="34" charset="0"/>
+                <a:ea typeface="Calibri" pitchFamily="34" charset="-122"/>
+                <a:cs typeface="Calibri" pitchFamily="34" charset="-120"/>
+              </a:rPr>
+              <a:t>Sıra sende: Ailenin üç neslini onlu yıllarla anlat!</a:t>
+            </a:r>
+            <a:endParaRPr lang="en-US" sz="1350" dirty="0"/>
           </a:p>
         </p:txBody>
       </p:sp>
@@ -3893,7 +4032,7 @@
           <a:bodyPr wrap="square" rtlCol="0" anchor="ctr"/>
           <a:lstStyle/>
           <a:p>
-            <a:pPr algn="l" indent="0" marL="0">
+            <a:pPr marL="0" indent="0" algn="l">
               <a:buNone/>
             </a:pPr>
             <a:r>
@@ -3905,7 +4044,7 @@
                 <a:ea typeface="Cambria" pitchFamily="34" charset="-122"/>
                 <a:cs typeface="Cambria" pitchFamily="34" charset="-120"/>
               </a:rPr>
-              <a:t xml:space="preserve">      ESKİDEN VE ŞİMDİ: TOPLUMSAL DÖNÜŞÜM</a:t>
+              <a:t>      ESKİDEN VE ŞİMDİ: TOPLUMSAL DÖNÜŞÜM</a:t>
             </a:r>
             <a:endParaRPr lang="en-US" sz="1700" dirty="0"/>
           </a:p>
@@ -3920,7 +4059,7 @@
           <p:nvPr/>
         </p:nvPicPr>
         <p:blipFill>
-          <a:blip r:embed="rId100"/>
+          <a:blip r:embed="rId3"/>
           <a:stretch>
             <a:fillRect/>
           </a:stretch>
@@ -3983,7 +4122,7 @@
           <a:bodyPr wrap="square" rtlCol="0" anchor="ctr"/>
           <a:lstStyle/>
           <a:p>
-            <a:pPr algn="ctr" indent="0" marL="0">
+            <a:pPr marL="0" indent="0" algn="ctr">
               <a:buNone/>
             </a:pPr>
             <a:r>
@@ -3992,7 +4131,7 @@
                   <a:srgbClr val="000000"/>
                 </a:solidFill>
               </a:rPr>
-              <a:t xml:space="preserve">    </a:t>
+              <a:t>    </a:t>
             </a:r>
             <a:endParaRPr lang="en-US" sz="3600" dirty="0"/>
           </a:p>
@@ -4007,7 +4146,7 @@
           <p:nvPr/>
         </p:nvPicPr>
         <p:blipFill>
-          <a:blip r:embed="rId101"/>
+          <a:blip r:embed="rId4"/>
           <a:stretch>
             <a:fillRect/>
           </a:stretch>
@@ -4043,7 +4182,7 @@
           <a:bodyPr wrap="square" rtlCol="0" anchor="ctr"/>
           <a:lstStyle/>
           <a:p>
-            <a:pPr algn="ctr" indent="0" marL="0">
+            <a:pPr marL="0" indent="0" algn="ctr">
               <a:buNone/>
             </a:pPr>
             <a:r>
@@ -4082,7 +4221,7 @@
           <a:bodyPr wrap="square" rtlCol="0" anchor="ctr"/>
           <a:lstStyle/>
           <a:p>
-            <a:pPr algn="ctr" indent="0" marL="0">
+            <a:pPr marL="0" indent="0" algn="ctr">
               <a:buNone/>
             </a:pPr>
             <a:r>
@@ -4094,7 +4233,7 @@
                 <a:ea typeface="Calibri" pitchFamily="34" charset="-122"/>
                 <a:cs typeface="Calibri" pitchFamily="34" charset="-120"/>
               </a:rPr>
-              <a:t xml:space="preserve">Çocuklar mahallede misket, çelik çomak, yakan top oynardı. Komşuluk ilişkileri güçlüydü.</a:t>
+              <a:t>Çocuklar mahallede misket, çelik çomak, yakan top oynardı. Komşuluk ilişkileri güçlüydü.</a:t>
             </a:r>
             <a:endParaRPr lang="en-US" sz="1200" dirty="0"/>
           </a:p>
@@ -4148,7 +4287,7 @@
           <a:bodyPr wrap="square" rtlCol="0" anchor="ctr"/>
           <a:lstStyle/>
           <a:p>
-            <a:pPr algn="ctr" indent="0" marL="0">
+            <a:pPr marL="0" indent="0" algn="ctr">
               <a:buNone/>
             </a:pPr>
             <a:r>
@@ -4157,7 +4296,7 @@
                   <a:srgbClr val="000000"/>
                 </a:solidFill>
               </a:rPr>
-              <a:t xml:space="preserve">    </a:t>
+              <a:t>    </a:t>
             </a:r>
             <a:endParaRPr lang="en-US" sz="3600" dirty="0"/>
           </a:p>
@@ -4172,7 +4311,7 @@
           <p:nvPr/>
         </p:nvPicPr>
         <p:blipFill>
-          <a:blip r:embed="rId102"/>
+          <a:blip r:embed="rId5"/>
           <a:stretch>
             <a:fillRect/>
           </a:stretch>
@@ -4208,7 +4347,7 @@
           <a:bodyPr wrap="square" rtlCol="0" anchor="ctr"/>
           <a:lstStyle/>
           <a:p>
-            <a:pPr algn="ctr" indent="0" marL="0">
+            <a:pPr marL="0" indent="0" algn="ctr">
               <a:buNone/>
             </a:pPr>
             <a:r>
@@ -4247,7 +4386,7 @@
           <a:bodyPr wrap="square" rtlCol="0" anchor="ctr"/>
           <a:lstStyle/>
           <a:p>
-            <a:pPr algn="ctr" indent="0" marL="0">
+            <a:pPr marL="0" indent="0" algn="ctr">
               <a:buNone/>
             </a:pPr>
             <a:r>
@@ -4259,7 +4398,7 @@
                 <a:ea typeface="Calibri" pitchFamily="34" charset="-122"/>
                 <a:cs typeface="Calibri" pitchFamily="34" charset="-120"/>
               </a:rPr>
-              <a:t xml:space="preserve">Gençler dijital dünyada da arkadaşlık kuruyor, bilgiye kolayca ulaşıyor. Bireysellik ön plana çıktı.</a:t>
+              <a:t>Gençler dijital dünyada da arkadaşlık kuruyor, bilgiye kolayca ulaşıyor. Bireysellik ön plana çıktı.</a:t>
             </a:r>
             <a:endParaRPr lang="en-US" sz="1200" dirty="0"/>
           </a:p>
@@ -4308,7 +4447,7 @@
           <a:bodyPr wrap="square" rtlCol="0" anchor="ctr"/>
           <a:lstStyle/>
           <a:p>
-            <a:pPr algn="ctr" indent="0" marL="0">
+            <a:pPr marL="0" indent="0" algn="ctr">
               <a:buNone/>
             </a:pPr>
             <a:r>
@@ -4320,7 +4459,7 @@
                 <a:ea typeface="Calibri" pitchFamily="34" charset="-122"/>
                 <a:cs typeface="Calibri" pitchFamily="34" charset="-120"/>
               </a:rPr>
-              <a:t xml:space="preserve">“Eskiden komşuluk ilişkileri daha güçlüydü; oysa günümüzde bireysellik ön plana çıktı.”</a:t>
+              <a:t>“Eskiden komşuluk ilişkileri daha güçlüydü; oysa günümüzde bireysellik ön plana çıktı.”</a:t>
             </a:r>
             <a:endParaRPr lang="en-US" sz="1300" dirty="0"/>
           </a:p>
@@ -4335,6 +4474,312 @@
 </file>
 
 <file path=ppt/slides/slide5.xml><?xml version="1.0" encoding="utf-8"?>
+<p:sld xmlns:a="http://schemas.openxmlformats.org/drawingml/2006/main" xmlns:r="http://schemas.openxmlformats.org/officeDocument/2006/relationships" xmlns:p="http://schemas.openxmlformats.org/presentationml/2006/main">
+  <p:cSld name="Slide 3">
+    <p:spTree>
+      <p:nvGrpSpPr>
+        <p:cNvPr id="1" name=""/>
+        <p:cNvGrpSpPr/>
+        <p:nvPr/>
+      </p:nvGrpSpPr>
+      <p:grpSpPr>
+        <a:xfrm>
+          <a:off x="0" y="0"/>
+          <a:ext cx="0" cy="0"/>
+          <a:chOff x="0" y="0"/>
+          <a:chExt cx="0" cy="0"/>
+        </a:xfrm>
+      </p:grpSpPr>
+      <p:sp>
+        <p:nvSpPr>
+          <p:cNvPr id="2" name="Shape 0"/>
+          <p:cNvSpPr/>
+          <p:nvPr/>
+        </p:nvSpPr>
+        <p:spPr>
+          <a:xfrm>
+            <a:off x="0" y="0"/>
+            <a:ext cx="9144000" cy="5143500"/>
+          </a:xfrm>
+          <a:prstGeom prst="rect">
+            <a:avLst/>
+          </a:prstGeom>
+          <a:solidFill>
+            <a:srgbClr val="FFF7ED"/>
+          </a:solidFill>
+          <a:ln/>
+        </p:spPr>
+      </p:sp>
+      <p:sp>
+        <p:nvSpPr>
+          <p:cNvPr id="3" name="Shape 1"/>
+          <p:cNvSpPr/>
+          <p:nvPr/>
+        </p:nvSpPr>
+        <p:spPr>
+          <a:xfrm>
+            <a:off x="0" y="0"/>
+            <a:ext cx="9144000" cy="658368"/>
+          </a:xfrm>
+          <a:prstGeom prst="rect">
+            <a:avLst/>
+          </a:prstGeom>
+          <a:solidFill>
+            <a:srgbClr val="F97316"/>
+          </a:solidFill>
+          <a:ln/>
+        </p:spPr>
+      </p:sp>
+      <p:sp>
+        <p:nvSpPr>
+          <p:cNvPr id="4" name="Text 2"/>
+          <p:cNvSpPr/>
+          <p:nvPr/>
+        </p:nvSpPr>
+        <p:spPr>
+          <a:xfrm>
+            <a:off x="365760" y="0"/>
+            <a:ext cx="8412480" cy="658368"/>
+          </a:xfrm>
+          <a:prstGeom prst="rect">
+            <a:avLst/>
+          </a:prstGeom>
+          <a:noFill/>
+          <a:ln/>
+        </p:spPr>
+        <p:txBody>
+          <a:bodyPr wrap="square" rtlCol="0" anchor="ctr"/>
+          <a:lstStyle/>
+          <a:p>
+            <a:pPr marL="0" indent="0" algn="l">
+              <a:buNone/>
+            </a:pPr>
+            <a:r>
+              <a:rPr lang="en-US" sz="1700" b="1" dirty="0">
+                <a:solidFill>
+                  <a:srgbClr val="FFFFFF"/>
+                </a:solidFill>
+                <a:latin typeface="Cambria" pitchFamily="34" charset="0"/>
+                <a:ea typeface="Cambria" pitchFamily="34" charset="-122"/>
+                <a:cs typeface="Cambria" pitchFamily="34" charset="-120"/>
+              </a:rPr>
+              <a:t>      KUŞAKLAR ARASI SAYGI NASIL DÖNÜŞÜYOR?</a:t>
+            </a:r>
+            <a:endParaRPr lang="en-US" sz="1700" dirty="0"/>
+          </a:p>
+        </p:txBody>
+      </p:sp>
+      <p:pic>
+        <p:nvPicPr>
+          <p:cNvPr id="10" name="Emoji 10" descr="emoji"/>
+          <p:cNvPicPr>
+            <a:picLocks noChangeAspect="1"/>
+          </p:cNvPicPr>
+          <p:nvPr/>
+        </p:nvPicPr>
+        <p:blipFill>
+          <a:blip r:embed="rId3"/>
+          <a:stretch>
+            <a:fillRect/>
+          </a:stretch>
+        </p:blipFill>
+        <p:spPr>
+          <a:xfrm>
+            <a:off x="444246" y="221234"/>
+            <a:ext cx="215900" cy="215900"/>
+          </a:xfrm>
+          <a:prstGeom prst="rect">
+            <a:avLst/>
+          </a:prstGeom>
+        </p:spPr>
+      </p:pic>
+      <p:sp>
+        <p:nvSpPr>
+          <p:cNvPr id="5" name="Shape 3"/>
+          <p:cNvSpPr/>
+          <p:nvPr/>
+        </p:nvSpPr>
+        <p:spPr>
+          <a:xfrm>
+            <a:off x="548640" y="914400"/>
+            <a:ext cx="8046720" cy="1371600"/>
+          </a:xfrm>
+          <a:prstGeom prst="roundRect">
+            <a:avLst>
+              <a:gd name="adj" fmla="val 8000"/>
+            </a:avLst>
+          </a:prstGeom>
+          <a:solidFill>
+            <a:srgbClr val="FFFFFF"/>
+          </a:solidFill>
+          <a:ln w="12700">
+            <a:solidFill>
+              <a:srgbClr val="FFFFFF"/>
+            </a:solidFill>
+            <a:prstDash val="solid"/>
+          </a:ln>
+          <a:effectLst>
+            <a:outerShdw blurRad="76200" dist="25400" dir="5400000" algn="bl" rotWithShape="0">
+              <a:srgbClr val="1A2E5A">
+                <a:alpha val="18000"/>
+              </a:srgbClr>
+            </a:outerShdw>
+          </a:effectLst>
+        </p:spPr>
+      </p:sp>
+      <p:sp>
+        <p:nvSpPr>
+          <p:cNvPr id="6" name="Text 4"/>
+          <p:cNvSpPr/>
+          <p:nvPr/>
+        </p:nvSpPr>
+        <p:spPr>
+          <a:xfrm>
+            <a:off x="822960" y="914400"/>
+            <a:ext cx="7498080" cy="1371600"/>
+          </a:xfrm>
+          <a:prstGeom prst="rect">
+            <a:avLst/>
+          </a:prstGeom>
+          <a:noFill/>
+          <a:ln/>
+        </p:spPr>
+        <p:txBody>
+          <a:bodyPr wrap="square" rtlCol="0" anchor="ctr"/>
+          <a:lstStyle/>
+          <a:p>
+            <a:pPr marL="0" indent="0" algn="ctr">
+              <a:buNone/>
+            </a:pPr>
+            <a:r>
+              <a:rPr lang="en-US" sz="1700" b="1" dirty="0">
+                <a:solidFill>
+                  <a:srgbClr val="F97316"/>
+                </a:solidFill>
+                <a:latin typeface="Cambria" pitchFamily="34" charset="0"/>
+                <a:ea typeface="Cambria" pitchFamily="34" charset="-122"/>
+                <a:cs typeface="Cambria" pitchFamily="34" charset="-120"/>
+              </a:rPr>
+              <a:t>Günümüzde, özellikle sosyal medya çağında gençler büyüklere hâlâ aynı geleneksel saygıyı gösteriyor mu?</a:t>
+            </a:r>
+            <a:endParaRPr lang="en-US" sz="1700" dirty="0"/>
+          </a:p>
+        </p:txBody>
+      </p:sp>
+      <p:sp>
+        <p:nvSpPr>
+          <p:cNvPr id="7" name="Shape 5"/>
+          <p:cNvSpPr/>
+          <p:nvPr/>
+        </p:nvSpPr>
+        <p:spPr>
+          <a:xfrm>
+            <a:off x="548640" y="2423160"/>
+            <a:ext cx="8046720" cy="1280160"/>
+          </a:xfrm>
+          <a:prstGeom prst="roundRect">
+            <a:avLst>
+              <a:gd name="adj" fmla="val 8571"/>
+            </a:avLst>
+          </a:prstGeom>
+          <a:solidFill>
+            <a:srgbClr val="FFFFFF"/>
+          </a:solidFill>
+          <a:ln w="12700">
+            <a:solidFill>
+              <a:srgbClr val="FFEDD5"/>
+            </a:solidFill>
+            <a:prstDash val="solid"/>
+          </a:ln>
+        </p:spPr>
+      </p:sp>
+      <p:sp>
+        <p:nvSpPr>
+          <p:cNvPr id="8" name="Text 6"/>
+          <p:cNvSpPr/>
+          <p:nvPr/>
+        </p:nvSpPr>
+        <p:spPr>
+          <a:xfrm>
+            <a:off x="822960" y="2423160"/>
+            <a:ext cx="7498080" cy="1280160"/>
+          </a:xfrm>
+          <a:prstGeom prst="rect">
+            <a:avLst/>
+          </a:prstGeom>
+          <a:noFill/>
+          <a:ln/>
+        </p:spPr>
+        <p:txBody>
+          <a:bodyPr wrap="square" rtlCol="0" anchor="ctr"/>
+          <a:lstStyle/>
+          <a:p>
+            <a:pPr marL="0" indent="0" algn="ctr">
+              <a:buNone/>
+            </a:pPr>
+            <a:r>
+              <a:rPr lang="en-US" sz="1500" dirty="0">
+                <a:solidFill>
+                  <a:srgbClr val="1E293B"/>
+                </a:solidFill>
+                <a:latin typeface="Calibri" pitchFamily="34" charset="0"/>
+                <a:ea typeface="Calibri" pitchFamily="34" charset="-122"/>
+                <a:cs typeface="Calibri" pitchFamily="34" charset="-120"/>
+              </a:rPr>
+              <a:t>“Abi/Abla” demek ile büyüklere doğrudan ismiyle seslenmek arasında ne tür bir zihniyet farkı var?</a:t>
+            </a:r>
+            <a:endParaRPr lang="en-US" sz="1500" dirty="0"/>
+          </a:p>
+        </p:txBody>
+      </p:sp>
+      <p:sp>
+        <p:nvSpPr>
+          <p:cNvPr id="9" name="Text 7"/>
+          <p:cNvSpPr/>
+          <p:nvPr/>
+        </p:nvSpPr>
+        <p:spPr>
+          <a:xfrm>
+            <a:off x="457200" y="3886200"/>
+            <a:ext cx="8229600" cy="457200"/>
+          </a:xfrm>
+          <a:prstGeom prst="rect">
+            <a:avLst/>
+          </a:prstGeom>
+          <a:noFill/>
+          <a:ln/>
+        </p:spPr>
+        <p:txBody>
+          <a:bodyPr wrap="square" rtlCol="0" anchor="ctr"/>
+          <a:lstStyle/>
+          <a:p>
+            <a:pPr marL="0" indent="0" algn="ctr">
+              <a:buNone/>
+            </a:pPr>
+            <a:r>
+              <a:rPr lang="en-US" sz="1300" i="1" dirty="0">
+                <a:solidFill>
+                  <a:srgbClr val="1A2E5A"/>
+                </a:solidFill>
+                <a:latin typeface="Calibri" pitchFamily="34" charset="0"/>
+                <a:ea typeface="Calibri" pitchFamily="34" charset="-122"/>
+                <a:cs typeface="Calibri" pitchFamily="34" charset="-120"/>
+              </a:rPr>
+              <a:t>Dilimiz ve ilişki biçimlerimiz daha mı bireysel hâle geldi? Bunun iyi ve zor yanları neler?</a:t>
+            </a:r>
+            <a:endParaRPr lang="en-US" sz="1300" dirty="0"/>
+          </a:p>
+        </p:txBody>
+      </p:sp>
+    </p:spTree>
+  </p:cSld>
+  <p:clrMapOvr>
+    <a:masterClrMapping/>
+  </p:clrMapOvr>
+</p:sld>
+</file>
+
+<file path=ppt/slides/slide6.xml><?xml version="1.0" encoding="utf-8"?>
 <p:sld xmlns:a="http://schemas.openxmlformats.org/drawingml/2006/main" xmlns:r="http://schemas.openxmlformats.org/officeDocument/2006/relationships" xmlns:p="http://schemas.openxmlformats.org/presentationml/2006/main">
   <p:cSld name="Slide 5">
     <p:spTree>
@@ -4412,7 +4857,7 @@
           <a:bodyPr wrap="square" rtlCol="0" anchor="ctr"/>
           <a:lstStyle/>
           <a:p>
-            <a:pPr algn="l" indent="0" marL="0">
+            <a:pPr marL="0" indent="0" algn="l">
               <a:buNone/>
             </a:pPr>
             <a:r>
@@ -4424,7 +4869,7 @@
                 <a:ea typeface="Cambria" pitchFamily="34" charset="-122"/>
                 <a:cs typeface="Cambria" pitchFamily="34" charset="-120"/>
               </a:rPr>
-              <a:t xml:space="preserve">      DİL İSKELETİ: NESİL KARŞILAŞTIRMASI</a:t>
+              <a:t>      DİL İSKELETİ: NESİL KARŞILAŞTIRMASI</a:t>
             </a:r>
             <a:endParaRPr lang="en-US" sz="1700" dirty="0"/>
           </a:p>
@@ -4439,7 +4884,7 @@
           <p:nvPr/>
         </p:nvPicPr>
         <p:blipFill>
-          <a:blip r:embed="rId100"/>
+          <a:blip r:embed="rId3"/>
           <a:stretch>
             <a:fillRect/>
           </a:stretch>
@@ -4480,7 +4925,7 @@
             <a:prstDash val="solid"/>
           </a:ln>
           <a:effectLst>
-            <a:outerShdw sx="100000" sy="100000" kx="0" ky="0" algn="bl" rotWithShape="0" blurRad="76200" dist="25400" dir="5400000">
+            <a:outerShdw blurRad="76200" dist="25400" dir="5400000" algn="bl" rotWithShape="0">
               <a:srgbClr val="1A2E5A">
                 <a:alpha val="18000"/>
               </a:srgbClr>
@@ -4509,7 +4954,7 @@
           <a:bodyPr wrap="square" rtlCol="0" anchor="ctr"/>
           <a:lstStyle/>
           <a:p>
-            <a:pPr algn="l" indent="0" marL="0">
+            <a:pPr marL="0" indent="0" algn="l">
               <a:lnSpc>
                 <a:spcPct val="130000"/>
               </a:lnSpc>
@@ -4524,12 +4969,12 @@
                 <a:ea typeface="Calibri" pitchFamily="34" charset="-122"/>
                 <a:cs typeface="Calibri" pitchFamily="34" charset="-120"/>
               </a:rPr>
-              <a:t xml:space="preserve">Bizim nesil ____ büyüdü. Anneannem/babaannem ____'li/'lı yıllarda gençti.</a:t>
+              <a:t>Bizim nesil ____ büyüdü. Anneannem/babaannem ____'li/'lı yıllarda gençti.</a:t>
             </a:r>
             <a:endParaRPr lang="en-US" sz="1500" dirty="0"/>
           </a:p>
           <a:p>
-            <a:pPr algn="l" indent="0" marL="0">
+            <a:pPr marL="0" indent="0" algn="l">
               <a:lnSpc>
                 <a:spcPct val="130000"/>
               </a:lnSpc>
@@ -4544,7 +4989,7 @@
                 <a:ea typeface="Calibri" pitchFamily="34" charset="-122"/>
                 <a:cs typeface="Calibri" pitchFamily="34" charset="-120"/>
               </a:rPr>
-              <a:t xml:space="preserve">Eskiden ____ yoktu; oysa şimdi ____ var.</a:t>
+              <a:t>Eskiden ____ yoktu; oysa şimdi ____ var.</a:t>
             </a:r>
             <a:endParaRPr lang="en-US" sz="1500" dirty="0"/>
           </a:p>
@@ -4593,7 +5038,7 @@
           <a:bodyPr wrap="square" rtlCol="0" anchor="ctr"/>
           <a:lstStyle/>
           <a:p>
-            <a:pPr algn="ctr" indent="0" marL="0">
+            <a:pPr marL="0" indent="0" algn="ctr">
               <a:buNone/>
             </a:pPr>
             <a:r>
@@ -4605,7 +5050,7 @@
                 <a:ea typeface="Calibri" pitchFamily="34" charset="-122"/>
                 <a:cs typeface="Calibri" pitchFamily="34" charset="-120"/>
               </a:rPr>
-              <a:t xml:space="preserve">      Örnek</a:t>
+              <a:t>      Örnek</a:t>
             </a:r>
             <a:endParaRPr lang="en-US" sz="1300" dirty="0"/>
           </a:p>
@@ -4620,7 +5065,7 @@
           <p:nvPr/>
         </p:nvPicPr>
         <p:blipFill>
-          <a:blip r:embed="rId101"/>
+          <a:blip r:embed="rId4"/>
           <a:stretch>
             <a:fillRect/>
           </a:stretch>
@@ -4683,7 +5128,7 @@
           <a:bodyPr wrap="square" rtlCol="0" anchor="ctr"/>
           <a:lstStyle/>
           <a:p>
-            <a:pPr algn="l" indent="0" marL="0">
+            <a:pPr marL="0" indent="0" algn="l">
               <a:buNone/>
             </a:pPr>
             <a:r>
@@ -4695,533 +5140,9 @@
                 <a:ea typeface="Calibri" pitchFamily="34" charset="-122"/>
                 <a:cs typeface="Calibri" pitchFamily="34" charset="-120"/>
               </a:rPr>
-              <a:t xml:space="preserve">“Bizim nesil dijital teknolojilerin ortasında büyüdü. Anneannem altmışlı yıllarda gençti; o zamanlar internet yoktu, insanlar mektup yazardı. Eskiden bilgiye ulaşmak zordu ama insan ilişkileri daha derindi; oysa şimdi bilgiye ulaşmak kolay, ancak yüz yüze iletişim azaldı.”</a:t>
+              <a:t>“Bizim nesil dijital teknolojilerin ortasında büyüdü. Anneannem altmışlı yıllarda gençti; o zamanlar internet yoktu, insanlar mektup yazardı. Eskiden bilgiye ulaşmak zordu ama insan ilişkileri daha derindi; oysa şimdi bilgiye ulaşmak kolay, ancak yüz yüze iletişim azaldı.”</a:t>
             </a:r>
             <a:endParaRPr lang="en-US" sz="1150" dirty="0"/>
-          </a:p>
-        </p:txBody>
-      </p:sp>
-    </p:spTree>
-  </p:cSld>
-  <p:clrMapOvr>
-    <a:masterClrMapping/>
-  </p:clrMapOvr>
-</p:sld>
-</file>
-
-<file path=ppt/slides/slide6.xml><?xml version="1.0" encoding="utf-8"?>
-<p:sld xmlns:a="http://schemas.openxmlformats.org/drawingml/2006/main" xmlns:r="http://schemas.openxmlformats.org/officeDocument/2006/relationships" xmlns:p="http://schemas.openxmlformats.org/presentationml/2006/main">
-  <p:cSld name="Slide 6">
-    <p:spTree>
-      <p:nvGrpSpPr>
-        <p:cNvPr id="1" name=""/>
-        <p:cNvGrpSpPr/>
-        <p:nvPr/>
-      </p:nvGrpSpPr>
-      <p:grpSpPr>
-        <a:xfrm>
-          <a:off x="0" y="0"/>
-          <a:ext cx="0" cy="0"/>
-          <a:chOff x="0" y="0"/>
-          <a:chExt cx="0" cy="0"/>
-        </a:xfrm>
-      </p:grpSpPr>
-      <p:sp>
-        <p:nvSpPr>
-          <p:cNvPr id="2" name="Shape 0"/>
-          <p:cNvSpPr/>
-          <p:nvPr/>
-        </p:nvSpPr>
-        <p:spPr>
-          <a:xfrm>
-            <a:off x="0" y="0"/>
-            <a:ext cx="9144000" cy="5143500"/>
-          </a:xfrm>
-          <a:prstGeom prst="rect">
-            <a:avLst/>
-          </a:prstGeom>
-          <a:solidFill>
-            <a:srgbClr val="FFF7ED"/>
-          </a:solidFill>
-          <a:ln/>
-        </p:spPr>
-      </p:sp>
-      <p:sp>
-        <p:nvSpPr>
-          <p:cNvPr id="3" name="Shape 1"/>
-          <p:cNvSpPr/>
-          <p:nvPr/>
-        </p:nvSpPr>
-        <p:spPr>
-          <a:xfrm>
-            <a:off x="0" y="0"/>
-            <a:ext cx="9144000" cy="658368"/>
-          </a:xfrm>
-          <a:prstGeom prst="rect">
-            <a:avLst/>
-          </a:prstGeom>
-          <a:solidFill>
-            <a:srgbClr val="F97316"/>
-          </a:solidFill>
-          <a:ln/>
-        </p:spPr>
-      </p:sp>
-      <p:sp>
-        <p:nvSpPr>
-          <p:cNvPr id="4" name="Text 2"/>
-          <p:cNvSpPr/>
-          <p:nvPr/>
-        </p:nvSpPr>
-        <p:spPr>
-          <a:xfrm>
-            <a:off x="365760" y="0"/>
-            <a:ext cx="8412480" cy="658368"/>
-          </a:xfrm>
-          <a:prstGeom prst="rect">
-            <a:avLst/>
-          </a:prstGeom>
-          <a:noFill/>
-          <a:ln/>
-        </p:spPr>
-        <p:txBody>
-          <a:bodyPr wrap="square" rtlCol="0" anchor="ctr"/>
-          <a:lstStyle/>
-          <a:p>
-            <a:pPr algn="l" indent="0" marL="0">
-              <a:buNone/>
-            </a:pPr>
-            <a:r>
-              <a:rPr lang="en-US" sz="1700" b="1" dirty="0">
-                <a:solidFill>
-                  <a:srgbClr val="FFFFFF"/>
-                </a:solidFill>
-                <a:latin typeface="Cambria" pitchFamily="34" charset="0"/>
-                <a:ea typeface="Cambria" pitchFamily="34" charset="-122"/>
-                <a:cs typeface="Cambria" pitchFamily="34" charset="-120"/>
-              </a:rPr>
-              <a:t xml:space="preserve">      YAZI ATÖLYESİ: ESKİDEN VE ŞİMDİ</a:t>
-            </a:r>
-            <a:endParaRPr lang="en-US" sz="1700" dirty="0"/>
-          </a:p>
-        </p:txBody>
-      </p:sp>
-      <p:pic>
-        <p:nvPicPr>
-          <p:cNvPr id="17" name="Emoji 17" descr="emoji"/>
-          <p:cNvPicPr>
-            <a:picLocks noChangeAspect="1"/>
-          </p:cNvPicPr>
-          <p:nvPr/>
-        </p:nvPicPr>
-        <p:blipFill>
-          <a:blip r:embed="rId100"/>
-          <a:stretch>
-            <a:fillRect/>
-          </a:stretch>
-        </p:blipFill>
-        <p:spPr>
-          <a:xfrm>
-            <a:off x="444246" y="221234"/>
-            <a:ext cx="215900" cy="215900"/>
-          </a:xfrm>
-          <a:prstGeom prst="rect">
-            <a:avLst/>
-          </a:prstGeom>
-        </p:spPr>
-      </p:pic>
-      <p:sp>
-        <p:nvSpPr>
-          <p:cNvPr id="5" name="Shape 3"/>
-          <p:cNvSpPr/>
-          <p:nvPr/>
-        </p:nvSpPr>
-        <p:spPr>
-          <a:xfrm>
-            <a:off x="640080" y="1188720"/>
-            <a:ext cx="7863840" cy="914400"/>
-          </a:xfrm>
-          <a:prstGeom prst="roundRect">
-            <a:avLst>
-              <a:gd name="adj" fmla="val 12000"/>
-            </a:avLst>
-          </a:prstGeom>
-          <a:solidFill>
-            <a:srgbClr val="FFFFFF"/>
-          </a:solidFill>
-          <a:ln w="12700">
-            <a:solidFill>
-              <a:srgbClr val="FFFFFF"/>
-            </a:solidFill>
-            <a:prstDash val="solid"/>
-          </a:ln>
-          <a:effectLst>
-            <a:outerShdw sx="100000" sy="100000" kx="0" ky="0" algn="bl" rotWithShape="0" blurRad="76200" dist="25400" dir="5400000">
-              <a:srgbClr val="1A2E5A">
-                <a:alpha val="18000"/>
-              </a:srgbClr>
-            </a:outerShdw>
-          </a:effectLst>
-        </p:spPr>
-      </p:sp>
-      <p:sp>
-        <p:nvSpPr>
-          <p:cNvPr id="6" name="Shape 4"/>
-          <p:cNvSpPr/>
-          <p:nvPr/>
-        </p:nvSpPr>
-        <p:spPr>
-          <a:xfrm>
-            <a:off x="868680" y="1371600"/>
-            <a:ext cx="548640" cy="548640"/>
-          </a:xfrm>
-          <a:prstGeom prst="ellipse">
-            <a:avLst/>
-          </a:prstGeom>
-          <a:solidFill>
-            <a:srgbClr val="F97316"/>
-          </a:solidFill>
-          <a:ln/>
-        </p:spPr>
-      </p:sp>
-      <p:sp>
-        <p:nvSpPr>
-          <p:cNvPr id="7" name="Text 5"/>
-          <p:cNvSpPr/>
-          <p:nvPr/>
-        </p:nvSpPr>
-        <p:spPr>
-          <a:xfrm>
-            <a:off x="868680" y="1371600"/>
-            <a:ext cx="548640" cy="548640"/>
-          </a:xfrm>
-          <a:prstGeom prst="rect">
-            <a:avLst/>
-          </a:prstGeom>
-          <a:noFill/>
-          <a:ln/>
-        </p:spPr>
-        <p:txBody>
-          <a:bodyPr wrap="square" rtlCol="0" anchor="ctr"/>
-          <a:lstStyle/>
-          <a:p>
-            <a:pPr algn="ctr" indent="0" marL="0">
-              <a:buNone/>
-            </a:pPr>
-            <a:r>
-              <a:rPr lang="en-US" sz="1800" b="1" dirty="0">
-                <a:solidFill>
-                  <a:srgbClr val="FFFFFF"/>
-                </a:solidFill>
-                <a:latin typeface="Calibri" pitchFamily="34" charset="0"/>
-                <a:ea typeface="Calibri" pitchFamily="34" charset="-122"/>
-                <a:cs typeface="Calibri" pitchFamily="34" charset="-120"/>
-              </a:rPr>
-              <a:t>1</a:t>
-            </a:r>
-            <a:endParaRPr lang="en-US" sz="1800" dirty="0"/>
-          </a:p>
-        </p:txBody>
-      </p:sp>
-      <p:sp>
-        <p:nvSpPr>
-          <p:cNvPr id="8" name="Text 6"/>
-          <p:cNvSpPr/>
-          <p:nvPr/>
-        </p:nvSpPr>
-        <p:spPr>
-          <a:xfrm>
-            <a:off x="1645920" y="1188720"/>
-            <a:ext cx="6675120" cy="914400"/>
-          </a:xfrm>
-          <a:prstGeom prst="rect">
-            <a:avLst/>
-          </a:prstGeom>
-          <a:noFill/>
-          <a:ln/>
-        </p:spPr>
-        <p:txBody>
-          <a:bodyPr wrap="square" rtlCol="0" anchor="ctr"/>
-          <a:lstStyle/>
-          <a:p>
-            <a:pPr algn="l" indent="0" marL="0">
-              <a:buNone/>
-            </a:pPr>
-            <a:r>
-              <a:rPr lang="en-US" sz="1300" b="1" dirty="0">
-                <a:solidFill>
-                  <a:srgbClr val="1A2E5A"/>
-                </a:solidFill>
-                <a:latin typeface="Calibri" pitchFamily="34" charset="0"/>
-                <a:ea typeface="Calibri" pitchFamily="34" charset="-122"/>
-                <a:cs typeface="Calibri" pitchFamily="34" charset="-120"/>
-              </a:rPr>
-              <a:t xml:space="preserve">Büyüklerinizin gençliği ile sizin gençliğiniz arasındaki en büyük 2 fark (“Seksenli yıllarda…”)</a:t>
-            </a:r>
-            <a:endParaRPr lang="en-US" sz="1300" dirty="0"/>
-          </a:p>
-        </p:txBody>
-      </p:sp>
-      <p:sp>
-        <p:nvSpPr>
-          <p:cNvPr id="9" name="Shape 7"/>
-          <p:cNvSpPr/>
-          <p:nvPr/>
-        </p:nvSpPr>
-        <p:spPr>
-          <a:xfrm>
-            <a:off x="640080" y="2286000"/>
-            <a:ext cx="7863840" cy="914400"/>
-          </a:xfrm>
-          <a:prstGeom prst="roundRect">
-            <a:avLst>
-              <a:gd name="adj" fmla="val 12000"/>
-            </a:avLst>
-          </a:prstGeom>
-          <a:solidFill>
-            <a:srgbClr val="FFFFFF"/>
-          </a:solidFill>
-          <a:ln w="12700">
-            <a:solidFill>
-              <a:srgbClr val="FFFFFF"/>
-            </a:solidFill>
-            <a:prstDash val="solid"/>
-          </a:ln>
-          <a:effectLst>
-            <a:outerShdw sx="100000" sy="100000" kx="0" ky="0" algn="bl" rotWithShape="0" blurRad="76200" dist="25400" dir="5400000">
-              <a:srgbClr val="1A2E5A">
-                <a:alpha val="18000"/>
-              </a:srgbClr>
-            </a:outerShdw>
-          </a:effectLst>
-        </p:spPr>
-      </p:sp>
-      <p:sp>
-        <p:nvSpPr>
-          <p:cNvPr id="10" name="Shape 8"/>
-          <p:cNvSpPr/>
-          <p:nvPr/>
-        </p:nvSpPr>
-        <p:spPr>
-          <a:xfrm>
-            <a:off x="868680" y="2468880"/>
-            <a:ext cx="548640" cy="548640"/>
-          </a:xfrm>
-          <a:prstGeom prst="ellipse">
-            <a:avLst/>
-          </a:prstGeom>
-          <a:solidFill>
-            <a:srgbClr val="F97316"/>
-          </a:solidFill>
-          <a:ln/>
-        </p:spPr>
-      </p:sp>
-      <p:sp>
-        <p:nvSpPr>
-          <p:cNvPr id="11" name="Text 9"/>
-          <p:cNvSpPr/>
-          <p:nvPr/>
-        </p:nvSpPr>
-        <p:spPr>
-          <a:xfrm>
-            <a:off x="868680" y="2468880"/>
-            <a:ext cx="548640" cy="548640"/>
-          </a:xfrm>
-          <a:prstGeom prst="rect">
-            <a:avLst/>
-          </a:prstGeom>
-          <a:noFill/>
-          <a:ln/>
-        </p:spPr>
-        <p:txBody>
-          <a:bodyPr wrap="square" rtlCol="0" anchor="ctr"/>
-          <a:lstStyle/>
-          <a:p>
-            <a:pPr algn="ctr" indent="0" marL="0">
-              <a:buNone/>
-            </a:pPr>
-            <a:r>
-              <a:rPr lang="en-US" sz="1800" b="1" dirty="0">
-                <a:solidFill>
-                  <a:srgbClr val="FFFFFF"/>
-                </a:solidFill>
-                <a:latin typeface="Calibri" pitchFamily="34" charset="0"/>
-                <a:ea typeface="Calibri" pitchFamily="34" charset="-122"/>
-                <a:cs typeface="Calibri" pitchFamily="34" charset="-120"/>
-              </a:rPr>
-              <a:t>2</a:t>
-            </a:r>
-            <a:endParaRPr lang="en-US" sz="1800" dirty="0"/>
-          </a:p>
-        </p:txBody>
-      </p:sp>
-      <p:sp>
-        <p:nvSpPr>
-          <p:cNvPr id="12" name="Text 10"/>
-          <p:cNvSpPr/>
-          <p:nvPr/>
-        </p:nvSpPr>
-        <p:spPr>
-          <a:xfrm>
-            <a:off x="1645920" y="2286000"/>
-            <a:ext cx="6675120" cy="914400"/>
-          </a:xfrm>
-          <a:prstGeom prst="rect">
-            <a:avLst/>
-          </a:prstGeom>
-          <a:noFill/>
-          <a:ln/>
-        </p:spPr>
-        <p:txBody>
-          <a:bodyPr wrap="square" rtlCol="0" anchor="ctr"/>
-          <a:lstStyle/>
-          <a:p>
-            <a:pPr algn="l" indent="0" marL="0">
-              <a:buNone/>
-            </a:pPr>
-            <a:r>
-              <a:rPr lang="en-US" sz="1300" b="1" dirty="0">
-                <a:solidFill>
-                  <a:srgbClr val="1A2E5A"/>
-                </a:solidFill>
-                <a:latin typeface="Calibri" pitchFamily="34" charset="0"/>
-                <a:ea typeface="Calibri" pitchFamily="34" charset="-122"/>
-                <a:cs typeface="Calibri" pitchFamily="34" charset="-120"/>
-              </a:rPr>
-              <a:t xml:space="preserve">“Eskiden …, oysa şimdi …” ve “buna karşın” gibi karşılaştırma yapıları</a:t>
-            </a:r>
-            <a:endParaRPr lang="en-US" sz="1300" dirty="0"/>
-          </a:p>
-        </p:txBody>
-      </p:sp>
-      <p:sp>
-        <p:nvSpPr>
-          <p:cNvPr id="13" name="Shape 11"/>
-          <p:cNvSpPr/>
-          <p:nvPr/>
-        </p:nvSpPr>
-        <p:spPr>
-          <a:xfrm>
-            <a:off x="640080" y="3383280"/>
-            <a:ext cx="7863840" cy="914400"/>
-          </a:xfrm>
-          <a:prstGeom prst="roundRect">
-            <a:avLst>
-              <a:gd name="adj" fmla="val 12000"/>
-            </a:avLst>
-          </a:prstGeom>
-          <a:solidFill>
-            <a:srgbClr val="FFFFFF"/>
-          </a:solidFill>
-          <a:ln w="12700">
-            <a:solidFill>
-              <a:srgbClr val="FFFFFF"/>
-            </a:solidFill>
-            <a:prstDash val="solid"/>
-          </a:ln>
-          <a:effectLst>
-            <a:outerShdw sx="100000" sy="100000" kx="0" ky="0" algn="bl" rotWithShape="0" blurRad="76200" dist="25400" dir="5400000">
-              <a:srgbClr val="1A2E5A">
-                <a:alpha val="18000"/>
-              </a:srgbClr>
-            </a:outerShdw>
-          </a:effectLst>
-        </p:spPr>
-      </p:sp>
-      <p:sp>
-        <p:nvSpPr>
-          <p:cNvPr id="14" name="Shape 12"/>
-          <p:cNvSpPr/>
-          <p:nvPr/>
-        </p:nvSpPr>
-        <p:spPr>
-          <a:xfrm>
-            <a:off x="868680" y="3566160"/>
-            <a:ext cx="548640" cy="548640"/>
-          </a:xfrm>
-          <a:prstGeom prst="ellipse">
-            <a:avLst/>
-          </a:prstGeom>
-          <a:solidFill>
-            <a:srgbClr val="F97316"/>
-          </a:solidFill>
-          <a:ln/>
-        </p:spPr>
-      </p:sp>
-      <p:sp>
-        <p:nvSpPr>
-          <p:cNvPr id="15" name="Text 13"/>
-          <p:cNvSpPr/>
-          <p:nvPr/>
-        </p:nvSpPr>
-        <p:spPr>
-          <a:xfrm>
-            <a:off x="868680" y="3566160"/>
-            <a:ext cx="548640" cy="548640"/>
-          </a:xfrm>
-          <a:prstGeom prst="rect">
-            <a:avLst/>
-          </a:prstGeom>
-          <a:noFill/>
-          <a:ln/>
-        </p:spPr>
-        <p:txBody>
-          <a:bodyPr wrap="square" rtlCol="0" anchor="ctr"/>
-          <a:lstStyle/>
-          <a:p>
-            <a:pPr algn="ctr" indent="0" marL="0">
-              <a:buNone/>
-            </a:pPr>
-            <a:r>
-              <a:rPr lang="en-US" sz="1800" b="1" dirty="0">
-                <a:solidFill>
-                  <a:srgbClr val="FFFFFF"/>
-                </a:solidFill>
-                <a:latin typeface="Calibri" pitchFamily="34" charset="0"/>
-                <a:ea typeface="Calibri" pitchFamily="34" charset="-122"/>
-                <a:cs typeface="Calibri" pitchFamily="34" charset="-120"/>
-              </a:rPr>
-              <a:t>3</a:t>
-            </a:r>
-            <a:endParaRPr lang="en-US" sz="1800" dirty="0"/>
-          </a:p>
-        </p:txBody>
-      </p:sp>
-      <p:sp>
-        <p:nvSpPr>
-          <p:cNvPr id="16" name="Text 14"/>
-          <p:cNvSpPr/>
-          <p:nvPr/>
-        </p:nvSpPr>
-        <p:spPr>
-          <a:xfrm>
-            <a:off x="1645920" y="3383280"/>
-            <a:ext cx="6675120" cy="914400"/>
-          </a:xfrm>
-          <a:prstGeom prst="rect">
-            <a:avLst/>
-          </a:prstGeom>
-          <a:noFill/>
-          <a:ln/>
-        </p:spPr>
-        <p:txBody>
-          <a:bodyPr wrap="square" rtlCol="0" anchor="ctr"/>
-          <a:lstStyle/>
-          <a:p>
-            <a:pPr algn="l" indent="0" marL="0">
-              <a:buNone/>
-            </a:pPr>
-            <a:r>
-              <a:rPr lang="en-US" sz="1300" b="1" dirty="0">
-                <a:solidFill>
-                  <a:srgbClr val="1A2E5A"/>
-                </a:solidFill>
-                <a:latin typeface="Calibri" pitchFamily="34" charset="0"/>
-                <a:ea typeface="Calibri" pitchFamily="34" charset="-122"/>
-                <a:cs typeface="Calibri" pitchFamily="34" charset="-120"/>
-              </a:rPr>
-              <a:t xml:space="preserve">Hitap kültürü nasıl değişti? Yaşadığınız ülke ile Türkiye'yi karşılaştırarak değerlendirin.</a:t>
-            </a:r>
-            <a:endParaRPr lang="en-US" sz="1300" dirty="0"/>
           </a:p>
         </p:txBody>
       </p:sp>
@@ -5311,7 +5232,7 @@
           <a:bodyPr wrap="square" rtlCol="0" anchor="ctr"/>
           <a:lstStyle/>
           <a:p>
-            <a:pPr algn="l" indent="0" marL="0">
+            <a:pPr marL="0" indent="0" algn="l">
               <a:buNone/>
             </a:pPr>
             <a:r>
@@ -5323,7 +5244,7 @@
                 <a:ea typeface="Cambria" pitchFamily="34" charset="-122"/>
                 <a:cs typeface="Cambria" pitchFamily="34" charset="-120"/>
               </a:rPr>
-              <a:t xml:space="preserve">      KÜLTÜR KÖŞESİ – DEDEKTİF SIRRI!</a:t>
+              <a:t>      KÜLTÜR KÖŞESİ – DEDEKTİF SIRRI!</a:t>
             </a:r>
             <a:endParaRPr lang="en-US" sz="1700" dirty="0"/>
           </a:p>
@@ -5338,7 +5259,7 @@
           <p:nvPr/>
         </p:nvPicPr>
         <p:blipFill>
-          <a:blip r:embed="rId100"/>
+          <a:blip r:embed="rId3"/>
           <a:stretch>
             <a:fillRect/>
           </a:stretch>
@@ -5379,7 +5300,7 @@
             <a:prstDash val="solid"/>
           </a:ln>
           <a:effectLst>
-            <a:outerShdw sx="100000" sy="100000" kx="0" ky="0" algn="bl" rotWithShape="0" blurRad="76200" dist="25400" dir="5400000">
+            <a:outerShdw blurRad="76200" dist="25400" dir="5400000" algn="bl" rotWithShape="0">
               <a:srgbClr val="1A2E5A">
                 <a:alpha val="18000"/>
               </a:srgbClr>
@@ -5408,7 +5329,7 @@
           <a:bodyPr wrap="square" rtlCol="0" anchor="ctr"/>
           <a:lstStyle/>
           <a:p>
-            <a:pPr algn="l" indent="0" marL="0">
+            <a:pPr marL="0" indent="0" algn="l">
               <a:buNone/>
             </a:pPr>
             <a:r>
@@ -5420,7 +5341,7 @@
                 <a:ea typeface="Calibri" pitchFamily="34" charset="-122"/>
                 <a:cs typeface="Calibri" pitchFamily="34" charset="-120"/>
               </a:rPr>
-              <a:t xml:space="preserve">      Bir sözümüz var: “Büyüğe saygı, küçüğe sevgi.” Kültür, nesilden nesile aktarılır.</a:t>
+              <a:t>      Bir sözümüz var: “Büyüğe saygı, küçüğe sevgi.” Kültür, nesilden nesile aktarılır.</a:t>
             </a:r>
             <a:endParaRPr lang="en-US" sz="1500" dirty="0"/>
           </a:p>
@@ -5435,7 +5356,7 @@
           <p:nvPr/>
         </p:nvPicPr>
         <p:blipFill>
-          <a:blip r:embed="rId101"/>
+          <a:blip r:embed="rId4"/>
           <a:stretch>
             <a:fillRect/>
           </a:stretch>
@@ -5498,7 +5419,7 @@
           <a:bodyPr wrap="square" rtlCol="0" anchor="ctr"/>
           <a:lstStyle/>
           <a:p>
-            <a:pPr algn="ctr" indent="0" marL="0">
+            <a:pPr marL="0" indent="0" algn="ctr">
               <a:buNone/>
             </a:pPr>
             <a:r>
@@ -5507,7 +5428,7 @@
                   <a:srgbClr val="000000"/>
                 </a:solidFill>
               </a:rPr>
-              <a:t xml:space="preserve">    </a:t>
+              <a:t>    </a:t>
             </a:r>
             <a:endParaRPr lang="en-US" sz="3000" dirty="0"/>
           </a:p>
@@ -5522,7 +5443,7 @@
           <p:nvPr/>
         </p:nvPicPr>
         <p:blipFill>
-          <a:blip r:embed="rId102"/>
+          <a:blip r:embed="rId5"/>
           <a:stretch>
             <a:fillRect/>
           </a:stretch>
@@ -5558,7 +5479,7 @@
           <a:bodyPr wrap="square" rtlCol="0" anchor="ctr"/>
           <a:lstStyle/>
           <a:p>
-            <a:pPr algn="ctr" indent="0" marL="0">
+            <a:pPr marL="0" indent="0" algn="ctr">
               <a:buNone/>
             </a:pPr>
             <a:r>
@@ -5570,7 +5491,7 @@
                 <a:ea typeface="Calibri" pitchFamily="34" charset="-122"/>
                 <a:cs typeface="Calibri" pitchFamily="34" charset="-120"/>
               </a:rPr>
-              <a:t xml:space="preserve">Masallar ve atasözleri</a:t>
+              <a:t>Masallar ve atasözleri</a:t>
             </a:r>
             <a:endParaRPr lang="en-US" sz="1150" dirty="0"/>
           </a:p>
@@ -5624,7 +5545,7 @@
           <a:bodyPr wrap="square" rtlCol="0" anchor="ctr"/>
           <a:lstStyle/>
           <a:p>
-            <a:pPr algn="ctr" indent="0" marL="0">
+            <a:pPr marL="0" indent="0" algn="ctr">
               <a:buNone/>
             </a:pPr>
             <a:r>
@@ -5633,7 +5554,7 @@
                   <a:srgbClr val="000000"/>
                 </a:solidFill>
               </a:rPr>
-              <a:t xml:space="preserve">    </a:t>
+              <a:t>    </a:t>
             </a:r>
             <a:endParaRPr lang="en-US" sz="3000" dirty="0"/>
           </a:p>
@@ -5648,7 +5569,7 @@
           <p:nvPr/>
         </p:nvPicPr>
         <p:blipFill>
-          <a:blip r:embed="rId103"/>
+          <a:blip r:embed="rId6"/>
           <a:stretch>
             <a:fillRect/>
           </a:stretch>
@@ -5684,7 +5605,7 @@
           <a:bodyPr wrap="square" rtlCol="0" anchor="ctr"/>
           <a:lstStyle/>
           <a:p>
-            <a:pPr algn="ctr" indent="0" marL="0">
+            <a:pPr marL="0" indent="0" algn="ctr">
               <a:buNone/>
             </a:pPr>
             <a:r>
@@ -5696,7 +5617,7 @@
                 <a:ea typeface="Calibri" pitchFamily="34" charset="-122"/>
                 <a:cs typeface="Calibri" pitchFamily="34" charset="-120"/>
               </a:rPr>
-              <a:t xml:space="preserve">Aile tarifleri</a:t>
+              <a:t>Aile tarifleri</a:t>
             </a:r>
             <a:endParaRPr lang="en-US" sz="1150" dirty="0"/>
           </a:p>
@@ -5750,7 +5671,7 @@
           <a:bodyPr wrap="square" rtlCol="0" anchor="ctr"/>
           <a:lstStyle/>
           <a:p>
-            <a:pPr algn="ctr" indent="0" marL="0">
+            <a:pPr marL="0" indent="0" algn="ctr">
               <a:buNone/>
             </a:pPr>
             <a:r>
@@ -5759,7 +5680,7 @@
                   <a:srgbClr val="000000"/>
                 </a:solidFill>
               </a:rPr>
-              <a:t xml:space="preserve">    </a:t>
+              <a:t>    </a:t>
             </a:r>
             <a:endParaRPr lang="en-US" sz="3000" dirty="0"/>
           </a:p>
@@ -5774,7 +5695,7 @@
           <p:nvPr/>
         </p:nvPicPr>
         <p:blipFill>
-          <a:blip r:embed="rId104"/>
+          <a:blip r:embed="rId7"/>
           <a:stretch>
             <a:fillRect/>
           </a:stretch>
@@ -5810,7 +5731,7 @@
           <a:bodyPr wrap="square" rtlCol="0" anchor="ctr"/>
           <a:lstStyle/>
           <a:p>
-            <a:pPr algn="ctr" indent="0" marL="0">
+            <a:pPr marL="0" indent="0" algn="ctr">
               <a:buNone/>
             </a:pPr>
             <a:r>
@@ -5822,7 +5743,7 @@
                 <a:ea typeface="Calibri" pitchFamily="34" charset="-122"/>
                 <a:cs typeface="Calibri" pitchFamily="34" charset="-120"/>
               </a:rPr>
-              <a:t xml:space="preserve">Türkçe: ana dilimiz</a:t>
+              <a:t>Türkçe: ana dilimiz</a:t>
             </a:r>
             <a:endParaRPr lang="en-US" sz="1150" dirty="0"/>
           </a:p>
@@ -5876,7 +5797,7 @@
           <a:bodyPr wrap="square" rtlCol="0" anchor="ctr"/>
           <a:lstStyle/>
           <a:p>
-            <a:pPr algn="l" indent="0" marL="0">
+            <a:pPr marL="0" indent="0" algn="l">
               <a:lnSpc>
                 <a:spcPct val="125000"/>
               </a:lnSpc>
@@ -5891,12 +5812,12 @@
                 <a:ea typeface="Calibri" pitchFamily="34" charset="-122"/>
                 <a:cs typeface="Calibri" pitchFamily="34" charset="-120"/>
               </a:rPr>
-              <a:t xml:space="preserve">Yurt dışındaki aileler Türkçeyi ve gelenekleri yeni nesillere aktarır. Ana dilini ve kültürünü korumak herkesin hakkıdır.</a:t>
+              <a:t>Yurt dışındaki aileler Türkçeyi ve gelenekleri yeni nesillere aktarır. Ana dilini ve kültürünü korumak herkesin hakkıdır.</a:t>
             </a:r>
             <a:endParaRPr lang="en-US" sz="1350" dirty="0"/>
           </a:p>
           <a:p>
-            <a:pPr algn="l" indent="0" marL="0">
+            <a:pPr marL="0" indent="0" algn="l">
               <a:lnSpc>
                 <a:spcPct val="125000"/>
               </a:lnSpc>
@@ -5911,7 +5832,7 @@
                 <a:ea typeface="Calibri" pitchFamily="34" charset="-122"/>
                 <a:cs typeface="Calibri" pitchFamily="34" charset="-120"/>
               </a:rPr>
-              <a:t xml:space="preserve">Sen ailenden neler öğrendin? Gelecekte kendi çocuklarına neyi aktarmak istersin?</a:t>
+              <a:t>Sen ailenden neler öğrendin? Gelecekte kendi çocuklarına neyi aktarmak istersin?</a:t>
             </a:r>
             <a:endParaRPr lang="en-US" sz="1350" dirty="0"/>
           </a:p>
@@ -5926,6 +5847,530 @@
 </file>
 
 <file path=ppt/slides/slide8.xml><?xml version="1.0" encoding="utf-8"?>
+<p:sld xmlns:a="http://schemas.openxmlformats.org/drawingml/2006/main" xmlns:r="http://schemas.openxmlformats.org/officeDocument/2006/relationships" xmlns:p="http://schemas.openxmlformats.org/presentationml/2006/main">
+  <p:cSld name="Slide 6">
+    <p:spTree>
+      <p:nvGrpSpPr>
+        <p:cNvPr id="1" name=""/>
+        <p:cNvGrpSpPr/>
+        <p:nvPr/>
+      </p:nvGrpSpPr>
+      <p:grpSpPr>
+        <a:xfrm>
+          <a:off x="0" y="0"/>
+          <a:ext cx="0" cy="0"/>
+          <a:chOff x="0" y="0"/>
+          <a:chExt cx="0" cy="0"/>
+        </a:xfrm>
+      </p:grpSpPr>
+      <p:sp>
+        <p:nvSpPr>
+          <p:cNvPr id="2" name="Shape 0"/>
+          <p:cNvSpPr/>
+          <p:nvPr/>
+        </p:nvSpPr>
+        <p:spPr>
+          <a:xfrm>
+            <a:off x="0" y="0"/>
+            <a:ext cx="9144000" cy="5143500"/>
+          </a:xfrm>
+          <a:prstGeom prst="rect">
+            <a:avLst/>
+          </a:prstGeom>
+          <a:solidFill>
+            <a:srgbClr val="FFF7ED"/>
+          </a:solidFill>
+          <a:ln/>
+        </p:spPr>
+      </p:sp>
+      <p:sp>
+        <p:nvSpPr>
+          <p:cNvPr id="3" name="Shape 1"/>
+          <p:cNvSpPr/>
+          <p:nvPr/>
+        </p:nvSpPr>
+        <p:spPr>
+          <a:xfrm>
+            <a:off x="0" y="0"/>
+            <a:ext cx="9144000" cy="658368"/>
+          </a:xfrm>
+          <a:prstGeom prst="rect">
+            <a:avLst/>
+          </a:prstGeom>
+          <a:solidFill>
+            <a:srgbClr val="F97316"/>
+          </a:solidFill>
+          <a:ln/>
+        </p:spPr>
+      </p:sp>
+      <p:sp>
+        <p:nvSpPr>
+          <p:cNvPr id="4" name="Text 2"/>
+          <p:cNvSpPr/>
+          <p:nvPr/>
+        </p:nvSpPr>
+        <p:spPr>
+          <a:xfrm>
+            <a:off x="365760" y="0"/>
+            <a:ext cx="8412480" cy="658368"/>
+          </a:xfrm>
+          <a:prstGeom prst="rect">
+            <a:avLst/>
+          </a:prstGeom>
+          <a:noFill/>
+          <a:ln/>
+        </p:spPr>
+        <p:txBody>
+          <a:bodyPr wrap="square" rtlCol="0" anchor="ctr"/>
+          <a:lstStyle/>
+          <a:p>
+            <a:pPr marL="0" indent="0" algn="l">
+              <a:buNone/>
+            </a:pPr>
+            <a:r>
+              <a:rPr lang="en-US" sz="1700" b="1" dirty="0">
+                <a:solidFill>
+                  <a:srgbClr val="FFFFFF"/>
+                </a:solidFill>
+                <a:latin typeface="Cambria" pitchFamily="34" charset="0"/>
+                <a:ea typeface="Cambria" pitchFamily="34" charset="-122"/>
+                <a:cs typeface="Cambria" pitchFamily="34" charset="-120"/>
+              </a:rPr>
+              <a:t>      YAZI ATÖLYESİ: ESKİDEN VE ŞİMDİ</a:t>
+            </a:r>
+            <a:endParaRPr lang="en-US" sz="1700" dirty="0"/>
+          </a:p>
+        </p:txBody>
+      </p:sp>
+      <p:pic>
+        <p:nvPicPr>
+          <p:cNvPr id="17" name="Emoji 17" descr="emoji"/>
+          <p:cNvPicPr>
+            <a:picLocks noChangeAspect="1"/>
+          </p:cNvPicPr>
+          <p:nvPr/>
+        </p:nvPicPr>
+        <p:blipFill>
+          <a:blip r:embed="rId3"/>
+          <a:stretch>
+            <a:fillRect/>
+          </a:stretch>
+        </p:blipFill>
+        <p:spPr>
+          <a:xfrm>
+            <a:off x="444246" y="221234"/>
+            <a:ext cx="215900" cy="215900"/>
+          </a:xfrm>
+          <a:prstGeom prst="rect">
+            <a:avLst/>
+          </a:prstGeom>
+        </p:spPr>
+      </p:pic>
+      <p:sp>
+        <p:nvSpPr>
+          <p:cNvPr id="5" name="Shape 3"/>
+          <p:cNvSpPr/>
+          <p:nvPr/>
+        </p:nvSpPr>
+        <p:spPr>
+          <a:xfrm>
+            <a:off x="640080" y="1188720"/>
+            <a:ext cx="7863840" cy="914400"/>
+          </a:xfrm>
+          <a:prstGeom prst="roundRect">
+            <a:avLst>
+              <a:gd name="adj" fmla="val 12000"/>
+            </a:avLst>
+          </a:prstGeom>
+          <a:solidFill>
+            <a:srgbClr val="FFFFFF"/>
+          </a:solidFill>
+          <a:ln w="12700">
+            <a:solidFill>
+              <a:srgbClr val="FFFFFF"/>
+            </a:solidFill>
+            <a:prstDash val="solid"/>
+          </a:ln>
+          <a:effectLst>
+            <a:outerShdw blurRad="76200" dist="25400" dir="5400000" algn="bl" rotWithShape="0">
+              <a:srgbClr val="1A2E5A">
+                <a:alpha val="18000"/>
+              </a:srgbClr>
+            </a:outerShdw>
+          </a:effectLst>
+        </p:spPr>
+      </p:sp>
+      <p:sp>
+        <p:nvSpPr>
+          <p:cNvPr id="6" name="Shape 4"/>
+          <p:cNvSpPr/>
+          <p:nvPr/>
+        </p:nvSpPr>
+        <p:spPr>
+          <a:xfrm>
+            <a:off x="868680" y="1371600"/>
+            <a:ext cx="548640" cy="548640"/>
+          </a:xfrm>
+          <a:prstGeom prst="ellipse">
+            <a:avLst/>
+          </a:prstGeom>
+          <a:solidFill>
+            <a:srgbClr val="F97316"/>
+          </a:solidFill>
+          <a:ln/>
+        </p:spPr>
+      </p:sp>
+      <p:sp>
+        <p:nvSpPr>
+          <p:cNvPr id="7" name="Text 5"/>
+          <p:cNvSpPr/>
+          <p:nvPr/>
+        </p:nvSpPr>
+        <p:spPr>
+          <a:xfrm>
+            <a:off x="868680" y="1371600"/>
+            <a:ext cx="548640" cy="548640"/>
+          </a:xfrm>
+          <a:prstGeom prst="rect">
+            <a:avLst/>
+          </a:prstGeom>
+          <a:noFill/>
+          <a:ln/>
+        </p:spPr>
+        <p:txBody>
+          <a:bodyPr wrap="square" rtlCol="0" anchor="ctr"/>
+          <a:lstStyle/>
+          <a:p>
+            <a:pPr marL="0" indent="0" algn="ctr">
+              <a:buNone/>
+            </a:pPr>
+            <a:r>
+              <a:rPr lang="en-US" sz="1800" b="1" dirty="0">
+                <a:solidFill>
+                  <a:srgbClr val="FFFFFF"/>
+                </a:solidFill>
+                <a:latin typeface="Calibri" pitchFamily="34" charset="0"/>
+                <a:ea typeface="Calibri" pitchFamily="34" charset="-122"/>
+                <a:cs typeface="Calibri" pitchFamily="34" charset="-120"/>
+              </a:rPr>
+              <a:t>1</a:t>
+            </a:r>
+            <a:endParaRPr lang="en-US" sz="1800" dirty="0"/>
+          </a:p>
+        </p:txBody>
+      </p:sp>
+      <p:sp>
+        <p:nvSpPr>
+          <p:cNvPr id="8" name="Text 6"/>
+          <p:cNvSpPr/>
+          <p:nvPr/>
+        </p:nvSpPr>
+        <p:spPr>
+          <a:xfrm>
+            <a:off x="1645920" y="1188720"/>
+            <a:ext cx="6675120" cy="914400"/>
+          </a:xfrm>
+          <a:prstGeom prst="rect">
+            <a:avLst/>
+          </a:prstGeom>
+          <a:noFill/>
+          <a:ln/>
+        </p:spPr>
+        <p:txBody>
+          <a:bodyPr wrap="square" rtlCol="0" anchor="ctr"/>
+          <a:lstStyle/>
+          <a:p>
+            <a:pPr marL="0" indent="0" algn="l">
+              <a:buNone/>
+            </a:pPr>
+            <a:r>
+              <a:rPr lang="en-US" sz="1300" b="1" dirty="0">
+                <a:solidFill>
+                  <a:srgbClr val="1A2E5A"/>
+                </a:solidFill>
+                <a:latin typeface="Calibri" pitchFamily="34" charset="0"/>
+                <a:ea typeface="Calibri" pitchFamily="34" charset="-122"/>
+                <a:cs typeface="Calibri" pitchFamily="34" charset="-120"/>
+              </a:rPr>
+              <a:t>Büyüklerinizin gençliği ile sizin gençliğiniz arasındaki en büyük 2 fark (“Seksenli yıllarda…”)</a:t>
+            </a:r>
+            <a:endParaRPr lang="en-US" sz="1300" dirty="0"/>
+          </a:p>
+        </p:txBody>
+      </p:sp>
+      <p:sp>
+        <p:nvSpPr>
+          <p:cNvPr id="9" name="Shape 7"/>
+          <p:cNvSpPr/>
+          <p:nvPr/>
+        </p:nvSpPr>
+        <p:spPr>
+          <a:xfrm>
+            <a:off x="640080" y="2286000"/>
+            <a:ext cx="7863840" cy="914400"/>
+          </a:xfrm>
+          <a:prstGeom prst="roundRect">
+            <a:avLst>
+              <a:gd name="adj" fmla="val 12000"/>
+            </a:avLst>
+          </a:prstGeom>
+          <a:solidFill>
+            <a:srgbClr val="FFFFFF"/>
+          </a:solidFill>
+          <a:ln w="12700">
+            <a:solidFill>
+              <a:srgbClr val="FFFFFF"/>
+            </a:solidFill>
+            <a:prstDash val="solid"/>
+          </a:ln>
+          <a:effectLst>
+            <a:outerShdw blurRad="76200" dist="25400" dir="5400000" algn="bl" rotWithShape="0">
+              <a:srgbClr val="1A2E5A">
+                <a:alpha val="18000"/>
+              </a:srgbClr>
+            </a:outerShdw>
+          </a:effectLst>
+        </p:spPr>
+      </p:sp>
+      <p:sp>
+        <p:nvSpPr>
+          <p:cNvPr id="10" name="Shape 8"/>
+          <p:cNvSpPr/>
+          <p:nvPr/>
+        </p:nvSpPr>
+        <p:spPr>
+          <a:xfrm>
+            <a:off x="868680" y="2468880"/>
+            <a:ext cx="548640" cy="548640"/>
+          </a:xfrm>
+          <a:prstGeom prst="ellipse">
+            <a:avLst/>
+          </a:prstGeom>
+          <a:solidFill>
+            <a:srgbClr val="F97316"/>
+          </a:solidFill>
+          <a:ln/>
+        </p:spPr>
+      </p:sp>
+      <p:sp>
+        <p:nvSpPr>
+          <p:cNvPr id="11" name="Text 9"/>
+          <p:cNvSpPr/>
+          <p:nvPr/>
+        </p:nvSpPr>
+        <p:spPr>
+          <a:xfrm>
+            <a:off x="868680" y="2468880"/>
+            <a:ext cx="548640" cy="548640"/>
+          </a:xfrm>
+          <a:prstGeom prst="rect">
+            <a:avLst/>
+          </a:prstGeom>
+          <a:noFill/>
+          <a:ln/>
+        </p:spPr>
+        <p:txBody>
+          <a:bodyPr wrap="square" rtlCol="0" anchor="ctr"/>
+          <a:lstStyle/>
+          <a:p>
+            <a:pPr marL="0" indent="0" algn="ctr">
+              <a:buNone/>
+            </a:pPr>
+            <a:r>
+              <a:rPr lang="en-US" sz="1800" b="1" dirty="0">
+                <a:solidFill>
+                  <a:srgbClr val="FFFFFF"/>
+                </a:solidFill>
+                <a:latin typeface="Calibri" pitchFamily="34" charset="0"/>
+                <a:ea typeface="Calibri" pitchFamily="34" charset="-122"/>
+                <a:cs typeface="Calibri" pitchFamily="34" charset="-120"/>
+              </a:rPr>
+              <a:t>2</a:t>
+            </a:r>
+            <a:endParaRPr lang="en-US" sz="1800" dirty="0"/>
+          </a:p>
+        </p:txBody>
+      </p:sp>
+      <p:sp>
+        <p:nvSpPr>
+          <p:cNvPr id="12" name="Text 10"/>
+          <p:cNvSpPr/>
+          <p:nvPr/>
+        </p:nvSpPr>
+        <p:spPr>
+          <a:xfrm>
+            <a:off x="1645920" y="2286000"/>
+            <a:ext cx="6675120" cy="914400"/>
+          </a:xfrm>
+          <a:prstGeom prst="rect">
+            <a:avLst/>
+          </a:prstGeom>
+          <a:noFill/>
+          <a:ln/>
+        </p:spPr>
+        <p:txBody>
+          <a:bodyPr wrap="square" rtlCol="0" anchor="ctr"/>
+          <a:lstStyle/>
+          <a:p>
+            <a:pPr marL="0" indent="0" algn="l">
+              <a:buNone/>
+            </a:pPr>
+            <a:r>
+              <a:rPr lang="en-US" sz="1300" b="1" dirty="0">
+                <a:solidFill>
+                  <a:srgbClr val="1A2E5A"/>
+                </a:solidFill>
+                <a:latin typeface="Calibri" pitchFamily="34" charset="0"/>
+                <a:ea typeface="Calibri" pitchFamily="34" charset="-122"/>
+                <a:cs typeface="Calibri" pitchFamily="34" charset="-120"/>
+              </a:rPr>
+              <a:t>“Eskiden …, oysa şimdi …” ve “buna karşın” gibi karşılaştırma yapıları</a:t>
+            </a:r>
+            <a:endParaRPr lang="en-US" sz="1300" dirty="0"/>
+          </a:p>
+        </p:txBody>
+      </p:sp>
+      <p:sp>
+        <p:nvSpPr>
+          <p:cNvPr id="13" name="Shape 11"/>
+          <p:cNvSpPr/>
+          <p:nvPr/>
+        </p:nvSpPr>
+        <p:spPr>
+          <a:xfrm>
+            <a:off x="640080" y="3383280"/>
+            <a:ext cx="7863840" cy="914400"/>
+          </a:xfrm>
+          <a:prstGeom prst="roundRect">
+            <a:avLst>
+              <a:gd name="adj" fmla="val 12000"/>
+            </a:avLst>
+          </a:prstGeom>
+          <a:solidFill>
+            <a:srgbClr val="FFFFFF"/>
+          </a:solidFill>
+          <a:ln w="12700">
+            <a:solidFill>
+              <a:srgbClr val="FFFFFF"/>
+            </a:solidFill>
+            <a:prstDash val="solid"/>
+          </a:ln>
+          <a:effectLst>
+            <a:outerShdw blurRad="76200" dist="25400" dir="5400000" algn="bl" rotWithShape="0">
+              <a:srgbClr val="1A2E5A">
+                <a:alpha val="18000"/>
+              </a:srgbClr>
+            </a:outerShdw>
+          </a:effectLst>
+        </p:spPr>
+      </p:sp>
+      <p:sp>
+        <p:nvSpPr>
+          <p:cNvPr id="14" name="Shape 12"/>
+          <p:cNvSpPr/>
+          <p:nvPr/>
+        </p:nvSpPr>
+        <p:spPr>
+          <a:xfrm>
+            <a:off x="868680" y="3566160"/>
+            <a:ext cx="548640" cy="548640"/>
+          </a:xfrm>
+          <a:prstGeom prst="ellipse">
+            <a:avLst/>
+          </a:prstGeom>
+          <a:solidFill>
+            <a:srgbClr val="F97316"/>
+          </a:solidFill>
+          <a:ln/>
+        </p:spPr>
+      </p:sp>
+      <p:sp>
+        <p:nvSpPr>
+          <p:cNvPr id="15" name="Text 13"/>
+          <p:cNvSpPr/>
+          <p:nvPr/>
+        </p:nvSpPr>
+        <p:spPr>
+          <a:xfrm>
+            <a:off x="868680" y="3566160"/>
+            <a:ext cx="548640" cy="548640"/>
+          </a:xfrm>
+          <a:prstGeom prst="rect">
+            <a:avLst/>
+          </a:prstGeom>
+          <a:noFill/>
+          <a:ln/>
+        </p:spPr>
+        <p:txBody>
+          <a:bodyPr wrap="square" rtlCol="0" anchor="ctr"/>
+          <a:lstStyle/>
+          <a:p>
+            <a:pPr marL="0" indent="0" algn="ctr">
+              <a:buNone/>
+            </a:pPr>
+            <a:r>
+              <a:rPr lang="en-US" sz="1800" b="1" dirty="0">
+                <a:solidFill>
+                  <a:srgbClr val="FFFFFF"/>
+                </a:solidFill>
+                <a:latin typeface="Calibri" pitchFamily="34" charset="0"/>
+                <a:ea typeface="Calibri" pitchFamily="34" charset="-122"/>
+                <a:cs typeface="Calibri" pitchFamily="34" charset="-120"/>
+              </a:rPr>
+              <a:t>3</a:t>
+            </a:r>
+            <a:endParaRPr lang="en-US" sz="1800" dirty="0"/>
+          </a:p>
+        </p:txBody>
+      </p:sp>
+      <p:sp>
+        <p:nvSpPr>
+          <p:cNvPr id="16" name="Text 14"/>
+          <p:cNvSpPr/>
+          <p:nvPr/>
+        </p:nvSpPr>
+        <p:spPr>
+          <a:xfrm>
+            <a:off x="1645920" y="3383280"/>
+            <a:ext cx="6675120" cy="914400"/>
+          </a:xfrm>
+          <a:prstGeom prst="rect">
+            <a:avLst/>
+          </a:prstGeom>
+          <a:noFill/>
+          <a:ln/>
+        </p:spPr>
+        <p:txBody>
+          <a:bodyPr wrap="square" rtlCol="0" anchor="ctr"/>
+          <a:lstStyle/>
+          <a:p>
+            <a:pPr marL="0" indent="0" algn="l">
+              <a:buNone/>
+            </a:pPr>
+            <a:r>
+              <a:rPr lang="en-US" sz="1300" b="1" dirty="0">
+                <a:solidFill>
+                  <a:srgbClr val="1A2E5A"/>
+                </a:solidFill>
+                <a:latin typeface="Calibri" pitchFamily="34" charset="0"/>
+                <a:ea typeface="Calibri" pitchFamily="34" charset="-122"/>
+                <a:cs typeface="Calibri" pitchFamily="34" charset="-120"/>
+              </a:rPr>
+              <a:t>Hitap kültürü nasıl değişti? Yaşadığınız ülke ile Türkiye'yi karşılaştırarak değerlendirin.</a:t>
+            </a:r>
+            <a:endParaRPr lang="en-US" sz="1300" dirty="0"/>
+          </a:p>
+        </p:txBody>
+      </p:sp>
+    </p:spTree>
+  </p:cSld>
+  <p:clrMapOvr>
+    <a:masterClrMapping/>
+  </p:clrMapOvr>
+</p:sld>
+</file>
+
+<file path=ppt/slides/slide9.xml><?xml version="1.0" encoding="utf-8"?>
 <p:sld xmlns:a="http://schemas.openxmlformats.org/drawingml/2006/main" xmlns:r="http://schemas.openxmlformats.org/officeDocument/2006/relationships" xmlns:p="http://schemas.openxmlformats.org/presentationml/2006/main">
   <p:cSld name="Slide 8">
     <p:spTree>
@@ -6003,7 +6448,7 @@
           <a:bodyPr wrap="square" rtlCol="0" anchor="ctr"/>
           <a:lstStyle/>
           <a:p>
-            <a:pPr algn="l" indent="0" marL="0">
+            <a:pPr marL="0" indent="0" algn="l">
               <a:buNone/>
             </a:pPr>
             <a:r>
@@ -6015,7 +6460,7 @@
                 <a:ea typeface="Cambria" pitchFamily="34" charset="-122"/>
                 <a:cs typeface="Cambria" pitchFamily="34" charset="-120"/>
               </a:rPr>
-              <a:t xml:space="preserve">      YENİ SAHA GÖREVİ</a:t>
+              <a:t>      YENİ SAHA GÖREVİ</a:t>
             </a:r>
             <a:endParaRPr lang="en-US" sz="1700" dirty="0"/>
           </a:p>
@@ -6030,7 +6475,7 @@
           <p:nvPr/>
         </p:nvPicPr>
         <p:blipFill>
-          <a:blip r:embed="rId100"/>
+          <a:blip r:embed="rId3"/>
           <a:stretch>
             <a:fillRect/>
           </a:stretch>
@@ -6066,7 +6511,7 @@
           <a:bodyPr wrap="square" rtlCol="0" anchor="ctr"/>
           <a:lstStyle/>
           <a:p>
-            <a:pPr algn="ctr" indent="0" marL="0">
+            <a:pPr marL="0" indent="0" algn="ctr">
               <a:buNone/>
             </a:pPr>
             <a:r>
@@ -6078,7 +6523,7 @@
                 <a:ea typeface="Calibri" pitchFamily="34" charset="-122"/>
                 <a:cs typeface="Calibri" pitchFamily="34" charset="-120"/>
               </a:rPr>
-              <a:t xml:space="preserve">Bu kez göreviniz: İki nesli karşılaştırıp saygı dilinin dönüşümünü ANALİZ ETMEK ve TARTIŞMAK!</a:t>
+              <a:t>Bu kez göreviniz: İki nesli karşılaştırıp saygı dilinin dönüşümünü ANALİZ ETMEK ve TARTIŞMAK!</a:t>
             </a:r>
             <a:endParaRPr lang="en-US" sz="1100" dirty="0"/>
           </a:p>
@@ -6110,7 +6555,7 @@
             <a:prstDash val="solid"/>
           </a:ln>
           <a:effectLst>
-            <a:outerShdw sx="100000" sy="100000" kx="0" ky="0" algn="bl" rotWithShape="0" blurRad="76200" dist="25400" dir="5400000">
+            <a:outerShdw blurRad="76200" dist="25400" dir="5400000" algn="bl" rotWithShape="0">
               <a:srgbClr val="1A2E5A">
                 <a:alpha val="18000"/>
               </a:srgbClr>
@@ -6159,7 +6604,7 @@
           <a:bodyPr wrap="square" rtlCol="0" anchor="ctr"/>
           <a:lstStyle/>
           <a:p>
-            <a:pPr algn="ctr" indent="0" marL="0">
+            <a:pPr marL="0" indent="0" algn="ctr">
               <a:buNone/>
             </a:pPr>
             <a:r>
@@ -6198,7 +6643,7 @@
           <a:bodyPr wrap="square" rtlCol="0" anchor="ctr"/>
           <a:lstStyle/>
           <a:p>
-            <a:pPr algn="l" indent="0" marL="0">
+            <a:pPr marL="0" indent="0" algn="l">
               <a:buNone/>
             </a:pPr>
             <a:r>
@@ -6210,7 +6655,7 @@
                 <a:ea typeface="Calibri" pitchFamily="34" charset="-122"/>
                 <a:cs typeface="Calibri" pitchFamily="34" charset="-120"/>
               </a:rPr>
-              <a:t xml:space="preserve">      Bir aile büyüğünüze sorun: “Gençliğiniz hangi yıllardaydı? O zamanlar büyüklere nasıl hitap edilirdi? Bizim neslin saygı anlayışında en çok neyi farklı görüyorsunuz?”</a:t>
+              <a:t>      Bir aile büyüğünüze sorun: “Gençliğiniz hangi yıllardaydı? O zamanlar büyüklere nasıl hitap edilirdi? Bizim neslin saygı anlayışında en çok neyi farklı görüyorsunuz?”</a:t>
             </a:r>
             <a:endParaRPr lang="en-US" sz="1100" dirty="0"/>
           </a:p>
@@ -6225,7 +6670,7 @@
           <p:nvPr/>
         </p:nvPicPr>
         <p:blipFill>
-          <a:blip r:embed="rId101"/>
+          <a:blip r:embed="rId4"/>
           <a:stretch>
             <a:fillRect/>
           </a:stretch>
@@ -6266,7 +6711,7 @@
             <a:prstDash val="solid"/>
           </a:ln>
           <a:effectLst>
-            <a:outerShdw sx="100000" sy="100000" kx="0" ky="0" algn="bl" rotWithShape="0" blurRad="76200" dist="25400" dir="5400000">
+            <a:outerShdw blurRad="76200" dist="25400" dir="5400000" algn="bl" rotWithShape="0">
               <a:srgbClr val="1A2E5A">
                 <a:alpha val="18000"/>
               </a:srgbClr>
@@ -6315,7 +6760,7 @@
           <a:bodyPr wrap="square" rtlCol="0" anchor="ctr"/>
           <a:lstStyle/>
           <a:p>
-            <a:pPr algn="ctr" indent="0" marL="0">
+            <a:pPr marL="0" indent="0" algn="ctr">
               <a:buNone/>
             </a:pPr>
             <a:r>
@@ -6354,7 +6799,7 @@
           <a:bodyPr wrap="square" rtlCol="0" anchor="ctr"/>
           <a:lstStyle/>
           <a:p>
-            <a:pPr algn="l" indent="0" marL="0">
+            <a:pPr marL="0" indent="0" algn="l">
               <a:buNone/>
             </a:pPr>
             <a:r>
@@ -6366,7 +6811,7 @@
                 <a:ea typeface="Calibri" pitchFamily="34" charset="-122"/>
                 <a:cs typeface="Calibri" pitchFamily="34" charset="-120"/>
               </a:rPr>
-              <a:t xml:space="preserve">      Cevaplarını not alın.</a:t>
+              <a:t>      Cevaplarını not alın.</a:t>
             </a:r>
             <a:endParaRPr lang="en-US" sz="1100" dirty="0"/>
           </a:p>
@@ -6381,7 +6826,7 @@
           <p:nvPr/>
         </p:nvPicPr>
         <p:blipFill>
-          <a:blip r:embed="rId102"/>
+          <a:blip r:embed="rId5"/>
           <a:stretch>
             <a:fillRect/>
           </a:stretch>
@@ -6422,7 +6867,7 @@
             <a:prstDash val="solid"/>
           </a:ln>
           <a:effectLst>
-            <a:outerShdw sx="100000" sy="100000" kx="0" ky="0" algn="bl" rotWithShape="0" blurRad="76200" dist="25400" dir="5400000">
+            <a:outerShdw blurRad="76200" dist="25400" dir="5400000" algn="bl" rotWithShape="0">
               <a:srgbClr val="1A2E5A">
                 <a:alpha val="18000"/>
               </a:srgbClr>
@@ -6471,7 +6916,7 @@
           <a:bodyPr wrap="square" rtlCol="0" anchor="ctr"/>
           <a:lstStyle/>
           <a:p>
-            <a:pPr algn="ctr" indent="0" marL="0">
+            <a:pPr marL="0" indent="0" algn="ctr">
               <a:buNone/>
             </a:pPr>
             <a:r>
@@ -6510,7 +6955,7 @@
           <a:bodyPr wrap="square" rtlCol="0" anchor="ctr"/>
           <a:lstStyle/>
           <a:p>
-            <a:pPr algn="l" indent="0" marL="0">
+            <a:pPr marL="0" indent="0" algn="l">
               <a:buNone/>
             </a:pPr>
             <a:r>
@@ -6522,7 +6967,7 @@
                 <a:ea typeface="Calibri" pitchFamily="34" charset="-122"/>
                 <a:cs typeface="Calibri" pitchFamily="34" charset="-120"/>
               </a:rPr>
-              <a:t xml:space="preserve">      Kendi çevrenizde (okulda/sosyal medyada) gençlerin büyüklere nasıl hitap ettiğini gözlemleyin.</a:t>
+              <a:t>      Kendi çevrenizde (okulda/sosyal medyada) gençlerin büyüklere nasıl hitap ettiğini gözlemleyin.</a:t>
             </a:r>
             <a:endParaRPr lang="en-US" sz="1100" dirty="0"/>
           </a:p>
@@ -6537,7 +6982,7 @@
           <p:nvPr/>
         </p:nvPicPr>
         <p:blipFill>
-          <a:blip r:embed="rId103"/>
+          <a:blip r:embed="rId6"/>
           <a:stretch>
             <a:fillRect/>
           </a:stretch>
@@ -6578,7 +7023,7 @@
             <a:prstDash val="solid"/>
           </a:ln>
           <a:effectLst>
-            <a:outerShdw sx="100000" sy="100000" kx="0" ky="0" algn="bl" rotWithShape="0" blurRad="76200" dist="25400" dir="5400000">
+            <a:outerShdw blurRad="76200" dist="25400" dir="5400000" algn="bl" rotWithShape="0">
               <a:srgbClr val="1A2E5A">
                 <a:alpha val="18000"/>
               </a:srgbClr>
@@ -6627,7 +7072,7 @@
           <a:bodyPr wrap="square" rtlCol="0" anchor="ctr"/>
           <a:lstStyle/>
           <a:p>
-            <a:pPr algn="ctr" indent="0" marL="0">
+            <a:pPr marL="0" indent="0" algn="ctr">
               <a:buNone/>
             </a:pPr>
             <a:r>
@@ -6666,7 +7111,7 @@
           <a:bodyPr wrap="square" rtlCol="0" anchor="ctr"/>
           <a:lstStyle/>
           <a:p>
-            <a:pPr algn="l" indent="0" marL="0">
+            <a:pPr marL="0" indent="0" algn="l">
               <a:buNone/>
             </a:pPr>
             <a:r>
@@ -6678,7 +7123,7 @@
                 <a:ea typeface="Calibri" pitchFamily="34" charset="-122"/>
                 <a:cs typeface="Calibri" pitchFamily="34" charset="-120"/>
               </a:rPr>
-              <a:t xml:space="preserve">      İki nesil arasındaki farkı analiz eden ve kendi görüşünüzü savunan 1 sayfalık bir değerlendirme raporu yazın.</a:t>
+              <a:t>      İki nesil arasındaki farkı analiz eden ve kendi görüşünüzü savunan 1 sayfalık bir değerlendirme raporu yazın.</a:t>
             </a:r>
             <a:endParaRPr lang="en-US" sz="1100" dirty="0"/>
           </a:p>
@@ -6693,7 +7138,7 @@
           <p:nvPr/>
         </p:nvPicPr>
         <p:blipFill>
-          <a:blip r:embed="rId104"/>
+          <a:blip r:embed="rId7"/>
           <a:stretch>
             <a:fillRect/>
           </a:stretch>
@@ -6751,7 +7196,7 @@
           <a:bodyPr wrap="square" rtlCol="0" anchor="ctr"/>
           <a:lstStyle/>
           <a:p>
-            <a:pPr algn="ctr" indent="0" marL="0">
+            <a:pPr marL="0" indent="0" algn="ctr">
               <a:buNone/>
             </a:pPr>
             <a:r>
@@ -6763,7 +7208,7 @@
                 <a:ea typeface="Calibri" pitchFamily="34" charset="-122"/>
                 <a:cs typeface="Calibri" pitchFamily="34" charset="-120"/>
               </a:rPr>
-              <a:t xml:space="preserve">Raporunuzu bir sonraki derse getirin — sınıfta tartışacağız!     </a:t>
+              <a:t>Raporunuzu bir sonraki derse getirin — sınıfta tartışacağız!     </a:t>
             </a:r>
             <a:endParaRPr lang="en-US" sz="1200" dirty="0"/>
           </a:p>
@@ -6778,7 +7223,7 @@
           <p:nvPr/>
         </p:nvPicPr>
         <p:blipFill>
-          <a:blip r:embed="rId105"/>
+          <a:blip r:embed="rId8"/>
           <a:stretch>
             <a:fillRect/>
           </a:stretch>
@@ -6787,602 +7232,6 @@
           <a:xfrm>
             <a:off x="6357468" y="4733544"/>
             <a:ext cx="152400" cy="152400"/>
-          </a:xfrm>
-          <a:prstGeom prst="rect">
-            <a:avLst/>
-          </a:prstGeom>
-        </p:spPr>
-      </p:pic>
-    </p:spTree>
-  </p:cSld>
-  <p:clrMapOvr>
-    <a:masterClrMapping/>
-  </p:clrMapOvr>
-</p:sld>
-</file>
-
-<file path=ppt/slides/slide9.xml><?xml version="1.0" encoding="utf-8"?>
-<p:sld xmlns:a="http://schemas.openxmlformats.org/drawingml/2006/main" xmlns:r="http://schemas.openxmlformats.org/officeDocument/2006/relationships" xmlns:p="http://schemas.openxmlformats.org/presentationml/2006/main">
-  <p:cSld name="Slide 9">
-    <p:spTree>
-      <p:nvGrpSpPr>
-        <p:cNvPr id="1" name=""/>
-        <p:cNvGrpSpPr/>
-        <p:nvPr/>
-      </p:nvGrpSpPr>
-      <p:grpSpPr>
-        <a:xfrm>
-          <a:off x="0" y="0"/>
-          <a:ext cx="0" cy="0"/>
-          <a:chOff x="0" y="0"/>
-          <a:chExt cx="0" cy="0"/>
-        </a:xfrm>
-      </p:grpSpPr>
-      <p:sp>
-        <p:nvSpPr>
-          <p:cNvPr id="2" name="Shape 0"/>
-          <p:cNvSpPr/>
-          <p:nvPr/>
-        </p:nvSpPr>
-        <p:spPr>
-          <a:xfrm>
-            <a:off x="0" y="0"/>
-            <a:ext cx="9144000" cy="5143500"/>
-          </a:xfrm>
-          <a:prstGeom prst="rect">
-            <a:avLst/>
-          </a:prstGeom>
-          <a:solidFill>
-            <a:srgbClr val="1A2E5A"/>
-          </a:solidFill>
-          <a:ln/>
-        </p:spPr>
-      </p:sp>
-      <p:sp>
-        <p:nvSpPr>
-          <p:cNvPr id="3" name="Text 1"/>
-          <p:cNvSpPr/>
-          <p:nvPr/>
-        </p:nvSpPr>
-        <p:spPr>
-          <a:xfrm>
-            <a:off x="274320" y="182880"/>
-            <a:ext cx="365760" cy="365760"/>
-          </a:xfrm>
-          <a:prstGeom prst="rect">
-            <a:avLst/>
-          </a:prstGeom>
-          <a:noFill/>
-          <a:ln/>
-        </p:spPr>
-        <p:txBody>
-          <a:bodyPr wrap="square" rtlCol="0" anchor="ctr"/>
-          <a:lstStyle/>
-          <a:p>
-            <a:pPr algn="ctr" indent="0" marL="0">
-              <a:buNone/>
-            </a:pPr>
-            <a:r>
-              <a:rPr lang="en-US" sz="1600" dirty="0">
-                <a:solidFill>
-                  <a:srgbClr val="FBBF24"/>
-                </a:solidFill>
-              </a:rPr>
-              <a:t>★</a:t>
-            </a:r>
-            <a:endParaRPr lang="en-US" sz="1600" dirty="0"/>
-          </a:p>
-        </p:txBody>
-      </p:sp>
-      <p:sp>
-        <p:nvSpPr>
-          <p:cNvPr id="4" name="Text 2"/>
-          <p:cNvSpPr/>
-          <p:nvPr/>
-        </p:nvSpPr>
-        <p:spPr>
-          <a:xfrm>
-            <a:off x="8321040" y="182880"/>
-            <a:ext cx="365760" cy="365760"/>
-          </a:xfrm>
-          <a:prstGeom prst="rect">
-            <a:avLst/>
-          </a:prstGeom>
-          <a:noFill/>
-          <a:ln/>
-        </p:spPr>
-        <p:txBody>
-          <a:bodyPr wrap="square" rtlCol="0" anchor="ctr"/>
-          <a:lstStyle/>
-          <a:p>
-            <a:pPr algn="ctr" indent="0" marL="0">
-              <a:buNone/>
-            </a:pPr>
-            <a:r>
-              <a:rPr lang="en-US" sz="1600" dirty="0">
-                <a:solidFill>
-                  <a:srgbClr val="FBBF24"/>
-                </a:solidFill>
-              </a:rPr>
-              <a:t>★</a:t>
-            </a:r>
-            <a:endParaRPr lang="en-US" sz="1600" dirty="0"/>
-          </a:p>
-        </p:txBody>
-      </p:sp>
-      <p:sp>
-        <p:nvSpPr>
-          <p:cNvPr id="5" name="Text 3"/>
-          <p:cNvSpPr/>
-          <p:nvPr/>
-        </p:nvSpPr>
-        <p:spPr>
-          <a:xfrm>
-            <a:off x="274320" y="4480560"/>
-            <a:ext cx="365760" cy="365760"/>
-          </a:xfrm>
-          <a:prstGeom prst="rect">
-            <a:avLst/>
-          </a:prstGeom>
-          <a:noFill/>
-          <a:ln/>
-        </p:spPr>
-        <p:txBody>
-          <a:bodyPr wrap="square" rtlCol="0" anchor="ctr"/>
-          <a:lstStyle/>
-          <a:p>
-            <a:pPr algn="ctr" indent="0" marL="0">
-              <a:buNone/>
-            </a:pPr>
-            <a:r>
-              <a:rPr lang="en-US" sz="1600" dirty="0">
-                <a:solidFill>
-                  <a:srgbClr val="FBBF24"/>
-                </a:solidFill>
-              </a:rPr>
-              <a:t>★</a:t>
-            </a:r>
-            <a:endParaRPr lang="en-US" sz="1600" dirty="0"/>
-          </a:p>
-        </p:txBody>
-      </p:sp>
-      <p:sp>
-        <p:nvSpPr>
-          <p:cNvPr id="6" name="Text 4"/>
-          <p:cNvSpPr/>
-          <p:nvPr/>
-        </p:nvSpPr>
-        <p:spPr>
-          <a:xfrm>
-            <a:off x="8321040" y="4480560"/>
-            <a:ext cx="365760" cy="365760"/>
-          </a:xfrm>
-          <a:prstGeom prst="rect">
-            <a:avLst/>
-          </a:prstGeom>
-          <a:noFill/>
-          <a:ln/>
-        </p:spPr>
-        <p:txBody>
-          <a:bodyPr wrap="square" rtlCol="0" anchor="ctr"/>
-          <a:lstStyle/>
-          <a:p>
-            <a:pPr algn="ctr" indent="0" marL="0">
-              <a:buNone/>
-            </a:pPr>
-            <a:r>
-              <a:rPr lang="en-US" sz="1600" dirty="0">
-                <a:solidFill>
-                  <a:srgbClr val="FBBF24"/>
-                </a:solidFill>
-              </a:rPr>
-              <a:t>★</a:t>
-            </a:r>
-            <a:endParaRPr lang="en-US" sz="1600" dirty="0"/>
-          </a:p>
-        </p:txBody>
-      </p:sp>
-      <p:sp>
-        <p:nvSpPr>
-          <p:cNvPr id="7" name="Text 5"/>
-          <p:cNvSpPr/>
-          <p:nvPr/>
-        </p:nvSpPr>
-        <p:spPr>
-          <a:xfrm>
-            <a:off x="457200" y="502920"/>
-            <a:ext cx="8229600" cy="640080"/>
-          </a:xfrm>
-          <a:prstGeom prst="rect">
-            <a:avLst/>
-          </a:prstGeom>
-          <a:noFill/>
-          <a:ln/>
-        </p:spPr>
-        <p:txBody>
-          <a:bodyPr wrap="square" rtlCol="0" anchor="ctr"/>
-          <a:lstStyle/>
-          <a:p>
-            <a:pPr algn="ctr" indent="0" marL="0">
-              <a:buNone/>
-            </a:pPr>
-            <a:r>
-              <a:rPr lang="en-US" sz="3200" b="1" dirty="0">
-                <a:solidFill>
-                  <a:srgbClr val="FBBF24"/>
-                </a:solidFill>
-                <a:latin typeface="Cambria" pitchFamily="34" charset="0"/>
-                <a:ea typeface="Cambria" pitchFamily="34" charset="-122"/>
-                <a:cs typeface="Cambria" pitchFamily="34" charset="-120"/>
-              </a:rPr>
-              <a:t>GÖREV TAMAMLANDI!</a:t>
-            </a:r>
-            <a:endParaRPr lang="en-US" sz="3200" dirty="0"/>
-          </a:p>
-        </p:txBody>
-      </p:sp>
-      <p:sp>
-        <p:nvSpPr>
-          <p:cNvPr id="8" name="Shape 6"/>
-          <p:cNvSpPr/>
-          <p:nvPr/>
-        </p:nvSpPr>
-        <p:spPr>
-          <a:xfrm>
-            <a:off x="388620" y="2011680"/>
-            <a:ext cx="1600200" cy="1371600"/>
-          </a:xfrm>
-          <a:prstGeom prst="roundRect">
-            <a:avLst>
-              <a:gd name="adj" fmla="val 8000"/>
-            </a:avLst>
-          </a:prstGeom>
-          <a:solidFill>
-            <a:srgbClr val="F97316"/>
-          </a:solidFill>
-          <a:ln/>
-        </p:spPr>
-      </p:sp>
-      <p:sp>
-        <p:nvSpPr>
-          <p:cNvPr id="9" name="Text 7"/>
-          <p:cNvSpPr/>
-          <p:nvPr/>
-        </p:nvSpPr>
-        <p:spPr>
-          <a:xfrm>
-            <a:off x="388620" y="2011680"/>
-            <a:ext cx="1600200" cy="1371600"/>
-          </a:xfrm>
-          <a:prstGeom prst="rect">
-            <a:avLst/>
-          </a:prstGeom>
-          <a:noFill/>
-          <a:ln/>
-        </p:spPr>
-        <p:txBody>
-          <a:bodyPr wrap="square" rtlCol="0" anchor="ctr"/>
-          <a:lstStyle/>
-          <a:p>
-            <a:pPr algn="ctr" indent="0" marL="0">
-              <a:buNone/>
-            </a:pPr>
-            <a:r>
-              <a:rPr lang="en-US" sz="1100" b="1" dirty="0">
-                <a:solidFill>
-                  <a:srgbClr val="FFFFFF"/>
-                </a:solidFill>
-                <a:latin typeface="Calibri" pitchFamily="34" charset="0"/>
-                <a:ea typeface="Calibri" pitchFamily="34" charset="-122"/>
-                <a:cs typeface="Calibri" pitchFamily="34" charset="-120"/>
-              </a:rPr>
-              <a:t xml:space="preserve">Onlu Yıllar</a:t>
-            </a:r>
-            <a:endParaRPr lang="en-US" sz="1100" dirty="0"/>
-          </a:p>
-        </p:txBody>
-      </p:sp>
-      <p:sp>
-        <p:nvSpPr>
-          <p:cNvPr id="10" name="Shape 8"/>
-          <p:cNvSpPr/>
-          <p:nvPr/>
-        </p:nvSpPr>
-        <p:spPr>
-          <a:xfrm>
-            <a:off x="2080260" y="2011680"/>
-            <a:ext cx="1600200" cy="1371600"/>
-          </a:xfrm>
-          <a:prstGeom prst="roundRect">
-            <a:avLst>
-              <a:gd name="adj" fmla="val 8000"/>
-            </a:avLst>
-          </a:prstGeom>
-          <a:solidFill>
-            <a:srgbClr val="2563EB"/>
-          </a:solidFill>
-          <a:ln/>
-        </p:spPr>
-      </p:sp>
-      <p:sp>
-        <p:nvSpPr>
-          <p:cNvPr id="11" name="Text 9"/>
-          <p:cNvSpPr/>
-          <p:nvPr/>
-        </p:nvSpPr>
-        <p:spPr>
-          <a:xfrm>
-            <a:off x="2080260" y="2011680"/>
-            <a:ext cx="1600200" cy="1371600"/>
-          </a:xfrm>
-          <a:prstGeom prst="rect">
-            <a:avLst/>
-          </a:prstGeom>
-          <a:noFill/>
-          <a:ln/>
-        </p:spPr>
-        <p:txBody>
-          <a:bodyPr wrap="square" rtlCol="0" anchor="ctr"/>
-          <a:lstStyle/>
-          <a:p>
-            <a:pPr algn="ctr" indent="0" marL="0">
-              <a:buNone/>
-            </a:pPr>
-            <a:r>
-              <a:rPr lang="en-US" sz="1100" b="1" dirty="0">
-                <a:solidFill>
-                  <a:srgbClr val="FFFFFF"/>
-                </a:solidFill>
-                <a:latin typeface="Calibri" pitchFamily="34" charset="0"/>
-                <a:ea typeface="Calibri" pitchFamily="34" charset="-122"/>
-                <a:cs typeface="Calibri" pitchFamily="34" charset="-120"/>
-              </a:rPr>
-              <a:t>Eskiden/Şimdi</a:t>
-            </a:r>
-            <a:endParaRPr lang="en-US" sz="1100" dirty="0"/>
-          </a:p>
-        </p:txBody>
-      </p:sp>
-      <p:sp>
-        <p:nvSpPr>
-          <p:cNvPr id="12" name="Shape 10"/>
-          <p:cNvSpPr/>
-          <p:nvPr/>
-        </p:nvSpPr>
-        <p:spPr>
-          <a:xfrm>
-            <a:off x="3771900" y="2011680"/>
-            <a:ext cx="1600200" cy="1371600"/>
-          </a:xfrm>
-          <a:prstGeom prst="roundRect">
-            <a:avLst>
-              <a:gd name="adj" fmla="val 8000"/>
-            </a:avLst>
-          </a:prstGeom>
-          <a:solidFill>
-            <a:srgbClr val="4338CA"/>
-          </a:solidFill>
-          <a:ln/>
-        </p:spPr>
-      </p:sp>
-      <p:sp>
-        <p:nvSpPr>
-          <p:cNvPr id="13" name="Text 11"/>
-          <p:cNvSpPr/>
-          <p:nvPr/>
-        </p:nvSpPr>
-        <p:spPr>
-          <a:xfrm>
-            <a:off x="3771900" y="2011680"/>
-            <a:ext cx="1600200" cy="1371600"/>
-          </a:xfrm>
-          <a:prstGeom prst="rect">
-            <a:avLst/>
-          </a:prstGeom>
-          <a:noFill/>
-          <a:ln/>
-        </p:spPr>
-        <p:txBody>
-          <a:bodyPr wrap="square" rtlCol="0" anchor="ctr"/>
-          <a:lstStyle/>
-          <a:p>
-            <a:pPr algn="ctr" indent="0" marL="0">
-              <a:buNone/>
-            </a:pPr>
-            <a:r>
-              <a:rPr lang="en-US" sz="1100" b="1" dirty="0">
-                <a:solidFill>
-                  <a:srgbClr val="FFFFFF"/>
-                </a:solidFill>
-                <a:latin typeface="Calibri" pitchFamily="34" charset="0"/>
-                <a:ea typeface="Calibri" pitchFamily="34" charset="-122"/>
-                <a:cs typeface="Calibri" pitchFamily="34" charset="-120"/>
-              </a:rPr>
-              <a:t>Toplumsal Dönüşüm</a:t>
-            </a:r>
-            <a:endParaRPr lang="en-US" sz="1100" dirty="0"/>
-          </a:p>
-        </p:txBody>
-      </p:sp>
-      <p:sp>
-        <p:nvSpPr>
-          <p:cNvPr id="14" name="Shape 12"/>
-          <p:cNvSpPr/>
-          <p:nvPr/>
-        </p:nvSpPr>
-        <p:spPr>
-          <a:xfrm>
-            <a:off x="5463540" y="2011680"/>
-            <a:ext cx="1600200" cy="1371600"/>
-          </a:xfrm>
-          <a:prstGeom prst="roundRect">
-            <a:avLst>
-              <a:gd name="adj" fmla="val 8000"/>
-            </a:avLst>
-          </a:prstGeom>
-          <a:solidFill>
-            <a:srgbClr val="16A34A"/>
-          </a:solidFill>
-          <a:ln/>
-        </p:spPr>
-      </p:sp>
-      <p:sp>
-        <p:nvSpPr>
-          <p:cNvPr id="15" name="Text 13"/>
-          <p:cNvSpPr/>
-          <p:nvPr/>
-        </p:nvSpPr>
-        <p:spPr>
-          <a:xfrm>
-            <a:off x="5463540" y="2011680"/>
-            <a:ext cx="1600200" cy="1371600"/>
-          </a:xfrm>
-          <a:prstGeom prst="rect">
-            <a:avLst/>
-          </a:prstGeom>
-          <a:noFill/>
-          <a:ln/>
-        </p:spPr>
-        <p:txBody>
-          <a:bodyPr wrap="square" rtlCol="0" anchor="ctr"/>
-          <a:lstStyle/>
-          <a:p>
-            <a:pPr algn="ctr" indent="0" marL="0">
-              <a:buNone/>
-            </a:pPr>
-            <a:r>
-              <a:rPr lang="en-US" sz="1100" b="1" dirty="0">
-                <a:solidFill>
-                  <a:srgbClr val="FFFFFF"/>
-                </a:solidFill>
-                <a:latin typeface="Calibri" pitchFamily="34" charset="0"/>
-                <a:ea typeface="Calibri" pitchFamily="34" charset="-122"/>
-                <a:cs typeface="Calibri" pitchFamily="34" charset="-120"/>
-              </a:rPr>
-              <a:t>Saygı Analizi</a:t>
-            </a:r>
-            <a:endParaRPr lang="en-US" sz="1100" dirty="0"/>
-          </a:p>
-        </p:txBody>
-      </p:sp>
-      <p:sp>
-        <p:nvSpPr>
-          <p:cNvPr id="16" name="Shape 14"/>
-          <p:cNvSpPr/>
-          <p:nvPr/>
-        </p:nvSpPr>
-        <p:spPr>
-          <a:xfrm>
-            <a:off x="7155180" y="2011680"/>
-            <a:ext cx="1600200" cy="1371600"/>
-          </a:xfrm>
-          <a:prstGeom prst="roundRect">
-            <a:avLst>
-              <a:gd name="adj" fmla="val 8000"/>
-            </a:avLst>
-          </a:prstGeom>
-          <a:solidFill>
-            <a:srgbClr val="7C3AED"/>
-          </a:solidFill>
-          <a:ln/>
-        </p:spPr>
-      </p:sp>
-      <p:sp>
-        <p:nvSpPr>
-          <p:cNvPr id="17" name="Text 15"/>
-          <p:cNvSpPr/>
-          <p:nvPr/>
-        </p:nvSpPr>
-        <p:spPr>
-          <a:xfrm>
-            <a:off x="7155180" y="2011680"/>
-            <a:ext cx="1600200" cy="1371600"/>
-          </a:xfrm>
-          <a:prstGeom prst="rect">
-            <a:avLst/>
-          </a:prstGeom>
-          <a:noFill/>
-          <a:ln/>
-        </p:spPr>
-        <p:txBody>
-          <a:bodyPr wrap="square" rtlCol="0" anchor="ctr"/>
-          <a:lstStyle/>
-          <a:p>
-            <a:pPr algn="ctr" indent="0" marL="0">
-              <a:buNone/>
-            </a:pPr>
-            <a:r>
-              <a:rPr lang="en-US" sz="1100" b="1" dirty="0">
-                <a:solidFill>
-                  <a:srgbClr val="FFFFFF"/>
-                </a:solidFill>
-                <a:latin typeface="Calibri" pitchFamily="34" charset="0"/>
-                <a:ea typeface="Calibri" pitchFamily="34" charset="-122"/>
-                <a:cs typeface="Calibri" pitchFamily="34" charset="-120"/>
-              </a:rPr>
-              <a:t xml:space="preserve">Kuşak Aktarımı</a:t>
-            </a:r>
-            <a:endParaRPr lang="en-US" sz="1100" dirty="0"/>
-          </a:p>
-        </p:txBody>
-      </p:sp>
-      <p:sp>
-        <p:nvSpPr>
-          <p:cNvPr id="18" name="Text 16"/>
-          <p:cNvSpPr/>
-          <p:nvPr/>
-        </p:nvSpPr>
-        <p:spPr>
-          <a:xfrm>
-            <a:off x="457200" y="3931920"/>
-            <a:ext cx="8229600" cy="548640"/>
-          </a:xfrm>
-          <a:prstGeom prst="rect">
-            <a:avLst/>
-          </a:prstGeom>
-          <a:noFill/>
-          <a:ln/>
-        </p:spPr>
-        <p:txBody>
-          <a:bodyPr wrap="square" rtlCol="0" anchor="ctr"/>
-          <a:lstStyle/>
-          <a:p>
-            <a:pPr algn="ctr" indent="0" marL="0">
-              <a:buNone/>
-            </a:pPr>
-            <a:r>
-              <a:rPr lang="en-US" sz="1500" i="1" dirty="0">
-                <a:solidFill>
-                  <a:srgbClr val="FFFFFF"/>
-                </a:solidFill>
-                <a:latin typeface="Calibri" pitchFamily="34" charset="0"/>
-                <a:ea typeface="Calibri" pitchFamily="34" charset="-122"/>
-                <a:cs typeface="Calibri" pitchFamily="34" charset="-120"/>
-              </a:rPr>
-              <a:t xml:space="preserve">Bir sonraki görevde görüşmek üzere!     </a:t>
-            </a:r>
-            <a:endParaRPr lang="en-US" sz="1500" dirty="0"/>
-          </a:p>
-        </p:txBody>
-      </p:sp>
-      <p:pic>
-        <p:nvPicPr>
-          <p:cNvPr id="19" name="Emoji 19" descr="emoji"/>
-          <p:cNvPicPr>
-            <a:picLocks noChangeAspect="1"/>
-          </p:cNvPicPr>
-          <p:nvPr/>
-        </p:nvPicPr>
-        <p:blipFill>
-          <a:blip r:embed="rId100"/>
-          <a:stretch>
-            <a:fillRect/>
-          </a:stretch>
-        </p:blipFill>
-        <p:spPr>
-          <a:xfrm>
-            <a:off x="5905324" y="4110990"/>
-            <a:ext cx="190500" cy="190500"/>
           </a:xfrm>
           <a:prstGeom prst="rect">
             <a:avLst/>
@@ -7690,4 +7539,265 @@
     </a:ext>
   </a:extLst>
 </a:theme>
+</file>
+
+<file path=ppt/theme/theme2.xml><?xml version="1.0" encoding="utf-8"?>
+<a:theme xmlns:a="http://schemas.openxmlformats.org/drawingml/2006/main" name="Office Teması">
+  <a:themeElements>
+    <a:clrScheme name="Office">
+      <a:dk1>
+        <a:sysClr val="windowText" lastClr="000000"/>
+      </a:dk1>
+      <a:lt1>
+        <a:sysClr val="window" lastClr="FFFFFF"/>
+      </a:lt1>
+      <a:dk2>
+        <a:srgbClr val="44546A"/>
+      </a:dk2>
+      <a:lt2>
+        <a:srgbClr val="E7E6E6"/>
+      </a:lt2>
+      <a:accent1>
+        <a:srgbClr val="5B9BD5"/>
+      </a:accent1>
+      <a:accent2>
+        <a:srgbClr val="ED7D31"/>
+      </a:accent2>
+      <a:accent3>
+        <a:srgbClr val="A5A5A5"/>
+      </a:accent3>
+      <a:accent4>
+        <a:srgbClr val="FFC000"/>
+      </a:accent4>
+      <a:accent5>
+        <a:srgbClr val="4472C4"/>
+      </a:accent5>
+      <a:accent6>
+        <a:srgbClr val="70AD47"/>
+      </a:accent6>
+      <a:hlink>
+        <a:srgbClr val="0563C1"/>
+      </a:hlink>
+      <a:folHlink>
+        <a:srgbClr val="954F72"/>
+      </a:folHlink>
+    </a:clrScheme>
+    <a:fontScheme name="Office">
+      <a:majorFont>
+        <a:latin typeface="Calibri Light" panose="020F0302020204030204"/>
+        <a:ea typeface=""/>
+        <a:cs typeface=""/>
+        <a:font script="Jpan" typeface="游ゴシック Light"/>
+        <a:font script="Hang" typeface="맑은 고딕"/>
+        <a:font script="Hans" typeface="等线 Light"/>
+        <a:font script="Hant" typeface="新細明體"/>
+        <a:font script="Arab" typeface="Times New Roman"/>
+        <a:font script="Hebr" typeface="Times New Roman"/>
+        <a:font script="Thai" typeface="Angsana New"/>
+        <a:font script="Ethi" typeface="Nyala"/>
+        <a:font script="Beng" typeface="Vrinda"/>
+        <a:font script="Gujr" typeface="Shruti"/>
+        <a:font script="Khmr" typeface="MoolBoran"/>
+        <a:font script="Knda" typeface="Tunga"/>
+        <a:font script="Guru" typeface="Raavi"/>
+        <a:font script="Cans" typeface="Euphemia"/>
+        <a:font script="Cher" typeface="Plantagenet Cherokee"/>
+        <a:font script="Yiii" typeface="Microsoft Yi Baiti"/>
+        <a:font script="Tibt" typeface="Microsoft Himalaya"/>
+        <a:font script="Thaa" typeface="MV Boli"/>
+        <a:font script="Deva" typeface="Mangal"/>
+        <a:font script="Telu" typeface="Gautami"/>
+        <a:font script="Taml" typeface="Latha"/>
+        <a:font script="Syrc" typeface="Estrangelo Edessa"/>
+        <a:font script="Orya" typeface="Kalinga"/>
+        <a:font script="Mlym" typeface="Kartika"/>
+        <a:font script="Laoo" typeface="DokChampa"/>
+        <a:font script="Sinh" typeface="Iskoola Pota"/>
+        <a:font script="Mong" typeface="Mongolian Baiti"/>
+        <a:font script="Viet" typeface="Times New Roman"/>
+        <a:font script="Uigh" typeface="Microsoft Uighur"/>
+        <a:font script="Geor" typeface="Sylfaen"/>
+      </a:majorFont>
+      <a:minorFont>
+        <a:latin typeface="Calibri" panose="020F0502020204030204"/>
+        <a:ea typeface=""/>
+        <a:cs typeface=""/>
+        <a:font script="Jpan" typeface="游ゴシック"/>
+        <a:font script="Hang" typeface="맑은 고딕"/>
+        <a:font script="Hans" typeface="等线"/>
+        <a:font script="Hant" typeface="新細明體"/>
+        <a:font script="Arab" typeface="Arial"/>
+        <a:font script="Hebr" typeface="Arial"/>
+        <a:font script="Thai" typeface="Cordia New"/>
+        <a:font script="Ethi" typeface="Nyala"/>
+        <a:font script="Beng" typeface="Vrinda"/>
+        <a:font script="Gujr" typeface="Shruti"/>
+        <a:font script="Khmr" typeface="DaunPenh"/>
+        <a:font script="Knda" typeface="Tunga"/>
+        <a:font script="Guru" typeface="Raavi"/>
+        <a:font script="Cans" typeface="Euphemia"/>
+        <a:font script="Cher" typeface="Plantagenet Cherokee"/>
+        <a:font script="Yiii" typeface="Microsoft Yi Baiti"/>
+        <a:font script="Tibt" typeface="Microsoft Himalaya"/>
+        <a:font script="Thaa" typeface="MV Boli"/>
+        <a:font script="Deva" typeface="Mangal"/>
+        <a:font script="Telu" typeface="Gautami"/>
+        <a:font script="Taml" typeface="Latha"/>
+        <a:font script="Syrc" typeface="Estrangelo Edessa"/>
+        <a:font script="Orya" typeface="Kalinga"/>
+        <a:font script="Mlym" typeface="Kartika"/>
+        <a:font script="Laoo" typeface="DokChampa"/>
+        <a:font script="Sinh" typeface="Iskoola Pota"/>
+        <a:font script="Mong" typeface="Mongolian Baiti"/>
+        <a:font script="Viet" typeface="Arial"/>
+        <a:font script="Uigh" typeface="Microsoft Uighur"/>
+        <a:font script="Geor" typeface="Sylfaen"/>
+      </a:minorFont>
+    </a:fontScheme>
+    <a:fmtScheme name="Office">
+      <a:fillStyleLst>
+        <a:solidFill>
+          <a:schemeClr val="phClr"/>
+        </a:solidFill>
+        <a:gradFill rotWithShape="1">
+          <a:gsLst>
+            <a:gs pos="0">
+              <a:schemeClr val="phClr">
+                <a:lumMod val="110000"/>
+                <a:satMod val="105000"/>
+                <a:tint val="67000"/>
+              </a:schemeClr>
+            </a:gs>
+            <a:gs pos="50000">
+              <a:schemeClr val="phClr">
+                <a:lumMod val="105000"/>
+                <a:satMod val="103000"/>
+                <a:tint val="73000"/>
+              </a:schemeClr>
+            </a:gs>
+            <a:gs pos="100000">
+              <a:schemeClr val="phClr">
+                <a:lumMod val="105000"/>
+                <a:satMod val="109000"/>
+                <a:tint val="81000"/>
+              </a:schemeClr>
+            </a:gs>
+          </a:gsLst>
+          <a:lin ang="5400000" scaled="0"/>
+        </a:gradFill>
+        <a:gradFill rotWithShape="1">
+          <a:gsLst>
+            <a:gs pos="0">
+              <a:schemeClr val="phClr">
+                <a:satMod val="103000"/>
+                <a:lumMod val="102000"/>
+                <a:tint val="94000"/>
+              </a:schemeClr>
+            </a:gs>
+            <a:gs pos="50000">
+              <a:schemeClr val="phClr">
+                <a:satMod val="110000"/>
+                <a:lumMod val="100000"/>
+                <a:shade val="100000"/>
+              </a:schemeClr>
+            </a:gs>
+            <a:gs pos="100000">
+              <a:schemeClr val="phClr">
+                <a:lumMod val="99000"/>
+                <a:satMod val="120000"/>
+                <a:shade val="78000"/>
+              </a:schemeClr>
+            </a:gs>
+          </a:gsLst>
+          <a:lin ang="5400000" scaled="0"/>
+        </a:gradFill>
+      </a:fillStyleLst>
+      <a:lnStyleLst>
+        <a:ln w="6350" cap="flat" cmpd="sng" algn="ctr">
+          <a:solidFill>
+            <a:schemeClr val="phClr"/>
+          </a:solidFill>
+          <a:prstDash val="solid"/>
+          <a:miter lim="800000"/>
+        </a:ln>
+        <a:ln w="12700" cap="flat" cmpd="sng" algn="ctr">
+          <a:solidFill>
+            <a:schemeClr val="phClr"/>
+          </a:solidFill>
+          <a:prstDash val="solid"/>
+          <a:miter lim="800000"/>
+        </a:ln>
+        <a:ln w="19050" cap="flat" cmpd="sng" algn="ctr">
+          <a:solidFill>
+            <a:schemeClr val="phClr"/>
+          </a:solidFill>
+          <a:prstDash val="solid"/>
+          <a:miter lim="800000"/>
+        </a:ln>
+      </a:lnStyleLst>
+      <a:effectStyleLst>
+        <a:effectStyle>
+          <a:effectLst/>
+        </a:effectStyle>
+        <a:effectStyle>
+          <a:effectLst/>
+        </a:effectStyle>
+        <a:effectStyle>
+          <a:effectLst>
+            <a:outerShdw blurRad="57150" dist="19050" dir="5400000" algn="ctr" rotWithShape="0">
+              <a:srgbClr val="000000">
+                <a:alpha val="63000"/>
+              </a:srgbClr>
+            </a:outerShdw>
+          </a:effectLst>
+        </a:effectStyle>
+      </a:effectStyleLst>
+      <a:bgFillStyleLst>
+        <a:solidFill>
+          <a:schemeClr val="phClr"/>
+        </a:solidFill>
+        <a:solidFill>
+          <a:schemeClr val="phClr">
+            <a:tint val="95000"/>
+            <a:satMod val="170000"/>
+          </a:schemeClr>
+        </a:solidFill>
+        <a:gradFill rotWithShape="1">
+          <a:gsLst>
+            <a:gs pos="0">
+              <a:schemeClr val="phClr">
+                <a:tint val="93000"/>
+                <a:satMod val="150000"/>
+                <a:shade val="98000"/>
+                <a:lumMod val="102000"/>
+              </a:schemeClr>
+            </a:gs>
+            <a:gs pos="50000">
+              <a:schemeClr val="phClr">
+                <a:tint val="98000"/>
+                <a:satMod val="130000"/>
+                <a:shade val="90000"/>
+                <a:lumMod val="103000"/>
+              </a:schemeClr>
+            </a:gs>
+            <a:gs pos="100000">
+              <a:schemeClr val="phClr">
+                <a:shade val="63000"/>
+                <a:satMod val="120000"/>
+              </a:schemeClr>
+            </a:gs>
+          </a:gsLst>
+          <a:lin ang="5400000" scaled="0"/>
+        </a:gradFill>
+      </a:bgFillStyleLst>
+    </a:fmtScheme>
+  </a:themeElements>
+  <a:objectDefaults/>
+  <a:extraClrSchemeLst/>
+  <a:extLst>
+    <a:ext uri="{05A4C25C-085E-4340-85A3-A5531E510DB2}">
+      <thm15:themeFamily xmlns:thm15="http://schemas.microsoft.com/office/thememl/2012/main" name="Office Theme" id="{62F939B6-93AF-4DB8-9C6B-D6C7DFDC589F}" vid="{4A3C46E8-61CC-4603-A589-7422A47A8E4A}"/>
+    </a:ext>
+  </a:extLst>
+</a:theme>
 </file>